--- a/课件/C2/C2-A-08/C2-A-08.pptx
+++ b/课件/C2/C2-A-08/C2-A-08.pptx
@@ -1,32 +1,32 @@
 
 <file path=ppt/presentation.xml><?xml version="1.0" encoding="utf-8"?>
-<p:presentation xmlns:a="http://schemas.openxmlformats.org/drawingml/2006/main" xmlns:r="http://schemas.openxmlformats.org/officeDocument/2006/relationships" xmlns:p="http://schemas.openxmlformats.org/presentationml/2006/main" saveSubsetFonts="1" autoCompressPictures="0">
+<p:presentation xmlns:a="http://schemas.openxmlformats.org/drawingml/2006/main" xmlns:r="http://schemas.openxmlformats.org/officeDocument/2006/relationships" xmlns:p="http://schemas.openxmlformats.org/presentationml/2006/main" autoCompressPictures="0">
   <p:sldMasterIdLst>
     <p:sldMasterId id="2147483648" r:id="rId1"/>
   </p:sldMasterIdLst>
+  <p:notesMasterIdLst>
+    <p:notesMasterId r:id="rId4"/>
+  </p:notesMasterIdLst>
   <p:sldIdLst>
-    <p:sldId id="256" r:id="rId2"/>
-    <p:sldId id="257" r:id="rId3"/>
-    <p:sldId id="258" r:id="rId4"/>
-    <p:sldId id="259" r:id="rId5"/>
-    <p:sldId id="260" r:id="rId6"/>
-    <p:sldId id="261" r:id="rId7"/>
-    <p:sldId id="262" r:id="rId8"/>
-    <p:sldId id="263" r:id="rId9"/>
-    <p:sldId id="264" r:id="rId10"/>
-    <p:sldId id="265" r:id="rId11"/>
-    <p:sldId id="266" r:id="rId12"/>
-    <p:sldId id="267" r:id="rId13"/>
-    <p:sldId id="268" r:id="rId14"/>
-    <p:sldId id="269" r:id="rId15"/>
-    <p:sldId id="270" r:id="rId16"/>
-    <p:sldId id="271" r:id="rId17"/>
+    <p:sldId id="256" r:id="rId3"/>
+    <p:sldId id="257" r:id="rId5"/>
+    <p:sldId id="258" r:id="rId6"/>
+    <p:sldId id="259" r:id="rId7"/>
+    <p:sldId id="260" r:id="rId8"/>
+    <p:sldId id="261" r:id="rId9"/>
+    <p:sldId id="262" r:id="rId10"/>
+    <p:sldId id="263" r:id="rId11"/>
+    <p:sldId id="264" r:id="rId12"/>
+    <p:sldId id="265" r:id="rId13"/>
+    <p:sldId id="266" r:id="rId14"/>
+    <p:sldId id="267" r:id="rId15"/>
+    <p:sldId id="268" r:id="rId16"/>
+    <p:sldId id="269" r:id="rId17"/>
+    <p:sldId id="270" r:id="rId18"/>
+    <p:sldId id="271" r:id="rId19"/>
   </p:sldIdLst>
-  <p:notesMasterIdLst>
-    <p:notesMasterId r:id="rId18"/>
-  </p:notesMasterIdLst>
-  <p:sldSz cx="12191695" cy="6858000"/>
-  <p:notesSz cx="6858000" cy="12191695"/>
+  <p:sldSz cx="12191365" cy="6858000"/>
+  <p:notesSz cx="6858000" cy="12191365"/>
   <p:defaultTextStyle>
     <a:lvl1pPr marL="0" algn="l" defTabSz="914400" rtl="0" eaLnBrk="1" latinLnBrk="0" hangingPunct="1">
       <a:defRPr sz="1800" kern="1200">
@@ -204,7 +204,6 @@
           <a:p>
             <a:fld id="{5282F153-3F37-0F45-9E97-73ACFA13230C}" type="datetimeFigureOut">
               <a:rPr lang="en-US"/>
-              <a:t>7/23/19</a:t>
             </a:fld>
             <a:endParaRPr lang="en-US"/>
           </a:p>
@@ -271,6 +270,7 @@
               <a:rPr lang="en-US"/>
               <a:t>Click to edit Master text styles</a:t>
             </a:r>
+            <a:endParaRPr lang="en-US"/>
           </a:p>
           <a:p>
             <a:pPr lvl="1"/>
@@ -278,6 +278,7 @@
               <a:rPr lang="en-US"/>
               <a:t>Second level</a:t>
             </a:r>
+            <a:endParaRPr lang="en-US"/>
           </a:p>
           <a:p>
             <a:pPr lvl="2"/>
@@ -285,6 +286,7 @@
               <a:rPr lang="en-US"/>
               <a:t>Third level</a:t>
             </a:r>
+            <a:endParaRPr lang="en-US"/>
           </a:p>
           <a:p>
             <a:pPr lvl="3"/>
@@ -292,6 +294,7 @@
               <a:rPr lang="en-US"/>
               <a:t>Fourth level</a:t>
             </a:r>
+            <a:endParaRPr lang="en-US"/>
           </a:p>
           <a:p>
             <a:pPr lvl="4"/>
@@ -299,6 +302,7 @@
               <a:rPr lang="en-US"/>
               <a:t>Fifth level</a:t>
             </a:r>
+            <a:endParaRPr lang="en-US"/>
           </a:p>
         </p:txBody>
       </p:sp>
@@ -362,18 +366,12 @@
           <a:p>
             <a:fld id="{CE5E9CC1-C706-0F49-92D6-E571CC5EEA8F}" type="slidenum">
               <a:rPr lang="en-US"/>
-              <a:t>‹#›</a:t>
             </a:fld>
             <a:endParaRPr lang="en-US"/>
           </a:p>
         </p:txBody>
       </p:sp>
     </p:spTree>
-    <p:extLst>
-      <p:ext uri="{BB962C8B-B14F-4D97-AF65-F5344CB8AC3E}">
-        <p14:creationId xmlns:p14="http://schemas.microsoft.com/office/powerpoint/2010/main" val="1024086991"/>
-      </p:ext>
-    </p:extLst>
   </p:cSld>
   <p:clrMap bg1="lt1" tx1="dk1" bg2="lt2" tx2="dk2" accent1="accent1" accent2="accent2" accent3="accent3" accent4="accent4" accent5="accent5" accent6="accent6" hlink="hlink" folHlink="folHlink"/>
   <p:notesStyle>
@@ -515,10 +513,6 @@
           <a:bodyPr/>
           <a:lstStyle/>
           <a:p>
-            <a:r>
-              <a:rPr lang="en-US" dirty="0"/>
-              <a:t/>
-            </a:r>
             <a:endParaRPr lang="en-US" dirty="0"/>
           </a:p>
         </p:txBody>
@@ -540,18 +534,12 @@
           <a:p>
             <a:fld id="{F7021451-1387-4CA6-816F-3879F97B5CBC}" type="slidenum">
               <a:rPr lang="en-US"/>
-              <a:t>1</a:t>
             </a:fld>
             <a:endParaRPr lang="en-US"/>
           </a:p>
         </p:txBody>
       </p:sp>
     </p:spTree>
-    <p:extLst>
-      <p:ext uri="{BB962C8B-B14F-4D97-AF65-F5344CB8AC3E}">
-        <p14:creationId xmlns:p14="http://schemas.microsoft.com/office/powerpoint/2010/main" val="1024086991"/>
-      </p:ext>
-    </p:extLst>
   </p:cSld>
   <p:clrMapOvr>
     <a:masterClrMapping/>
@@ -603,10 +591,6 @@
           <a:bodyPr/>
           <a:lstStyle/>
           <a:p>
-            <a:r>
-              <a:rPr lang="en-US" dirty="0"/>
-              <a:t/>
-            </a:r>
             <a:endParaRPr lang="en-US" dirty="0"/>
           </a:p>
         </p:txBody>
@@ -628,18 +612,12 @@
           <a:p>
             <a:fld id="{F7021451-1387-4CA6-816F-3879F97B5CBC}" type="slidenum">
               <a:rPr lang="en-US"/>
-              <a:t>10</a:t>
             </a:fld>
             <a:endParaRPr lang="en-US"/>
           </a:p>
         </p:txBody>
       </p:sp>
     </p:spTree>
-    <p:extLst>
-      <p:ext uri="{BB962C8B-B14F-4D97-AF65-F5344CB8AC3E}">
-        <p14:creationId xmlns:p14="http://schemas.microsoft.com/office/powerpoint/2010/main" val="1024086991"/>
-      </p:ext>
-    </p:extLst>
   </p:cSld>
   <p:clrMapOvr>
     <a:masterClrMapping/>
@@ -691,10 +669,6 @@
           <a:bodyPr/>
           <a:lstStyle/>
           <a:p>
-            <a:r>
-              <a:rPr lang="en-US" dirty="0"/>
-              <a:t/>
-            </a:r>
             <a:endParaRPr lang="en-US" dirty="0"/>
           </a:p>
         </p:txBody>
@@ -716,18 +690,12 @@
           <a:p>
             <a:fld id="{F7021451-1387-4CA6-816F-3879F97B5CBC}" type="slidenum">
               <a:rPr lang="en-US"/>
-              <a:t>11</a:t>
             </a:fld>
             <a:endParaRPr lang="en-US"/>
           </a:p>
         </p:txBody>
       </p:sp>
     </p:spTree>
-    <p:extLst>
-      <p:ext uri="{BB962C8B-B14F-4D97-AF65-F5344CB8AC3E}">
-        <p14:creationId xmlns:p14="http://schemas.microsoft.com/office/powerpoint/2010/main" val="1024086991"/>
-      </p:ext>
-    </p:extLst>
   </p:cSld>
   <p:clrMapOvr>
     <a:masterClrMapping/>
@@ -779,10 +747,6 @@
           <a:bodyPr/>
           <a:lstStyle/>
           <a:p>
-            <a:r>
-              <a:rPr lang="en-US" dirty="0"/>
-              <a:t/>
-            </a:r>
             <a:endParaRPr lang="en-US" dirty="0"/>
           </a:p>
         </p:txBody>
@@ -804,18 +768,12 @@
           <a:p>
             <a:fld id="{F7021451-1387-4CA6-816F-3879F97B5CBC}" type="slidenum">
               <a:rPr lang="en-US"/>
-              <a:t>12</a:t>
             </a:fld>
             <a:endParaRPr lang="en-US"/>
           </a:p>
         </p:txBody>
       </p:sp>
     </p:spTree>
-    <p:extLst>
-      <p:ext uri="{BB962C8B-B14F-4D97-AF65-F5344CB8AC3E}">
-        <p14:creationId xmlns:p14="http://schemas.microsoft.com/office/powerpoint/2010/main" val="1024086991"/>
-      </p:ext>
-    </p:extLst>
   </p:cSld>
   <p:clrMapOvr>
     <a:masterClrMapping/>
@@ -867,10 +825,6 @@
           <a:bodyPr/>
           <a:lstStyle/>
           <a:p>
-            <a:r>
-              <a:rPr lang="en-US" dirty="0"/>
-              <a:t/>
-            </a:r>
             <a:endParaRPr lang="en-US" dirty="0"/>
           </a:p>
         </p:txBody>
@@ -892,18 +846,12 @@
           <a:p>
             <a:fld id="{F7021451-1387-4CA6-816F-3879F97B5CBC}" type="slidenum">
               <a:rPr lang="en-US"/>
-              <a:t>13</a:t>
             </a:fld>
             <a:endParaRPr lang="en-US"/>
           </a:p>
         </p:txBody>
       </p:sp>
     </p:spTree>
-    <p:extLst>
-      <p:ext uri="{BB962C8B-B14F-4D97-AF65-F5344CB8AC3E}">
-        <p14:creationId xmlns:p14="http://schemas.microsoft.com/office/powerpoint/2010/main" val="1024086991"/>
-      </p:ext>
-    </p:extLst>
   </p:cSld>
   <p:clrMapOvr>
     <a:masterClrMapping/>
@@ -955,10 +903,6 @@
           <a:bodyPr/>
           <a:lstStyle/>
           <a:p>
-            <a:r>
-              <a:rPr lang="en-US" dirty="0"/>
-              <a:t/>
-            </a:r>
             <a:endParaRPr lang="en-US" dirty="0"/>
           </a:p>
         </p:txBody>
@@ -980,18 +924,12 @@
           <a:p>
             <a:fld id="{F7021451-1387-4CA6-816F-3879F97B5CBC}" type="slidenum">
               <a:rPr lang="en-US"/>
-              <a:t>14</a:t>
             </a:fld>
             <a:endParaRPr lang="en-US"/>
           </a:p>
         </p:txBody>
       </p:sp>
     </p:spTree>
-    <p:extLst>
-      <p:ext uri="{BB962C8B-B14F-4D97-AF65-F5344CB8AC3E}">
-        <p14:creationId xmlns:p14="http://schemas.microsoft.com/office/powerpoint/2010/main" val="1024086991"/>
-      </p:ext>
-    </p:extLst>
   </p:cSld>
   <p:clrMapOvr>
     <a:masterClrMapping/>
@@ -1043,10 +981,6 @@
           <a:bodyPr/>
           <a:lstStyle/>
           <a:p>
-            <a:r>
-              <a:rPr lang="en-US" dirty="0"/>
-              <a:t/>
-            </a:r>
             <a:endParaRPr lang="en-US" dirty="0"/>
           </a:p>
         </p:txBody>
@@ -1068,18 +1002,12 @@
           <a:p>
             <a:fld id="{F7021451-1387-4CA6-816F-3879F97B5CBC}" type="slidenum">
               <a:rPr lang="en-US"/>
-              <a:t>15</a:t>
             </a:fld>
             <a:endParaRPr lang="en-US"/>
           </a:p>
         </p:txBody>
       </p:sp>
     </p:spTree>
-    <p:extLst>
-      <p:ext uri="{BB962C8B-B14F-4D97-AF65-F5344CB8AC3E}">
-        <p14:creationId xmlns:p14="http://schemas.microsoft.com/office/powerpoint/2010/main" val="1024086991"/>
-      </p:ext>
-    </p:extLst>
   </p:cSld>
   <p:clrMapOvr>
     <a:masterClrMapping/>
@@ -1131,10 +1059,6 @@
           <a:bodyPr/>
           <a:lstStyle/>
           <a:p>
-            <a:r>
-              <a:rPr lang="en-US" dirty="0"/>
-              <a:t/>
-            </a:r>
             <a:endParaRPr lang="en-US" dirty="0"/>
           </a:p>
         </p:txBody>
@@ -1156,18 +1080,12 @@
           <a:p>
             <a:fld id="{F7021451-1387-4CA6-816F-3879F97B5CBC}" type="slidenum">
               <a:rPr lang="en-US"/>
-              <a:t>16</a:t>
             </a:fld>
             <a:endParaRPr lang="en-US"/>
           </a:p>
         </p:txBody>
       </p:sp>
     </p:spTree>
-    <p:extLst>
-      <p:ext uri="{BB962C8B-B14F-4D97-AF65-F5344CB8AC3E}">
-        <p14:creationId xmlns:p14="http://schemas.microsoft.com/office/powerpoint/2010/main" val="1024086991"/>
-      </p:ext>
-    </p:extLst>
   </p:cSld>
   <p:clrMapOvr>
     <a:masterClrMapping/>
@@ -1219,10 +1137,6 @@
           <a:bodyPr/>
           <a:lstStyle/>
           <a:p>
-            <a:r>
-              <a:rPr lang="en-US" dirty="0"/>
-              <a:t/>
-            </a:r>
             <a:endParaRPr lang="en-US" dirty="0"/>
           </a:p>
         </p:txBody>
@@ -1244,18 +1158,12 @@
           <a:p>
             <a:fld id="{F7021451-1387-4CA6-816F-3879F97B5CBC}" type="slidenum">
               <a:rPr lang="en-US"/>
-              <a:t>2</a:t>
             </a:fld>
             <a:endParaRPr lang="en-US"/>
           </a:p>
         </p:txBody>
       </p:sp>
     </p:spTree>
-    <p:extLst>
-      <p:ext uri="{BB962C8B-B14F-4D97-AF65-F5344CB8AC3E}">
-        <p14:creationId xmlns:p14="http://schemas.microsoft.com/office/powerpoint/2010/main" val="1024086991"/>
-      </p:ext>
-    </p:extLst>
   </p:cSld>
   <p:clrMapOvr>
     <a:masterClrMapping/>
@@ -1307,10 +1215,6 @@
           <a:bodyPr/>
           <a:lstStyle/>
           <a:p>
-            <a:r>
-              <a:rPr lang="en-US" dirty="0"/>
-              <a:t/>
-            </a:r>
             <a:endParaRPr lang="en-US" dirty="0"/>
           </a:p>
         </p:txBody>
@@ -1332,18 +1236,12 @@
           <a:p>
             <a:fld id="{F7021451-1387-4CA6-816F-3879F97B5CBC}" type="slidenum">
               <a:rPr lang="en-US"/>
-              <a:t>3</a:t>
             </a:fld>
             <a:endParaRPr lang="en-US"/>
           </a:p>
         </p:txBody>
       </p:sp>
     </p:spTree>
-    <p:extLst>
-      <p:ext uri="{BB962C8B-B14F-4D97-AF65-F5344CB8AC3E}">
-        <p14:creationId xmlns:p14="http://schemas.microsoft.com/office/powerpoint/2010/main" val="1024086991"/>
-      </p:ext>
-    </p:extLst>
   </p:cSld>
   <p:clrMapOvr>
     <a:masterClrMapping/>
@@ -1395,10 +1293,6 @@
           <a:bodyPr/>
           <a:lstStyle/>
           <a:p>
-            <a:r>
-              <a:rPr lang="en-US" dirty="0"/>
-              <a:t/>
-            </a:r>
             <a:endParaRPr lang="en-US" dirty="0"/>
           </a:p>
         </p:txBody>
@@ -1420,18 +1314,12 @@
           <a:p>
             <a:fld id="{F7021451-1387-4CA6-816F-3879F97B5CBC}" type="slidenum">
               <a:rPr lang="en-US"/>
-              <a:t>4</a:t>
             </a:fld>
             <a:endParaRPr lang="en-US"/>
           </a:p>
         </p:txBody>
       </p:sp>
     </p:spTree>
-    <p:extLst>
-      <p:ext uri="{BB962C8B-B14F-4D97-AF65-F5344CB8AC3E}">
-        <p14:creationId xmlns:p14="http://schemas.microsoft.com/office/powerpoint/2010/main" val="1024086991"/>
-      </p:ext>
-    </p:extLst>
   </p:cSld>
   <p:clrMapOvr>
     <a:masterClrMapping/>
@@ -1483,10 +1371,6 @@
           <a:bodyPr/>
           <a:lstStyle/>
           <a:p>
-            <a:r>
-              <a:rPr lang="en-US" dirty="0"/>
-              <a:t/>
-            </a:r>
             <a:endParaRPr lang="en-US" dirty="0"/>
           </a:p>
         </p:txBody>
@@ -1508,18 +1392,12 @@
           <a:p>
             <a:fld id="{F7021451-1387-4CA6-816F-3879F97B5CBC}" type="slidenum">
               <a:rPr lang="en-US"/>
-              <a:t>5</a:t>
             </a:fld>
             <a:endParaRPr lang="en-US"/>
           </a:p>
         </p:txBody>
       </p:sp>
     </p:spTree>
-    <p:extLst>
-      <p:ext uri="{BB962C8B-B14F-4D97-AF65-F5344CB8AC3E}">
-        <p14:creationId xmlns:p14="http://schemas.microsoft.com/office/powerpoint/2010/main" val="1024086991"/>
-      </p:ext>
-    </p:extLst>
   </p:cSld>
   <p:clrMapOvr>
     <a:masterClrMapping/>
@@ -1571,10 +1449,6 @@
           <a:bodyPr/>
           <a:lstStyle/>
           <a:p>
-            <a:r>
-              <a:rPr lang="en-US" dirty="0"/>
-              <a:t/>
-            </a:r>
             <a:endParaRPr lang="en-US" dirty="0"/>
           </a:p>
         </p:txBody>
@@ -1596,18 +1470,12 @@
           <a:p>
             <a:fld id="{F7021451-1387-4CA6-816F-3879F97B5CBC}" type="slidenum">
               <a:rPr lang="en-US"/>
-              <a:t>6</a:t>
             </a:fld>
             <a:endParaRPr lang="en-US"/>
           </a:p>
         </p:txBody>
       </p:sp>
     </p:spTree>
-    <p:extLst>
-      <p:ext uri="{BB962C8B-B14F-4D97-AF65-F5344CB8AC3E}">
-        <p14:creationId xmlns:p14="http://schemas.microsoft.com/office/powerpoint/2010/main" val="1024086991"/>
-      </p:ext>
-    </p:extLst>
   </p:cSld>
   <p:clrMapOvr>
     <a:masterClrMapping/>
@@ -1659,10 +1527,6 @@
           <a:bodyPr/>
           <a:lstStyle/>
           <a:p>
-            <a:r>
-              <a:rPr lang="en-US" dirty="0"/>
-              <a:t/>
-            </a:r>
             <a:endParaRPr lang="en-US" dirty="0"/>
           </a:p>
         </p:txBody>
@@ -1684,18 +1548,12 @@
           <a:p>
             <a:fld id="{F7021451-1387-4CA6-816F-3879F97B5CBC}" type="slidenum">
               <a:rPr lang="en-US"/>
-              <a:t>7</a:t>
             </a:fld>
             <a:endParaRPr lang="en-US"/>
           </a:p>
         </p:txBody>
       </p:sp>
     </p:spTree>
-    <p:extLst>
-      <p:ext uri="{BB962C8B-B14F-4D97-AF65-F5344CB8AC3E}">
-        <p14:creationId xmlns:p14="http://schemas.microsoft.com/office/powerpoint/2010/main" val="1024086991"/>
-      </p:ext>
-    </p:extLst>
   </p:cSld>
   <p:clrMapOvr>
     <a:masterClrMapping/>
@@ -1747,10 +1605,6 @@
           <a:bodyPr/>
           <a:lstStyle/>
           <a:p>
-            <a:r>
-              <a:rPr lang="en-US" dirty="0"/>
-              <a:t/>
-            </a:r>
             <a:endParaRPr lang="en-US" dirty="0"/>
           </a:p>
         </p:txBody>
@@ -1772,18 +1626,12 @@
           <a:p>
             <a:fld id="{F7021451-1387-4CA6-816F-3879F97B5CBC}" type="slidenum">
               <a:rPr lang="en-US"/>
-              <a:t>8</a:t>
             </a:fld>
             <a:endParaRPr lang="en-US"/>
           </a:p>
         </p:txBody>
       </p:sp>
     </p:spTree>
-    <p:extLst>
-      <p:ext uri="{BB962C8B-B14F-4D97-AF65-F5344CB8AC3E}">
-        <p14:creationId xmlns:p14="http://schemas.microsoft.com/office/powerpoint/2010/main" val="1024086991"/>
-      </p:ext>
-    </p:extLst>
   </p:cSld>
   <p:clrMapOvr>
     <a:masterClrMapping/>
@@ -1835,10 +1683,6 @@
           <a:bodyPr/>
           <a:lstStyle/>
           <a:p>
-            <a:r>
-              <a:rPr lang="en-US" dirty="0"/>
-              <a:t/>
-            </a:r>
             <a:endParaRPr lang="en-US" dirty="0"/>
           </a:p>
         </p:txBody>
@@ -1860,18 +1704,12 @@
           <a:p>
             <a:fld id="{F7021451-1387-4CA6-816F-3879F97B5CBC}" type="slidenum">
               <a:rPr lang="en-US"/>
-              <a:t>9</a:t>
             </a:fld>
             <a:endParaRPr lang="en-US"/>
           </a:p>
         </p:txBody>
       </p:sp>
     </p:spTree>
-    <p:extLst>
-      <p:ext uri="{BB962C8B-B14F-4D97-AF65-F5344CB8AC3E}">
-        <p14:creationId xmlns:p14="http://schemas.microsoft.com/office/powerpoint/2010/main" val="1024086991"/>
-      </p:ext>
-    </p:extLst>
   </p:cSld>
   <p:clrMapOvr>
     <a:masterClrMapping/>
@@ -1912,6 +1750,11 @@
 <file path=ppt/slideMasters/slideMaster1.xml><?xml version="1.0" encoding="utf-8"?>
 <p:sldMaster xmlns:a="http://schemas.openxmlformats.org/drawingml/2006/main" xmlns:r="http://schemas.openxmlformats.org/officeDocument/2006/relationships" xmlns:p="http://schemas.openxmlformats.org/presentationml/2006/main">
   <p:cSld>
+    <p:bg>
+      <p:bgRef idx="1001">
+        <a:schemeClr val="bg1"/>
+      </p:bgRef>
+    </p:bg>
     <p:spTree>
       <p:nvGrpSpPr>
         <p:cNvPr id="1" name=""/>
@@ -1955,7 +1798,7 @@
         <a:spcBef>
           <a:spcPct val="20000"/>
         </a:spcBef>
-        <a:buFont typeface="Arial" pitchFamily="34" charset="0"/>
+        <a:buFont typeface="Arial" panose="020B0604020202020204" pitchFamily="34" charset="0"/>
         <a:buChar char="•"/>
         <a:defRPr sz="3200" kern="1200">
           <a:solidFill>
@@ -1970,7 +1813,7 @@
         <a:spcBef>
           <a:spcPct val="20000"/>
         </a:spcBef>
-        <a:buFont typeface="Arial" pitchFamily="34" charset="0"/>
+        <a:buFont typeface="Arial" panose="020B0604020202020204" pitchFamily="34" charset="0"/>
         <a:buChar char="–"/>
         <a:defRPr sz="2800" kern="1200">
           <a:solidFill>
@@ -1985,7 +1828,7 @@
         <a:spcBef>
           <a:spcPct val="20000"/>
         </a:spcBef>
-        <a:buFont typeface="Arial" pitchFamily="34" charset="0"/>
+        <a:buFont typeface="Arial" panose="020B0604020202020204" pitchFamily="34" charset="0"/>
         <a:buChar char="•"/>
         <a:defRPr sz="2400" kern="1200">
           <a:solidFill>
@@ -2000,7 +1843,7 @@
         <a:spcBef>
           <a:spcPct val="20000"/>
         </a:spcBef>
-        <a:buFont typeface="Arial" pitchFamily="34" charset="0"/>
+        <a:buFont typeface="Arial" panose="020B0604020202020204" pitchFamily="34" charset="0"/>
         <a:buChar char="–"/>
         <a:defRPr sz="2000" kern="1200">
           <a:solidFill>
@@ -2015,7 +1858,7 @@
         <a:spcBef>
           <a:spcPct val="20000"/>
         </a:spcBef>
-        <a:buFont typeface="Arial" pitchFamily="34" charset="0"/>
+        <a:buFont typeface="Arial" panose="020B0604020202020204" pitchFamily="34" charset="0"/>
         <a:buChar char="»"/>
         <a:defRPr sz="2000" kern="1200">
           <a:solidFill>
@@ -2030,7 +1873,7 @@
         <a:spcBef>
           <a:spcPct val="20000"/>
         </a:spcBef>
-        <a:buFont typeface="Arial" pitchFamily="34" charset="0"/>
+        <a:buFont typeface="Arial" panose="020B0604020202020204" pitchFamily="34" charset="0"/>
         <a:buChar char="•"/>
         <a:defRPr sz="2000" kern="1200">
           <a:solidFill>
@@ -2045,7 +1888,7 @@
         <a:spcBef>
           <a:spcPct val="20000"/>
         </a:spcBef>
-        <a:buFont typeface="Arial" pitchFamily="34" charset="0"/>
+        <a:buFont typeface="Arial" panose="020B0604020202020204" pitchFamily="34" charset="0"/>
         <a:buChar char="•"/>
         <a:defRPr sz="2000" kern="1200">
           <a:solidFill>
@@ -2060,7 +1903,7 @@
         <a:spcBef>
           <a:spcPct val="20000"/>
         </a:spcBef>
-        <a:buFont typeface="Arial" pitchFamily="34" charset="0"/>
+        <a:buFont typeface="Arial" panose="020B0604020202020204" pitchFamily="34" charset="0"/>
         <a:buChar char="•"/>
         <a:defRPr sz="2000" kern="1200">
           <a:solidFill>
@@ -2075,7 +1918,7 @@
         <a:spcBef>
           <a:spcPct val="20000"/>
         </a:spcBef>
-        <a:buFont typeface="Arial" pitchFamily="34" charset="0"/>
+        <a:buFont typeface="Arial" panose="020B0604020202020204" pitchFamily="34" charset="0"/>
         <a:buChar char="•"/>
         <a:defRPr sz="2000" kern="1200">
           <a:solidFill>
@@ -2188,7 +2031,7 @@
 
 <file path=ppt/slides/slide1.xml><?xml version="1.0" encoding="utf-8"?>
 <p:sld xmlns:a="http://schemas.openxmlformats.org/drawingml/2006/main" xmlns:r="http://schemas.openxmlformats.org/officeDocument/2006/relationships" xmlns:p="http://schemas.openxmlformats.org/presentationml/2006/main">
-  <p:cSld name="Slide 1">
+  <p:cSld>
     <p:bg>
       <p:bgPr>
         <a:blipFill dpi="0" rotWithShape="1">
@@ -2232,13 +2075,12 @@
             <a:avLst/>
           </a:prstGeom>
           <a:noFill/>
-          <a:ln/>
         </p:spPr>
         <p:txBody>
           <a:bodyPr wrap="square" rtlCol="0" anchor="ctr"/>
           <a:lstStyle/>
           <a:p>
-            <a:pPr algn="r" indent="0" marL="0">
+            <a:pPr marL="0" indent="0" algn="r">
               <a:buNone/>
             </a:pPr>
             <a:r>
@@ -2246,9 +2088,9 @@
                 <a:solidFill>
                   <a:srgbClr val="8A9099"/>
                 </a:solidFill>
-                <a:latin typeface="微软雅黑" pitchFamily="34" charset="0"/>
-                <a:ea typeface="微软雅黑" pitchFamily="34" charset="-122"/>
-                <a:cs typeface="微软雅黑" pitchFamily="34" charset="-120"/>
+                <a:latin typeface="微软雅黑" panose="020B0503020204020204" pitchFamily="34" charset="-122"/>
+                <a:ea typeface="微软雅黑" panose="020B0503020204020204" pitchFamily="34" charset="-122"/>
+                <a:cs typeface="微软雅黑" panose="020B0503020204020204" pitchFamily="34" charset="-120"/>
               </a:rPr>
               <a:t>1 / 16</a:t>
             </a:r>
@@ -2271,13 +2113,12 @@
             <a:avLst/>
           </a:prstGeom>
           <a:noFill/>
-          <a:ln/>
         </p:spPr>
         <p:txBody>
           <a:bodyPr wrap="square" rtlCol="0" anchor="ctr"/>
           <a:lstStyle/>
           <a:p>
-            <a:pPr algn="ctr" indent="0" marL="0">
+            <a:pPr marL="0" indent="0" algn="ctr">
               <a:buNone/>
             </a:pPr>
             <a:r>
@@ -2285,9 +2126,9 @@
                 <a:solidFill>
                   <a:srgbClr val="1F4E9C"/>
                 </a:solidFill>
-                <a:latin typeface="微软雅黑" pitchFamily="34" charset="0"/>
-                <a:ea typeface="微软雅黑" pitchFamily="34" charset="-122"/>
-                <a:cs typeface="微软雅黑" pitchFamily="34" charset="-120"/>
+                <a:latin typeface="微软雅黑" panose="020B0503020204020204" pitchFamily="34" charset="-122"/>
+                <a:ea typeface="微软雅黑" panose="020B0503020204020204" pitchFamily="34" charset="-122"/>
+                <a:cs typeface="微软雅黑" panose="020B0503020204020204" pitchFamily="34" charset="-120"/>
               </a:rPr>
               <a:t>重邮802 数据结构代码课程</a:t>
             </a:r>
@@ -2310,13 +2151,12 @@
             <a:avLst/>
           </a:prstGeom>
           <a:noFill/>
-          <a:ln/>
         </p:spPr>
         <p:txBody>
           <a:bodyPr wrap="square" rtlCol="0" anchor="ctr"/>
           <a:lstStyle/>
           <a:p>
-            <a:pPr algn="ctr" indent="0" marL="0">
+            <a:pPr marL="0" indent="0" algn="ctr">
               <a:buNone/>
             </a:pPr>
             <a:r>
@@ -2324,9 +2164,9 @@
                 <a:solidFill>
                   <a:srgbClr val="1F2329"/>
                 </a:solidFill>
-                <a:latin typeface="微软雅黑" pitchFamily="34" charset="0"/>
-                <a:ea typeface="微软雅黑" pitchFamily="34" charset="-122"/>
-                <a:cs typeface="微软雅黑" pitchFamily="34" charset="-120"/>
+                <a:latin typeface="微软雅黑" panose="020B0503020204020204" pitchFamily="34" charset="-122"/>
+                <a:ea typeface="微软雅黑" panose="020B0503020204020204" pitchFamily="34" charset="-122"/>
+                <a:cs typeface="微软雅黑" panose="020B0503020204020204" pitchFamily="34" charset="-120"/>
               </a:rPr>
               <a:t>数据结构基础阶段</a:t>
             </a:r>
@@ -2349,13 +2189,12 @@
             <a:avLst/>
           </a:prstGeom>
           <a:noFill/>
-          <a:ln/>
         </p:spPr>
         <p:txBody>
           <a:bodyPr wrap="square" rtlCol="0" anchor="ctr"/>
           <a:lstStyle/>
           <a:p>
-            <a:pPr algn="ctr" indent="0" marL="0">
+            <a:pPr marL="0" indent="0" algn="ctr">
               <a:buNone/>
             </a:pPr>
             <a:r>
@@ -2363,9 +2202,9 @@
                 <a:solidFill>
                   <a:srgbClr val="1F2329"/>
                 </a:solidFill>
-                <a:latin typeface="微软雅黑" pitchFamily="34" charset="0"/>
-                <a:ea typeface="微软雅黑" pitchFamily="34" charset="-122"/>
-                <a:cs typeface="微软雅黑" pitchFamily="34" charset="-120"/>
+                <a:latin typeface="微软雅黑" panose="020B0503020204020204" pitchFamily="34" charset="-122"/>
+                <a:ea typeface="微软雅黑" panose="020B0503020204020204" pitchFamily="34" charset="-122"/>
+                <a:cs typeface="微软雅黑" panose="020B0503020204020204" pitchFamily="34" charset="-120"/>
               </a:rPr>
               <a:t>第8节 线索二叉树、树与森林</a:t>
             </a:r>
@@ -2388,13 +2227,12 @@
             <a:avLst/>
           </a:prstGeom>
           <a:noFill/>
-          <a:ln/>
         </p:spPr>
         <p:txBody>
           <a:bodyPr wrap="square" rtlCol="0" anchor="ctr"/>
           <a:lstStyle/>
           <a:p>
-            <a:pPr algn="ctr" indent="0" marL="0">
+            <a:pPr marL="0" indent="0" algn="ctr">
               <a:buNone/>
             </a:pPr>
             <a:r>
@@ -2402,9 +2240,9 @@
                 <a:solidFill>
                   <a:srgbClr val="8A9099"/>
                 </a:solidFill>
-                <a:latin typeface="微软雅黑" pitchFamily="34" charset="0"/>
-                <a:ea typeface="微软雅黑" pitchFamily="34" charset="-122"/>
-                <a:cs typeface="微软雅黑" pitchFamily="34" charset="-120"/>
+                <a:latin typeface="微软雅黑" panose="020B0503020204020204" pitchFamily="34" charset="-122"/>
+                <a:ea typeface="微软雅黑" panose="020B0503020204020204" pitchFamily="34" charset="-122"/>
+                <a:cs typeface="微软雅黑" panose="020B0503020204020204" pitchFamily="34" charset="-120"/>
               </a:rPr>
               <a:t>阶段：基础 ｜ 主讲：牙膏学长 ｜ 预计40分钟 ｜ 资料答疑：伴梦研途QQ群</a:t>
             </a:r>
@@ -2422,7 +2260,7 @@
 
 <file path=ppt/slides/slide10.xml><?xml version="1.0" encoding="utf-8"?>
 <p:sld xmlns:a="http://schemas.openxmlformats.org/drawingml/2006/main" xmlns:r="http://schemas.openxmlformats.org/officeDocument/2006/relationships" xmlns:p="http://schemas.openxmlformats.org/presentationml/2006/main">
-  <p:cSld name="Slide 10">
+  <p:cSld>
     <p:bg>
       <p:bgPr>
         <a:blipFill dpi="0" rotWithShape="1">
@@ -2466,13 +2304,12 @@
             <a:avLst/>
           </a:prstGeom>
           <a:noFill/>
-          <a:ln/>
         </p:spPr>
         <p:txBody>
           <a:bodyPr wrap="square" rtlCol="0" anchor="ctr"/>
           <a:lstStyle/>
           <a:p>
-            <a:pPr algn="r" indent="0" marL="0">
+            <a:pPr marL="0" indent="0" algn="r">
               <a:buNone/>
             </a:pPr>
             <a:r>
@@ -2480,9 +2317,9 @@
                 <a:solidFill>
                   <a:srgbClr val="8A9099"/>
                 </a:solidFill>
-                <a:latin typeface="微软雅黑" pitchFamily="34" charset="0"/>
-                <a:ea typeface="微软雅黑" pitchFamily="34" charset="-122"/>
-                <a:cs typeface="微软雅黑" pitchFamily="34" charset="-120"/>
+                <a:latin typeface="微软雅黑" panose="020B0503020204020204" pitchFamily="34" charset="-122"/>
+                <a:ea typeface="微软雅黑" panose="020B0503020204020204" pitchFamily="34" charset="-122"/>
+                <a:cs typeface="微软雅黑" panose="020B0503020204020204" pitchFamily="34" charset="-120"/>
               </a:rPr>
               <a:t>10 / 16</a:t>
             </a:r>
@@ -2505,13 +2342,12 @@
             <a:avLst/>
           </a:prstGeom>
           <a:noFill/>
-          <a:ln/>
         </p:spPr>
         <p:txBody>
           <a:bodyPr wrap="square" rtlCol="0" anchor="ctr"/>
           <a:lstStyle/>
           <a:p>
-            <a:pPr algn="l" indent="0" marL="0">
+            <a:pPr marL="0" indent="0" algn="l">
               <a:buNone/>
             </a:pPr>
             <a:r>
@@ -2519,9 +2355,9 @@
                 <a:solidFill>
                   <a:srgbClr val="1F4E9C"/>
                 </a:solidFill>
-                <a:latin typeface="微软雅黑" pitchFamily="34" charset="0"/>
-                <a:ea typeface="微软雅黑" pitchFamily="34" charset="-122"/>
-                <a:cs typeface="微软雅黑" pitchFamily="34" charset="-120"/>
+                <a:latin typeface="微软雅黑" panose="020B0503020204020204" pitchFamily="34" charset="-122"/>
+                <a:ea typeface="微软雅黑" panose="020B0503020204020204" pitchFamily="34" charset="-122"/>
+                <a:cs typeface="微软雅黑" panose="020B0503020204020204" pitchFamily="34" charset="-120"/>
               </a:rPr>
               <a:t>树转二叉树</a:t>
             </a:r>
@@ -2544,13 +2380,12 @@
             <a:avLst/>
           </a:prstGeom>
           <a:noFill/>
-          <a:ln/>
         </p:spPr>
         <p:txBody>
           <a:bodyPr wrap="square" rtlCol="0" anchor="ctr"/>
           <a:lstStyle/>
           <a:p>
-            <a:pPr algn="l" indent="0" marL="0">
+            <a:pPr marL="0" indent="0" algn="l">
               <a:buNone/>
             </a:pPr>
             <a:r>
@@ -2558,9 +2393,9 @@
                 <a:solidFill>
                   <a:srgbClr val="1F2329"/>
                 </a:solidFill>
-                <a:latin typeface="微软雅黑" pitchFamily="34" charset="0"/>
-                <a:ea typeface="微软雅黑" pitchFamily="34" charset="-122"/>
-                <a:cs typeface="微软雅黑" pitchFamily="34" charset="-120"/>
+                <a:latin typeface="微软雅黑" panose="020B0503020204020204" pitchFamily="34" charset="-122"/>
+                <a:ea typeface="微软雅黑" panose="020B0503020204020204" pitchFamily="34" charset="-122"/>
+                <a:cs typeface="微软雅黑" panose="020B0503020204020204" pitchFamily="34" charset="-120"/>
               </a:rPr>
               <a:t>树、森林转二叉树：三步画法</a:t>
             </a:r>
@@ -2583,13 +2418,12 @@
             <a:avLst/>
           </a:prstGeom>
           <a:noFill/>
-          <a:ln/>
         </p:spPr>
         <p:txBody>
           <a:bodyPr wrap="square" rtlCol="0" anchor="t"/>
           <a:lstStyle/>
           <a:p>
-            <a:pPr algn="l" indent="0" marL="0">
+            <a:pPr marL="0" indent="0" algn="l">
               <a:lnSpc>
                 <a:spcPct val="115000"/>
               </a:lnSpc>
@@ -2600,25 +2434,68 @@
                 <a:solidFill>
                   <a:srgbClr val="1F4E9C"/>
                 </a:solidFill>
-                <a:latin typeface="微软雅黑" pitchFamily="34" charset="0"/>
-                <a:ea typeface="微软雅黑" pitchFamily="34" charset="-122"/>
-                <a:cs typeface="微软雅黑" pitchFamily="34" charset="-120"/>
+                <a:latin typeface="微软雅黑" panose="020B0503020204020204" pitchFamily="34" charset="-122"/>
+                <a:ea typeface="微软雅黑" panose="020B0503020204020204" pitchFamily="34" charset="-122"/>
+                <a:cs typeface="微软雅黑" panose="020B0503020204020204" pitchFamily="34" charset="-120"/>
               </a:rPr>
               <a:t>•  </a:t>
             </a:r>
-            <a:pPr algn="l" indent="0" marL="0">
+            <a:r>
+              <a:rPr lang="en-US" sz="1800" dirty="0">
+                <a:solidFill>
+                  <a:srgbClr val="000000"/>
+                </a:solidFill>
+              </a:rPr>
+              <a:t>第一步，兄弟之间连线：把同一个父结点的孩子们依次连起来</a:t>
+            </a:r>
+            <a:endParaRPr lang="en-US" sz="1800" dirty="0"/>
+          </a:p>
+        </p:txBody>
+      </p:sp>
+      <p:sp>
+        <p:nvSpPr>
+          <p:cNvPr id="6" name="Text 4"/>
+          <p:cNvSpPr/>
+          <p:nvPr/>
+        </p:nvSpPr>
+        <p:spPr>
+          <a:xfrm>
+            <a:off x="896112" y="2866644"/>
+            <a:ext cx="10454335" cy="397764"/>
+          </a:xfrm>
+          <a:prstGeom prst="rect">
+            <a:avLst/>
+          </a:prstGeom>
+          <a:noFill/>
+        </p:spPr>
+        <p:txBody>
+          <a:bodyPr wrap="square" rtlCol="0" anchor="t"/>
+          <a:lstStyle/>
+          <a:p>
+            <a:pPr marL="0" indent="0" algn="l">
               <a:lnSpc>
                 <a:spcPct val="115000"/>
               </a:lnSpc>
               <a:buNone/>
             </a:pPr>
             <a:r>
+              <a:rPr lang="en-US" sz="1800" b="1" dirty="0">
+                <a:solidFill>
+                  <a:srgbClr val="1F4E9C"/>
+                </a:solidFill>
+                <a:latin typeface="微软雅黑" panose="020B0503020204020204" pitchFamily="34" charset="-122"/>
+                <a:ea typeface="微软雅黑" panose="020B0503020204020204" pitchFamily="34" charset="-122"/>
+                <a:cs typeface="微软雅黑" panose="020B0503020204020204" pitchFamily="34" charset="-120"/>
+              </a:rPr>
+              <a:t>•  </a:t>
+            </a:r>
+            <a:r>
               <a:rPr lang="en-US" sz="1800" dirty="0">
                 <a:solidFill>
                   <a:srgbClr val="000000"/>
                 </a:solidFill>
               </a:rPr>
-              <a:t>第一步，兄弟之间连线：把同一个父结点的孩子们依次连起来</a:t>
+              <a:t>第二步，只留第一个孩子：每个结点只保留它和第一个孩子的连线，抹掉到其他孩子的线</a:t>
             </a:r>
             <a:endParaRPr lang="en-US" sz="1800" dirty="0"/>
           </a:p>
@@ -2626,26 +2503,25 @@
       </p:sp>
       <p:sp>
         <p:nvSpPr>
-          <p:cNvPr id="6" name="Text 4"/>
-          <p:cNvSpPr/>
-          <p:nvPr/>
-        </p:nvSpPr>
-        <p:spPr>
-          <a:xfrm>
-            <a:off x="896112" y="2866644"/>
+          <p:cNvPr id="7" name="Text 5"/>
+          <p:cNvSpPr/>
+          <p:nvPr/>
+        </p:nvSpPr>
+        <p:spPr>
+          <a:xfrm>
+            <a:off x="896112" y="3337560"/>
             <a:ext cx="10454335" cy="397764"/>
           </a:xfrm>
           <a:prstGeom prst="rect">
             <a:avLst/>
           </a:prstGeom>
           <a:noFill/>
-          <a:ln/>
         </p:spPr>
         <p:txBody>
           <a:bodyPr wrap="square" rtlCol="0" anchor="t"/>
           <a:lstStyle/>
           <a:p>
-            <a:pPr algn="l" indent="0" marL="0">
+            <a:pPr marL="0" indent="0" algn="l">
               <a:lnSpc>
                 <a:spcPct val="115000"/>
               </a:lnSpc>
@@ -2656,74 +2532,12 @@
                 <a:solidFill>
                   <a:srgbClr val="1F4E9C"/>
                 </a:solidFill>
-                <a:latin typeface="微软雅黑" pitchFamily="34" charset="0"/>
-                <a:ea typeface="微软雅黑" pitchFamily="34" charset="-122"/>
-                <a:cs typeface="微软雅黑" pitchFamily="34" charset="-120"/>
+                <a:latin typeface="微软雅黑" panose="020B0503020204020204" pitchFamily="34" charset="-122"/>
+                <a:ea typeface="微软雅黑" panose="020B0503020204020204" pitchFamily="34" charset="-122"/>
+                <a:cs typeface="微软雅黑" panose="020B0503020204020204" pitchFamily="34" charset="-120"/>
               </a:rPr>
               <a:t>•  </a:t>
             </a:r>
-            <a:pPr algn="l" indent="0" marL="0">
-              <a:lnSpc>
-                <a:spcPct val="115000"/>
-              </a:lnSpc>
-              <a:buNone/>
-            </a:pPr>
-            <a:r>
-              <a:rPr lang="en-US" sz="1800" dirty="0">
-                <a:solidFill>
-                  <a:srgbClr val="000000"/>
-                </a:solidFill>
-              </a:rPr>
-              <a:t>第二步，只留第一个孩子：每个结点只保留它和第一个孩子的连线，抹掉到其他孩子的线</a:t>
-            </a:r>
-            <a:endParaRPr lang="en-US" sz="1800" dirty="0"/>
-          </a:p>
-        </p:txBody>
-      </p:sp>
-      <p:sp>
-        <p:nvSpPr>
-          <p:cNvPr id="7" name="Text 5"/>
-          <p:cNvSpPr/>
-          <p:nvPr/>
-        </p:nvSpPr>
-        <p:spPr>
-          <a:xfrm>
-            <a:off x="896112" y="3337560"/>
-            <a:ext cx="10454335" cy="397764"/>
-          </a:xfrm>
-          <a:prstGeom prst="rect">
-            <a:avLst/>
-          </a:prstGeom>
-          <a:noFill/>
-          <a:ln/>
-        </p:spPr>
-        <p:txBody>
-          <a:bodyPr wrap="square" rtlCol="0" anchor="t"/>
-          <a:lstStyle/>
-          <a:p>
-            <a:pPr algn="l" indent="0" marL="0">
-              <a:lnSpc>
-                <a:spcPct val="115000"/>
-              </a:lnSpc>
-              <a:buNone/>
-            </a:pPr>
-            <a:r>
-              <a:rPr lang="en-US" sz="1800" b="1" dirty="0">
-                <a:solidFill>
-                  <a:srgbClr val="1F4E9C"/>
-                </a:solidFill>
-                <a:latin typeface="微软雅黑" pitchFamily="34" charset="0"/>
-                <a:ea typeface="微软雅黑" pitchFamily="34" charset="-122"/>
-                <a:cs typeface="微软雅黑" pitchFamily="34" charset="-120"/>
-              </a:rPr>
-              <a:t>•  </a:t>
-            </a:r>
-            <a:pPr algn="l" indent="0" marL="0">
-              <a:lnSpc>
-                <a:spcPct val="115000"/>
-              </a:lnSpc>
-              <a:buNone/>
-            </a:pPr>
             <a:r>
               <a:rPr lang="en-US" sz="1800" dirty="0">
                 <a:solidFill>
@@ -2751,13 +2565,12 @@
             <a:avLst/>
           </a:prstGeom>
           <a:noFill/>
-          <a:ln/>
         </p:spPr>
         <p:txBody>
           <a:bodyPr wrap="square" rtlCol="0" anchor="t"/>
           <a:lstStyle/>
           <a:p>
-            <a:pPr algn="l" indent="0" marL="0">
+            <a:pPr marL="0" indent="0" algn="l">
               <a:buNone/>
             </a:pPr>
             <a:r>
@@ -2765,9 +2578,9 @@
                 <a:solidFill>
                   <a:srgbClr val="8A9099"/>
                 </a:solidFill>
-                <a:latin typeface="微软雅黑" pitchFamily="34" charset="0"/>
-                <a:ea typeface="微软雅黑" pitchFamily="34" charset="-122"/>
-                <a:cs typeface="微软雅黑" pitchFamily="34" charset="-120"/>
+                <a:latin typeface="微软雅黑" panose="020B0503020204020204" pitchFamily="34" charset="-122"/>
+                <a:ea typeface="微软雅黑" panose="020B0503020204020204" pitchFamily="34" charset="-122"/>
+                <a:cs typeface="微软雅黑" panose="020B0503020204020204" pitchFamily="34" charset="-120"/>
               </a:rPr>
               <a:t>森林转二叉树：先把每棵树各自转成二叉树，再把后一棵树接到前一棵树根的右子树上，依次连下去</a:t>
             </a:r>
@@ -2785,7 +2598,7 @@
 
 <file path=ppt/slides/slide11.xml><?xml version="1.0" encoding="utf-8"?>
 <p:sld xmlns:a="http://schemas.openxmlformats.org/drawingml/2006/main" xmlns:r="http://schemas.openxmlformats.org/officeDocument/2006/relationships" xmlns:p="http://schemas.openxmlformats.org/presentationml/2006/main">
-  <p:cSld name="Slide 11">
+  <p:cSld>
     <p:bg>
       <p:bgPr>
         <a:blipFill dpi="0" rotWithShape="1">
@@ -2829,13 +2642,12 @@
             <a:avLst/>
           </a:prstGeom>
           <a:noFill/>
-          <a:ln/>
         </p:spPr>
         <p:txBody>
           <a:bodyPr wrap="square" rtlCol="0" anchor="ctr"/>
           <a:lstStyle/>
           <a:p>
-            <a:pPr algn="r" indent="0" marL="0">
+            <a:pPr marL="0" indent="0" algn="r">
               <a:buNone/>
             </a:pPr>
             <a:r>
@@ -2843,9 +2655,9 @@
                 <a:solidFill>
                   <a:srgbClr val="8A9099"/>
                 </a:solidFill>
-                <a:latin typeface="微软雅黑" pitchFamily="34" charset="0"/>
-                <a:ea typeface="微软雅黑" pitchFamily="34" charset="-122"/>
-                <a:cs typeface="微软雅黑" pitchFamily="34" charset="-120"/>
+                <a:latin typeface="微软雅黑" panose="020B0503020204020204" pitchFamily="34" charset="-122"/>
+                <a:ea typeface="微软雅黑" panose="020B0503020204020204" pitchFamily="34" charset="-122"/>
+                <a:cs typeface="微软雅黑" panose="020B0503020204020204" pitchFamily="34" charset="-120"/>
               </a:rPr>
               <a:t>11 / 16</a:t>
             </a:r>
@@ -2868,13 +2680,12 @@
             <a:avLst/>
           </a:prstGeom>
           <a:noFill/>
-          <a:ln/>
         </p:spPr>
         <p:txBody>
           <a:bodyPr wrap="square" rtlCol="0" anchor="ctr"/>
           <a:lstStyle/>
           <a:p>
-            <a:pPr algn="l" indent="0" marL="0">
+            <a:pPr marL="0" indent="0" algn="l">
               <a:buNone/>
             </a:pPr>
             <a:r>
@@ -2882,9 +2693,9 @@
                 <a:solidFill>
                   <a:srgbClr val="1F4E9C"/>
                 </a:solidFill>
-                <a:latin typeface="微软雅黑" pitchFamily="34" charset="0"/>
-                <a:ea typeface="微软雅黑" pitchFamily="34" charset="-122"/>
-                <a:cs typeface="微软雅黑" pitchFamily="34" charset="-120"/>
+                <a:latin typeface="微软雅黑" panose="020B0503020204020204" pitchFamily="34" charset="-122"/>
+                <a:ea typeface="微软雅黑" panose="020B0503020204020204" pitchFamily="34" charset="-122"/>
+                <a:cs typeface="微软雅黑" panose="020B0503020204020204" pitchFamily="34" charset="-120"/>
               </a:rPr>
               <a:t>树转二叉树 · 过程页</a:t>
             </a:r>
@@ -2907,13 +2718,12 @@
             <a:avLst/>
           </a:prstGeom>
           <a:noFill/>
-          <a:ln/>
         </p:spPr>
         <p:txBody>
           <a:bodyPr wrap="square" rtlCol="0" anchor="ctr"/>
           <a:lstStyle/>
           <a:p>
-            <a:pPr algn="l" indent="0" marL="0">
+            <a:pPr marL="0" indent="0" algn="l">
               <a:buNone/>
             </a:pPr>
             <a:r>
@@ -2921,9 +2731,9 @@
                 <a:solidFill>
                   <a:srgbClr val="1F2329"/>
                 </a:solidFill>
-                <a:latin typeface="微软雅黑" pitchFamily="34" charset="0"/>
-                <a:ea typeface="微软雅黑" pitchFamily="34" charset="-122"/>
-                <a:cs typeface="微软雅黑" pitchFamily="34" charset="-120"/>
+                <a:latin typeface="微软雅黑" panose="020B0503020204020204" pitchFamily="34" charset="-122"/>
+                <a:ea typeface="微软雅黑" panose="020B0503020204020204" pitchFamily="34" charset="-122"/>
+                <a:cs typeface="微软雅黑" panose="020B0503020204020204" pitchFamily="34" charset="-120"/>
               </a:rPr>
               <a:t>一棵三层的树转成二叉树（拿纸跟画）</a:t>
             </a:r>
@@ -2933,7 +2743,7 @@
       </p:sp>
       <p:pic>
         <p:nvPicPr>
-          <p:cNvPr id="5" name="Image 0" descr="D:\Program Project\SpecialtyCourses\assets\diagrams\a8-tree-to-binary.png">    </p:cNvPr>
+          <p:cNvPr id="5" name="Image 0" descr="D:\Program Project\SpecialtyCourses\assets\diagrams\a8-tree-to-binary.png"/>
           <p:cNvPicPr>
             <a:picLocks noChangeAspect="1"/>
           </p:cNvPicPr>
@@ -2941,8 +2751,10 @@
         </p:nvPicPr>
         <p:blipFill>
           <a:blip r:embed="rId2"/>
-          <a:srcRect l="0" r="0" t="0" b="0"/>
-          <a:stretch/>
+          <a:srcRect/>
+          <a:stretch>
+            <a:fillRect/>
+          </a:stretch>
         </p:blipFill>
         <p:spPr>
           <a:xfrm>
@@ -2969,13 +2781,12 @@
             <a:avLst/>
           </a:prstGeom>
           <a:noFill/>
-          <a:ln/>
         </p:spPr>
         <p:txBody>
           <a:bodyPr wrap="square" rtlCol="0" anchor="t"/>
           <a:lstStyle/>
           <a:p>
-            <a:pPr algn="l" indent="0" marL="0">
+            <a:pPr marL="0" indent="0" algn="l">
               <a:lnSpc>
                 <a:spcPct val="115000"/>
               </a:lnSpc>
@@ -2986,25 +2797,68 @@
                 <a:solidFill>
                   <a:srgbClr val="1F4E9C"/>
                 </a:solidFill>
-                <a:latin typeface="微软雅黑" pitchFamily="34" charset="0"/>
-                <a:ea typeface="微软雅黑" pitchFamily="34" charset="-122"/>
-                <a:cs typeface="微软雅黑" pitchFamily="34" charset="-120"/>
+                <a:latin typeface="微软雅黑" panose="020B0503020204020204" pitchFamily="34" charset="-122"/>
+                <a:ea typeface="微软雅黑" panose="020B0503020204020204" pitchFamily="34" charset="-122"/>
+                <a:cs typeface="微软雅黑" panose="020B0503020204020204" pitchFamily="34" charset="-120"/>
               </a:rPr>
               <a:t>•  </a:t>
             </a:r>
-            <a:pPr algn="l" indent="0" marL="0">
+            <a:r>
+              <a:rPr lang="en-US" sz="1400" dirty="0">
+                <a:solidFill>
+                  <a:srgbClr val="000000"/>
+                </a:solidFill>
+              </a:rPr>
+              <a:t>原树：根 A 有三个孩子 B、C、D；B 有一个孩子 E</a:t>
+            </a:r>
+            <a:endParaRPr lang="en-US" sz="1400" dirty="0"/>
+          </a:p>
+        </p:txBody>
+      </p:sp>
+      <p:sp>
+        <p:nvSpPr>
+          <p:cNvPr id="7" name="Text 4"/>
+          <p:cNvSpPr/>
+          <p:nvPr/>
+        </p:nvSpPr>
+        <p:spPr>
+          <a:xfrm>
+            <a:off x="896112" y="5350764"/>
+            <a:ext cx="10454335" cy="321564"/>
+          </a:xfrm>
+          <a:prstGeom prst="rect">
+            <a:avLst/>
+          </a:prstGeom>
+          <a:noFill/>
+        </p:spPr>
+        <p:txBody>
+          <a:bodyPr wrap="square" rtlCol="0" anchor="t"/>
+          <a:lstStyle/>
+          <a:p>
+            <a:pPr marL="0" indent="0" algn="l">
               <a:lnSpc>
                 <a:spcPct val="115000"/>
               </a:lnSpc>
               <a:buNone/>
             </a:pPr>
             <a:r>
+              <a:rPr lang="en-US" sz="1400" b="1" dirty="0">
+                <a:solidFill>
+                  <a:srgbClr val="1F4E9C"/>
+                </a:solidFill>
+                <a:latin typeface="微软雅黑" panose="020B0503020204020204" pitchFamily="34" charset="-122"/>
+                <a:ea typeface="微软雅黑" panose="020B0503020204020204" pitchFamily="34" charset="-122"/>
+                <a:cs typeface="微软雅黑" panose="020B0503020204020204" pitchFamily="34" charset="-120"/>
+              </a:rPr>
+              <a:t>•  </a:t>
+            </a:r>
+            <a:r>
               <a:rPr lang="en-US" sz="1400" dirty="0">
                 <a:solidFill>
                   <a:srgbClr val="000000"/>
                 </a:solidFill>
               </a:rPr>
-              <a:t>原树：根 A 有三个孩子 B、C、D；B 有一个孩子 E</a:t>
+              <a:t>第一步兄弟连线：B—C—D 连起来；第二步只留第一个孩子：A 只连 B，B 只连 E</a:t>
             </a:r>
             <a:endParaRPr lang="en-US" sz="1400" dirty="0"/>
           </a:p>
@@ -3012,26 +2866,25 @@
       </p:sp>
       <p:sp>
         <p:nvSpPr>
-          <p:cNvPr id="7" name="Text 4"/>
-          <p:cNvSpPr/>
-          <p:nvPr/>
-        </p:nvSpPr>
-        <p:spPr>
-          <a:xfrm>
-            <a:off x="896112" y="5350764"/>
+          <p:cNvPr id="8" name="Text 5"/>
+          <p:cNvSpPr/>
+          <p:nvPr/>
+        </p:nvSpPr>
+        <p:spPr>
+          <a:xfrm>
+            <a:off x="896112" y="5745480"/>
             <a:ext cx="10454335" cy="321564"/>
           </a:xfrm>
           <a:prstGeom prst="rect">
             <a:avLst/>
           </a:prstGeom>
           <a:noFill/>
-          <a:ln/>
         </p:spPr>
         <p:txBody>
           <a:bodyPr wrap="square" rtlCol="0" anchor="t"/>
           <a:lstStyle/>
           <a:p>
-            <a:pPr algn="l" indent="0" marL="0">
+            <a:pPr marL="0" indent="0" algn="l">
               <a:lnSpc>
                 <a:spcPct val="115000"/>
               </a:lnSpc>
@@ -3042,130 +2895,61 @@
                 <a:solidFill>
                   <a:srgbClr val="1F4E9C"/>
                 </a:solidFill>
-                <a:latin typeface="微软雅黑" pitchFamily="34" charset="0"/>
-                <a:ea typeface="微软雅黑" pitchFamily="34" charset="-122"/>
-                <a:cs typeface="微软雅黑" pitchFamily="34" charset="-120"/>
+                <a:latin typeface="微软雅黑" panose="020B0503020204020204" pitchFamily="34" charset="-122"/>
+                <a:ea typeface="微软雅黑" panose="020B0503020204020204" pitchFamily="34" charset="-122"/>
+                <a:cs typeface="微软雅黑" panose="020B0503020204020204" pitchFamily="34" charset="-120"/>
               </a:rPr>
               <a:t>•  </a:t>
             </a:r>
-            <a:pPr algn="l" indent="0" marL="0">
+            <a:r>
+              <a:rPr lang="en-US" sz="1400" dirty="0">
+                <a:solidFill>
+                  <a:srgbClr val="000000"/>
+                </a:solidFill>
+              </a:rPr>
+              <a:t>第三步转 45 度：A 的左孩子是 B、B 的右孩子是 C、C 的右孩子是 D；B 的左孩子是 E</a:t>
+            </a:r>
+            <a:endParaRPr lang="en-US" sz="1400" dirty="0"/>
+          </a:p>
+        </p:txBody>
+      </p:sp>
+      <p:sp>
+        <p:nvSpPr>
+          <p:cNvPr id="9" name="Text 6"/>
+          <p:cNvSpPr/>
+          <p:nvPr/>
+        </p:nvSpPr>
+        <p:spPr>
+          <a:xfrm>
+            <a:off x="896112" y="6140196"/>
+            <a:ext cx="10454335" cy="321564"/>
+          </a:xfrm>
+          <a:prstGeom prst="rect">
+            <a:avLst/>
+          </a:prstGeom>
+          <a:noFill/>
+        </p:spPr>
+        <p:txBody>
+          <a:bodyPr wrap="square" rtlCol="0" anchor="t"/>
+          <a:lstStyle/>
+          <a:p>
+            <a:pPr marL="0" indent="0" algn="l">
               <a:lnSpc>
                 <a:spcPct val="115000"/>
               </a:lnSpc>
               <a:buNone/>
             </a:pPr>
             <a:r>
-              <a:rPr lang="en-US" sz="1400" dirty="0">
-                <a:solidFill>
-                  <a:srgbClr val="000000"/>
-                </a:solidFill>
-              </a:rPr>
-              <a:t>第一步兄弟连线：B—C—D 连起来；第二步只留第一个孩子：A 只连 B，B 只连 E</a:t>
-            </a:r>
-            <a:endParaRPr lang="en-US" sz="1400" dirty="0"/>
-          </a:p>
-        </p:txBody>
-      </p:sp>
-      <p:sp>
-        <p:nvSpPr>
-          <p:cNvPr id="8" name="Text 5"/>
-          <p:cNvSpPr/>
-          <p:nvPr/>
-        </p:nvSpPr>
-        <p:spPr>
-          <a:xfrm>
-            <a:off x="896112" y="5745480"/>
-            <a:ext cx="10454335" cy="321564"/>
-          </a:xfrm>
-          <a:prstGeom prst="rect">
-            <a:avLst/>
-          </a:prstGeom>
-          <a:noFill/>
-          <a:ln/>
-        </p:spPr>
-        <p:txBody>
-          <a:bodyPr wrap="square" rtlCol="0" anchor="t"/>
-          <a:lstStyle/>
-          <a:p>
-            <a:pPr algn="l" indent="0" marL="0">
-              <a:lnSpc>
-                <a:spcPct val="115000"/>
-              </a:lnSpc>
-              <a:buNone/>
-            </a:pPr>
-            <a:r>
               <a:rPr lang="en-US" sz="1400" b="1" dirty="0">
                 <a:solidFill>
                   <a:srgbClr val="1F4E9C"/>
                 </a:solidFill>
-                <a:latin typeface="微软雅黑" pitchFamily="34" charset="0"/>
-                <a:ea typeface="微软雅黑" pitchFamily="34" charset="-122"/>
-                <a:cs typeface="微软雅黑" pitchFamily="34" charset="-120"/>
+                <a:latin typeface="微软雅黑" panose="020B0503020204020204" pitchFamily="34" charset="-122"/>
+                <a:ea typeface="微软雅黑" panose="020B0503020204020204" pitchFamily="34" charset="-122"/>
+                <a:cs typeface="微软雅黑" panose="020B0503020204020204" pitchFamily="34" charset="-120"/>
               </a:rPr>
               <a:t>•  </a:t>
             </a:r>
-            <a:pPr algn="l" indent="0" marL="0">
-              <a:lnSpc>
-                <a:spcPct val="115000"/>
-              </a:lnSpc>
-              <a:buNone/>
-            </a:pPr>
-            <a:r>
-              <a:rPr lang="en-US" sz="1400" dirty="0">
-                <a:solidFill>
-                  <a:srgbClr val="000000"/>
-                </a:solidFill>
-              </a:rPr>
-              <a:t>第三步转 45 度：A 的左孩子是 B、B 的右孩子是 C、C 的右孩子是 D；B 的左孩子是 E</a:t>
-            </a:r>
-            <a:endParaRPr lang="en-US" sz="1400" dirty="0"/>
-          </a:p>
-        </p:txBody>
-      </p:sp>
-      <p:sp>
-        <p:nvSpPr>
-          <p:cNvPr id="9" name="Text 6"/>
-          <p:cNvSpPr/>
-          <p:nvPr/>
-        </p:nvSpPr>
-        <p:spPr>
-          <a:xfrm>
-            <a:off x="896112" y="6140196"/>
-            <a:ext cx="10454335" cy="321564"/>
-          </a:xfrm>
-          <a:prstGeom prst="rect">
-            <a:avLst/>
-          </a:prstGeom>
-          <a:noFill/>
-          <a:ln/>
-        </p:spPr>
-        <p:txBody>
-          <a:bodyPr wrap="square" rtlCol="0" anchor="t"/>
-          <a:lstStyle/>
-          <a:p>
-            <a:pPr algn="l" indent="0" marL="0">
-              <a:lnSpc>
-                <a:spcPct val="115000"/>
-              </a:lnSpc>
-              <a:buNone/>
-            </a:pPr>
-            <a:r>
-              <a:rPr lang="en-US" sz="1400" b="1" dirty="0">
-                <a:solidFill>
-                  <a:srgbClr val="1F4E9C"/>
-                </a:solidFill>
-                <a:latin typeface="微软雅黑" pitchFamily="34" charset="0"/>
-                <a:ea typeface="微软雅黑" pitchFamily="34" charset="-122"/>
-                <a:cs typeface="微软雅黑" pitchFamily="34" charset="-120"/>
-              </a:rPr>
-              <a:t>•  </a:t>
-            </a:r>
-            <a:pPr algn="l" indent="0" marL="0">
-              <a:lnSpc>
-                <a:spcPct val="115000"/>
-              </a:lnSpc>
-              <a:buNone/>
-            </a:pPr>
             <a:r>
               <a:rPr lang="en-US" sz="1400" dirty="0">
                 <a:solidFill>
@@ -3193,13 +2977,12 @@
             <a:avLst/>
           </a:prstGeom>
           <a:noFill/>
-          <a:ln/>
         </p:spPr>
         <p:txBody>
           <a:bodyPr wrap="square" rtlCol="0" anchor="t"/>
           <a:lstStyle/>
           <a:p>
-            <a:pPr algn="l" indent="0" marL="0">
+            <a:pPr marL="0" indent="0" algn="l">
               <a:buNone/>
             </a:pPr>
             <a:r>
@@ -3207,9 +2990,9 @@
                 <a:solidFill>
                   <a:srgbClr val="8A9099"/>
                 </a:solidFill>
-                <a:latin typeface="微软雅黑" pitchFamily="34" charset="0"/>
-                <a:ea typeface="微软雅黑" pitchFamily="34" charset="-122"/>
-                <a:cs typeface="微软雅黑" pitchFamily="34" charset="-120"/>
+                <a:latin typeface="微软雅黑" panose="020B0503020204020204" pitchFamily="34" charset="-122"/>
+                <a:ea typeface="微软雅黑" panose="020B0503020204020204" pitchFamily="34" charset="-122"/>
+                <a:cs typeface="微软雅黑" panose="020B0503020204020204" pitchFamily="34" charset="-120"/>
               </a:rPr>
               <a:t>你抓住一句话：第一个孩子往左、兄弟往右，转出来的二叉树和原树一一对应，不会丢信息</a:t>
             </a:r>
@@ -3227,7 +3010,7 @@
 
 <file path=ppt/slides/slide12.xml><?xml version="1.0" encoding="utf-8"?>
 <p:sld xmlns:a="http://schemas.openxmlformats.org/drawingml/2006/main" xmlns:r="http://schemas.openxmlformats.org/officeDocument/2006/relationships" xmlns:p="http://schemas.openxmlformats.org/presentationml/2006/main">
-  <p:cSld name="Slide 12">
+  <p:cSld>
     <p:bg>
       <p:bgPr>
         <a:blipFill dpi="0" rotWithShape="1">
@@ -3271,13 +3054,12 @@
             <a:avLst/>
           </a:prstGeom>
           <a:noFill/>
-          <a:ln/>
         </p:spPr>
         <p:txBody>
           <a:bodyPr wrap="square" rtlCol="0" anchor="ctr"/>
           <a:lstStyle/>
           <a:p>
-            <a:pPr algn="r" indent="0" marL="0">
+            <a:pPr marL="0" indent="0" algn="r">
               <a:buNone/>
             </a:pPr>
             <a:r>
@@ -3285,9 +3067,9 @@
                 <a:solidFill>
                   <a:srgbClr val="8A9099"/>
                 </a:solidFill>
-                <a:latin typeface="微软雅黑" pitchFamily="34" charset="0"/>
-                <a:ea typeface="微软雅黑" pitchFamily="34" charset="-122"/>
-                <a:cs typeface="微软雅黑" pitchFamily="34" charset="-120"/>
+                <a:latin typeface="微软雅黑" panose="020B0503020204020204" pitchFamily="34" charset="-122"/>
+                <a:ea typeface="微软雅黑" panose="020B0503020204020204" pitchFamily="34" charset="-122"/>
+                <a:cs typeface="微软雅黑" panose="020B0503020204020204" pitchFamily="34" charset="-120"/>
               </a:rPr>
               <a:t>12 / 16</a:t>
             </a:r>
@@ -3310,13 +3092,12 @@
             <a:avLst/>
           </a:prstGeom>
           <a:noFill/>
-          <a:ln/>
         </p:spPr>
         <p:txBody>
           <a:bodyPr wrap="square" rtlCol="0" anchor="ctr"/>
           <a:lstStyle/>
           <a:p>
-            <a:pPr algn="l" indent="0" marL="0">
+            <a:pPr marL="0" indent="0" algn="l">
               <a:buNone/>
             </a:pPr>
             <a:r>
@@ -3324,9 +3105,9 @@
                 <a:solidFill>
                   <a:srgbClr val="1F4E9C"/>
                 </a:solidFill>
-                <a:latin typeface="微软雅黑" pitchFamily="34" charset="0"/>
-                <a:ea typeface="微软雅黑" pitchFamily="34" charset="-122"/>
-                <a:cs typeface="微软雅黑" pitchFamily="34" charset="-120"/>
+                <a:latin typeface="微软雅黑" panose="020B0503020204020204" pitchFamily="34" charset="-122"/>
+                <a:ea typeface="微软雅黑" panose="020B0503020204020204" pitchFamily="34" charset="-122"/>
+                <a:cs typeface="微软雅黑" panose="020B0503020204020204" pitchFamily="34" charset="-120"/>
               </a:rPr>
               <a:t>遍历对应 · 检查页</a:t>
             </a:r>
@@ -3349,13 +3130,12 @@
             <a:avLst/>
           </a:prstGeom>
           <a:noFill/>
-          <a:ln/>
         </p:spPr>
         <p:txBody>
           <a:bodyPr wrap="square" rtlCol="0" anchor="ctr"/>
           <a:lstStyle/>
           <a:p>
-            <a:pPr algn="l" indent="0" marL="0">
+            <a:pPr marL="0" indent="0" algn="l">
               <a:buNone/>
             </a:pPr>
             <a:r>
@@ -3363,9 +3143,9 @@
                 <a:solidFill>
                   <a:srgbClr val="1F2329"/>
                 </a:solidFill>
-                <a:latin typeface="微软雅黑" pitchFamily="34" charset="0"/>
-                <a:ea typeface="微软雅黑" pitchFamily="34" charset="-122"/>
-                <a:cs typeface="微软雅黑" pitchFamily="34" charset="-120"/>
+                <a:latin typeface="微软雅黑" panose="020B0503020204020204" pitchFamily="34" charset="-122"/>
+                <a:ea typeface="微软雅黑" panose="020B0503020204020204" pitchFamily="34" charset="-122"/>
+                <a:cs typeface="微软雅黑" panose="020B0503020204020204" pitchFamily="34" charset="-120"/>
               </a:rPr>
               <a:t>树的后根遍历，对应二叉树的什么遍历？（先自己想）</a:t>
             </a:r>
@@ -3379,17 +3159,11 @@
           <p:cNvGraphicFramePr>
             <a:graphicFrameLocks noGrp="1"/>
           </p:cNvGraphicFramePr>
-          <p:nvPr>
-            <p:extLst>
-              <p:ext uri="{D42A27DB-BD31-4B8C-83A1-F6EECF244321}">
-                <p14:modId xmlns:p14="http://schemas.microsoft.com/office/powerpoint/2010/main" val="1579011935"/>
-              </p:ext>
-            </p:extLst>
-          </p:nvPr>
+          <p:nvPr/>
         </p:nvGraphicFramePr>
         <p:xfrm>
           <a:off x="822960" y="2395728"/>
-          <a:ext cx="10545775" cy="914400"/>
+          <a:ext cx="10545775" cy="1261872"/>
         </p:xfrm>
         <a:graphic>
           <a:graphicData uri="http://schemas.openxmlformats.org/drawingml/2006/table">
@@ -3405,7 +3179,7 @@
                     <a:bodyPr/>
                     <a:lstStyle/>
                     <a:p>
-                      <a:pPr algn="ctr" indent="0" marL="0">
+                      <a:pPr marL="0" indent="0" algn="ctr">
                         <a:buNone/>
                       </a:pPr>
                       <a:r>
@@ -3413,20 +3187,20 @@
                           <a:solidFill>
                             <a:srgbClr val="1F4E9C"/>
                           </a:solidFill>
-                          <a:latin typeface="微软雅黑" pitchFamily="34" charset="0"/>
-                          <a:ea typeface="微软雅黑" pitchFamily="34" charset="-122"/>
-                          <a:cs typeface="微软雅黑" pitchFamily="34" charset="-120"/>
+                          <a:latin typeface="微软雅黑" panose="020B0503020204020204" pitchFamily="34" charset="-122"/>
+                          <a:ea typeface="微软雅黑" panose="020B0503020204020204" pitchFamily="34" charset="-122"/>
+                          <a:cs typeface="微软雅黑" panose="020B0503020204020204" pitchFamily="34" charset="-120"/>
                         </a:rPr>
                         <a:t>树的遍历</a:t>
                       </a:r>
                       <a:endParaRPr lang="en-US" sz="1500" dirty="0">
-                        <a:latin typeface="微软雅黑" charset="0"/>
-                        <a:ea typeface="微软雅黑" charset="0"/>
-                        <a:cs typeface="微软雅黑" charset="0"/>
+                        <a:latin typeface="微软雅黑" panose="020B0503020204020204" pitchFamily="34" charset="-122"/>
+                        <a:ea typeface="微软雅黑" panose="020B0503020204020204" pitchFamily="34" charset="-122"/>
+                        <a:cs typeface="微软雅黑" panose="020B0503020204020204" pitchFamily="34" charset="-122"/>
                       </a:endParaRPr>
                     </a:p>
                   </a:txBody>
-                  <a:tcPr marL="91440" marR="91440" marT="45720" marB="45720" anchor="ctr">
+                  <a:tcPr anchor="ctr">
                     <a:lnL w="9525" cap="flat" cmpd="sng" algn="ctr">
                       <a:solidFill>
                         <a:srgbClr val="D8DBE0"/>
@@ -3473,7 +3247,7 @@
                     <a:bodyPr/>
                     <a:lstStyle/>
                     <a:p>
-                      <a:pPr algn="ctr" indent="0" marL="0">
+                      <a:pPr marL="0" indent="0" algn="ctr">
                         <a:buNone/>
                       </a:pPr>
                       <a:r>
@@ -3481,20 +3255,20 @@
                           <a:solidFill>
                             <a:srgbClr val="1F4E9C"/>
                           </a:solidFill>
-                          <a:latin typeface="微软雅黑" pitchFamily="34" charset="0"/>
-                          <a:ea typeface="微软雅黑" pitchFamily="34" charset="-122"/>
-                          <a:cs typeface="微软雅黑" pitchFamily="34" charset="-120"/>
+                          <a:latin typeface="微软雅黑" panose="020B0503020204020204" pitchFamily="34" charset="-122"/>
+                          <a:ea typeface="微软雅黑" panose="020B0503020204020204" pitchFamily="34" charset="-122"/>
+                          <a:cs typeface="微软雅黑" panose="020B0503020204020204" pitchFamily="34" charset="-120"/>
                         </a:rPr>
                         <a:t>对应二叉树的遍历</a:t>
                       </a:r>
                       <a:endParaRPr lang="en-US" sz="1500" dirty="0">
-                        <a:latin typeface="微软雅黑" charset="0"/>
-                        <a:ea typeface="微软雅黑" charset="0"/>
-                        <a:cs typeface="微软雅黑" charset="0"/>
+                        <a:latin typeface="微软雅黑" panose="020B0503020204020204" pitchFamily="34" charset="-122"/>
+                        <a:ea typeface="微软雅黑" panose="020B0503020204020204" pitchFamily="34" charset="-122"/>
+                        <a:cs typeface="微软雅黑" panose="020B0503020204020204" pitchFamily="34" charset="-122"/>
                       </a:endParaRPr>
                     </a:p>
                   </a:txBody>
-                  <a:tcPr marL="91440" marR="91440" marT="45720" marB="45720" anchor="ctr">
+                  <a:tcPr anchor="ctr">
                     <a:lnL w="9525" cap="flat" cmpd="sng" algn="ctr">
                       <a:solidFill>
                         <a:srgbClr val="D8DBE0"/>
@@ -3543,7 +3317,7 @@
                     <a:bodyPr/>
                     <a:lstStyle/>
                     <a:p>
-                      <a:pPr algn="ctr" indent="0" marL="0">
+                      <a:pPr marL="0" indent="0" algn="ctr">
                         <a:buNone/>
                       </a:pPr>
                       <a:r>
@@ -3551,20 +3325,20 @@
                           <a:solidFill>
                             <a:srgbClr val="1F2329"/>
                           </a:solidFill>
-                          <a:latin typeface="微软雅黑" pitchFamily="34" charset="0"/>
-                          <a:ea typeface="微软雅黑" pitchFamily="34" charset="-122"/>
-                          <a:cs typeface="微软雅黑" pitchFamily="34" charset="-120"/>
+                          <a:latin typeface="微软雅黑" panose="020B0503020204020204" pitchFamily="34" charset="-122"/>
+                          <a:ea typeface="微软雅黑" panose="020B0503020204020204" pitchFamily="34" charset="-122"/>
+                          <a:cs typeface="微软雅黑" panose="020B0503020204020204" pitchFamily="34" charset="-120"/>
                         </a:rPr>
                         <a:t>先根遍历</a:t>
                       </a:r>
                       <a:endParaRPr lang="en-US" sz="1500" dirty="0">
-                        <a:latin typeface="微软雅黑" charset="0"/>
-                        <a:ea typeface="微软雅黑" charset="0"/>
-                        <a:cs typeface="微软雅黑" charset="0"/>
+                        <a:latin typeface="微软雅黑" panose="020B0503020204020204" pitchFamily="34" charset="-122"/>
+                        <a:ea typeface="微软雅黑" panose="020B0503020204020204" pitchFamily="34" charset="-122"/>
+                        <a:cs typeface="微软雅黑" panose="020B0503020204020204" pitchFamily="34" charset="-122"/>
                       </a:endParaRPr>
                     </a:p>
                   </a:txBody>
-                  <a:tcPr marL="91440" marR="91440" marT="45720" marB="45720" anchor="ctr">
+                  <a:tcPr anchor="ctr">
                     <a:lnL w="9525" cap="flat" cmpd="sng" algn="ctr">
                       <a:solidFill>
                         <a:srgbClr val="D8DBE0"/>
@@ -3611,7 +3385,7 @@
                     <a:bodyPr/>
                     <a:lstStyle/>
                     <a:p>
-                      <a:pPr algn="ctr" indent="0" marL="0">
+                      <a:pPr marL="0" indent="0" algn="ctr">
                         <a:buNone/>
                       </a:pPr>
                       <a:r>
@@ -3619,20 +3393,20 @@
                           <a:solidFill>
                             <a:srgbClr val="1F2329"/>
                           </a:solidFill>
-                          <a:latin typeface="微软雅黑" pitchFamily="34" charset="0"/>
-                          <a:ea typeface="微软雅黑" pitchFamily="34" charset="-122"/>
-                          <a:cs typeface="微软雅黑" pitchFamily="34" charset="-120"/>
+                          <a:latin typeface="微软雅黑" panose="020B0503020204020204" pitchFamily="34" charset="-122"/>
+                          <a:ea typeface="微软雅黑" panose="020B0503020204020204" pitchFamily="34" charset="-122"/>
+                          <a:cs typeface="微软雅黑" panose="020B0503020204020204" pitchFamily="34" charset="-120"/>
                         </a:rPr>
                         <a:t>先序遍历</a:t>
                       </a:r>
                       <a:endParaRPr lang="en-US" sz="1500" dirty="0">
-                        <a:latin typeface="微软雅黑" charset="0"/>
-                        <a:ea typeface="微软雅黑" charset="0"/>
-                        <a:cs typeface="微软雅黑" charset="0"/>
+                        <a:latin typeface="微软雅黑" panose="020B0503020204020204" pitchFamily="34" charset="-122"/>
+                        <a:ea typeface="微软雅黑" panose="020B0503020204020204" pitchFamily="34" charset="-122"/>
+                        <a:cs typeface="微软雅黑" panose="020B0503020204020204" pitchFamily="34" charset="-122"/>
                       </a:endParaRPr>
                     </a:p>
                   </a:txBody>
-                  <a:tcPr marL="91440" marR="91440" marT="45720" marB="45720" anchor="ctr">
+                  <a:tcPr anchor="ctr">
                     <a:lnL w="9525" cap="flat" cmpd="sng" algn="ctr">
                       <a:solidFill>
                         <a:srgbClr val="D8DBE0"/>
@@ -3681,7 +3455,7 @@
                     <a:bodyPr/>
                     <a:lstStyle/>
                     <a:p>
-                      <a:pPr algn="ctr" indent="0" marL="0">
+                      <a:pPr marL="0" indent="0" algn="ctr">
                         <a:buNone/>
                       </a:pPr>
                       <a:r>
@@ -3689,20 +3463,20 @@
                           <a:solidFill>
                             <a:srgbClr val="1F2329"/>
                           </a:solidFill>
-                          <a:latin typeface="微软雅黑" pitchFamily="34" charset="0"/>
-                          <a:ea typeface="微软雅黑" pitchFamily="34" charset="-122"/>
-                          <a:cs typeface="微软雅黑" pitchFamily="34" charset="-120"/>
+                          <a:latin typeface="微软雅黑" panose="020B0503020204020204" pitchFamily="34" charset="-122"/>
+                          <a:ea typeface="微软雅黑" panose="020B0503020204020204" pitchFamily="34" charset="-122"/>
+                          <a:cs typeface="微软雅黑" panose="020B0503020204020204" pitchFamily="34" charset="-120"/>
                         </a:rPr>
                         <a:t>后根遍历</a:t>
                       </a:r>
                       <a:endParaRPr lang="en-US" sz="1500" dirty="0">
-                        <a:latin typeface="微软雅黑" charset="0"/>
-                        <a:ea typeface="微软雅黑" charset="0"/>
-                        <a:cs typeface="微软雅黑" charset="0"/>
+                        <a:latin typeface="微软雅黑" panose="020B0503020204020204" pitchFamily="34" charset="-122"/>
+                        <a:ea typeface="微软雅黑" panose="020B0503020204020204" pitchFamily="34" charset="-122"/>
+                        <a:cs typeface="微软雅黑" panose="020B0503020204020204" pitchFamily="34" charset="-122"/>
                       </a:endParaRPr>
                     </a:p>
                   </a:txBody>
-                  <a:tcPr marL="91440" marR="91440" marT="45720" marB="45720" anchor="ctr">
+                  <a:tcPr anchor="ctr">
                     <a:lnL w="9525" cap="flat" cmpd="sng" algn="ctr">
                       <a:solidFill>
                         <a:srgbClr val="D8DBE0"/>
@@ -3749,7 +3523,7 @@
                     <a:bodyPr/>
                     <a:lstStyle/>
                     <a:p>
-                      <a:pPr algn="ctr" indent="0" marL="0">
+                      <a:pPr marL="0" indent="0" algn="ctr">
                         <a:buNone/>
                       </a:pPr>
                       <a:r>
@@ -3757,20 +3531,20 @@
                           <a:solidFill>
                             <a:srgbClr val="1F2329"/>
                           </a:solidFill>
-                          <a:latin typeface="微软雅黑" pitchFamily="34" charset="0"/>
-                          <a:ea typeface="微软雅黑" pitchFamily="34" charset="-122"/>
-                          <a:cs typeface="微软雅黑" pitchFamily="34" charset="-120"/>
+                          <a:latin typeface="微软雅黑" panose="020B0503020204020204" pitchFamily="34" charset="-122"/>
+                          <a:ea typeface="微软雅黑" panose="020B0503020204020204" pitchFamily="34" charset="-122"/>
+                          <a:cs typeface="微软雅黑" panose="020B0503020204020204" pitchFamily="34" charset="-120"/>
                         </a:rPr>
                         <a:t>中序遍历（不是后序！）</a:t>
                       </a:r>
                       <a:endParaRPr lang="en-US" sz="1500" dirty="0">
-                        <a:latin typeface="微软雅黑" charset="0"/>
-                        <a:ea typeface="微软雅黑" charset="0"/>
-                        <a:cs typeface="微软雅黑" charset="0"/>
+                        <a:latin typeface="微软雅黑" panose="020B0503020204020204" pitchFamily="34" charset="-122"/>
+                        <a:ea typeface="微软雅黑" panose="020B0503020204020204" pitchFamily="34" charset="-122"/>
+                        <a:cs typeface="微软雅黑" panose="020B0503020204020204" pitchFamily="34" charset="-122"/>
                       </a:endParaRPr>
                     </a:p>
                   </a:txBody>
-                  <a:tcPr marL="91440" marR="91440" marT="45720" marB="45720" anchor="ctr">
+                  <a:tcPr anchor="ctr">
                     <a:lnL w="9525" cap="flat" cmpd="sng" algn="ctr">
                       <a:solidFill>
                         <a:srgbClr val="D8DBE0"/>
@@ -3832,13 +3606,12 @@
             <a:avLst/>
           </a:prstGeom>
           <a:noFill/>
-          <a:ln/>
         </p:spPr>
         <p:txBody>
           <a:bodyPr wrap="square" rtlCol="0" anchor="t"/>
           <a:lstStyle/>
           <a:p>
-            <a:pPr algn="l" indent="0" marL="0">
+            <a:pPr marL="0" indent="0" algn="l">
               <a:buNone/>
             </a:pPr>
             <a:r>
@@ -3846,9 +3619,9 @@
                 <a:solidFill>
                   <a:srgbClr val="8A9099"/>
                 </a:solidFill>
-                <a:latin typeface="微软雅黑" pitchFamily="34" charset="0"/>
-                <a:ea typeface="微软雅黑" pitchFamily="34" charset="-122"/>
-                <a:cs typeface="微软雅黑" pitchFamily="34" charset="-120"/>
+                <a:latin typeface="微软雅黑" panose="020B0503020204020204" pitchFamily="34" charset="-122"/>
+                <a:ea typeface="微软雅黑" panose="020B0503020204020204" pitchFamily="34" charset="-122"/>
+                <a:cs typeface="微软雅黑" panose="020B0503020204020204" pitchFamily="34" charset="-120"/>
               </a:rPr>
               <a:t>先想：后根遍历（先孩子后自己）对应二叉树的哪种？很多人以为是后序，其实是中序。因为孩子兄弟表示法里，一个结点的孩子都在左子树、兄弟在右子树，后根的“先孩子后自己”落到二叉树上就是“先左子树、再根、再右子树”，正是中序</a:t>
             </a:r>
@@ -3861,12 +3634,137 @@
   <p:clrMapOvr>
     <a:masterClrMapping/>
   </p:clrMapOvr>
+  <p:timing>
+    <p:tnLst>
+      <p:par>
+        <p:cTn id="1" dur="indefinite" restart="never" nodeType="tmRoot">
+          <p:childTnLst>
+            <p:seq concurrent="1" nextAc="seek">
+              <p:cTn id="2" dur="indefinite" nodeType="mainSeq">
+                <p:childTnLst>
+                  <p:par>
+                    <p:cTn id="3" fill="hold">
+                      <p:stCondLst>
+                        <p:cond delay="indefinite"/>
+                      </p:stCondLst>
+                      <p:childTnLst>
+                        <p:par>
+                          <p:cTn id="4" fill="hold">
+                            <p:stCondLst>
+                              <p:cond delay="0"/>
+                            </p:stCondLst>
+                            <p:childTnLst>
+                              <p:par>
+                                <p:cTn id="5" presetID="2" presetClass="entr" presetSubtype="4" fill="hold" grpId="0" nodeType="clickEffect">
+                                  <p:stCondLst>
+                                    <p:cond delay="0"/>
+                                  </p:stCondLst>
+                                  <p:childTnLst>
+                                    <p:set>
+                                      <p:cBhvr>
+                                        <p:cTn id="6" dur="1" fill="hold">
+                                          <p:stCondLst>
+                                            <p:cond delay="0"/>
+                                          </p:stCondLst>
+                                        </p:cTn>
+                                        <p:tgtEl>
+                                          <p:spTgt spid="6"/>
+                                        </p:tgtEl>
+                                        <p:attrNameLst>
+                                          <p:attrName>style.visibility</p:attrName>
+                                        </p:attrNameLst>
+                                      </p:cBhvr>
+                                      <p:to>
+                                        <p:strVal val="visible"/>
+                                      </p:to>
+                                    </p:set>
+                                    <p:anim calcmode="lin" valueType="num">
+                                      <p:cBhvr additive="base">
+                                        <p:cTn id="7" dur="500" fill="hold"/>
+                                        <p:tgtEl>
+                                          <p:spTgt spid="6"/>
+                                        </p:tgtEl>
+                                        <p:attrNameLst>
+                                          <p:attrName>ppt_x</p:attrName>
+                                        </p:attrNameLst>
+                                      </p:cBhvr>
+                                      <p:tavLst>
+                                        <p:tav tm="0">
+                                          <p:val>
+                                            <p:strVal val="#ppt_x"/>
+                                          </p:val>
+                                        </p:tav>
+                                        <p:tav tm="100000">
+                                          <p:val>
+                                            <p:strVal val="#ppt_x"/>
+                                          </p:val>
+                                        </p:tav>
+                                      </p:tavLst>
+                                    </p:anim>
+                                    <p:anim calcmode="lin" valueType="num">
+                                      <p:cBhvr additive="base">
+                                        <p:cTn id="8" dur="500" fill="hold"/>
+                                        <p:tgtEl>
+                                          <p:spTgt spid="6"/>
+                                        </p:tgtEl>
+                                        <p:attrNameLst>
+                                          <p:attrName>ppt_y</p:attrName>
+                                        </p:attrNameLst>
+                                      </p:cBhvr>
+                                      <p:tavLst>
+                                        <p:tav tm="0">
+                                          <p:val>
+                                            <p:strVal val="1+#ppt_h/2"/>
+                                          </p:val>
+                                        </p:tav>
+                                        <p:tav tm="100000">
+                                          <p:val>
+                                            <p:strVal val="#ppt_y"/>
+                                          </p:val>
+                                        </p:tav>
+                                      </p:tavLst>
+                                    </p:anim>
+                                  </p:childTnLst>
+                                </p:cTn>
+                              </p:par>
+                            </p:childTnLst>
+                          </p:cTn>
+                        </p:par>
+                      </p:childTnLst>
+                    </p:cTn>
+                  </p:par>
+                </p:childTnLst>
+              </p:cTn>
+              <p:prevCondLst>
+                <p:cond evt="onPrev" delay="0">
+                  <p:tgtEl>
+                    <p:sldTgt/>
+                  </p:tgtEl>
+                </p:cond>
+              </p:prevCondLst>
+              <p:nextCondLst>
+                <p:cond evt="onNext" delay="0">
+                  <p:tgtEl>
+                    <p:sldTgt/>
+                  </p:tgtEl>
+                </p:cond>
+              </p:nextCondLst>
+            </p:seq>
+          </p:childTnLst>
+        </p:cTn>
+      </p:par>
+    </p:tnLst>
+    <p:bldLst>
+      <p:bldP spid="6" grpId="0"/>
+      <p:bldP spid="6" grpId="1"/>
+    </p:bldLst>
+  </p:timing>
 </p:sld>
 </file>
 
 <file path=ppt/slides/slide13.xml><?xml version="1.0" encoding="utf-8"?>
 <p:sld xmlns:a="http://schemas.openxmlformats.org/drawingml/2006/main" xmlns:r="http://schemas.openxmlformats.org/officeDocument/2006/relationships" xmlns:p="http://schemas.openxmlformats.org/presentationml/2006/main">
-  <p:cSld name="Slide 13">
+  <p:cSld>
     <p:bg>
       <p:bgPr>
         <a:blipFill dpi="0" rotWithShape="1">
@@ -3910,13 +3808,12 @@
             <a:avLst/>
           </a:prstGeom>
           <a:noFill/>
-          <a:ln/>
         </p:spPr>
         <p:txBody>
           <a:bodyPr wrap="square" rtlCol="0" anchor="ctr"/>
           <a:lstStyle/>
           <a:p>
-            <a:pPr algn="r" indent="0" marL="0">
+            <a:pPr marL="0" indent="0" algn="r">
               <a:buNone/>
             </a:pPr>
             <a:r>
@@ -3924,9 +3821,9 @@
                 <a:solidFill>
                   <a:srgbClr val="8A9099"/>
                 </a:solidFill>
-                <a:latin typeface="微软雅黑" pitchFamily="34" charset="0"/>
-                <a:ea typeface="微软雅黑" pitchFamily="34" charset="-122"/>
-                <a:cs typeface="微软雅黑" pitchFamily="34" charset="-120"/>
+                <a:latin typeface="微软雅黑" panose="020B0503020204020204" pitchFamily="34" charset="-122"/>
+                <a:ea typeface="微软雅黑" panose="020B0503020204020204" pitchFamily="34" charset="-122"/>
+                <a:cs typeface="微软雅黑" panose="020B0503020204020204" pitchFamily="34" charset="-120"/>
               </a:rPr>
               <a:t>13 / 16</a:t>
             </a:r>
@@ -3949,13 +3846,12 @@
             <a:avLst/>
           </a:prstGeom>
           <a:noFill/>
-          <a:ln/>
         </p:spPr>
         <p:txBody>
           <a:bodyPr wrap="square" rtlCol="0" anchor="ctr"/>
           <a:lstStyle/>
           <a:p>
-            <a:pPr algn="l" indent="0" marL="0">
+            <a:pPr marL="0" indent="0" algn="l">
               <a:buNone/>
             </a:pPr>
             <a:r>
@@ -3963,9 +3859,9 @@
                 <a:solidFill>
                   <a:srgbClr val="1F4E9C"/>
                 </a:solidFill>
-                <a:latin typeface="微软雅黑" pitchFamily="34" charset="0"/>
-                <a:ea typeface="微软雅黑" pitchFamily="34" charset="-122"/>
-                <a:cs typeface="微软雅黑" pitchFamily="34" charset="-120"/>
+                <a:latin typeface="微软雅黑" panose="020B0503020204020204" pitchFamily="34" charset="-122"/>
+                <a:ea typeface="微软雅黑" panose="020B0503020204020204" pitchFamily="34" charset="-122"/>
+                <a:cs typeface="微软雅黑" panose="020B0503020204020204" pitchFamily="34" charset="-120"/>
               </a:rPr>
               <a:t>树 · 求度</a:t>
             </a:r>
@@ -3988,13 +3884,12 @@
             <a:avLst/>
           </a:prstGeom>
           <a:noFill/>
-          <a:ln/>
         </p:spPr>
         <p:txBody>
           <a:bodyPr wrap="square" rtlCol="0" anchor="ctr"/>
           <a:lstStyle/>
           <a:p>
-            <a:pPr algn="l" indent="0" marL="0">
+            <a:pPr marL="0" indent="0" algn="l">
               <a:buNone/>
             </a:pPr>
             <a:r>
@@ -4002,9 +3897,9 @@
                 <a:solidFill>
                   <a:srgbClr val="1F2329"/>
                 </a:solidFill>
-                <a:latin typeface="微软雅黑" pitchFamily="34" charset="0"/>
-                <a:ea typeface="微软雅黑" pitchFamily="34" charset="-122"/>
-                <a:cs typeface="微软雅黑" pitchFamily="34" charset="-120"/>
+                <a:latin typeface="微软雅黑" panose="020B0503020204020204" pitchFamily="34" charset="-122"/>
+                <a:ea typeface="微软雅黑" panose="020B0503020204020204" pitchFamily="34" charset="-122"/>
+                <a:cs typeface="微软雅黑" panose="020B0503020204020204" pitchFamily="34" charset="-120"/>
               </a:rPr>
               <a:t>求树的度：孩子兄弟递归加一个全局变量</a:t>
             </a:r>
@@ -4029,7 +3924,6 @@
           <a:solidFill>
             <a:srgbClr val="F7F9FC"/>
           </a:solidFill>
-          <a:ln/>
         </p:spPr>
       </p:sp>
       <p:sp>
@@ -4049,7 +3943,6 @@
           <a:solidFill>
             <a:srgbClr val="1F4E9C"/>
           </a:solidFill>
-          <a:ln/>
         </p:spPr>
       </p:sp>
       <p:sp>
@@ -4067,13 +3960,12 @@
             <a:avLst/>
           </a:prstGeom>
           <a:noFill/>
-          <a:ln/>
         </p:spPr>
         <p:txBody>
           <a:bodyPr wrap="square" rtlCol="0" anchor="t"/>
           <a:lstStyle/>
           <a:p>
-            <a:pPr algn="l" indent="0" marL="0">
+            <a:pPr marL="0" indent="0" algn="l">
               <a:lnSpc>
                 <a:spcPct val="125000"/>
               </a:lnSpc>
@@ -4084,9 +3976,9 @@
                 <a:solidFill>
                   <a:srgbClr val="1F2329"/>
                 </a:solidFill>
-                <a:latin typeface="Consolas" pitchFamily="34" charset="0"/>
-                <a:ea typeface="Consolas" pitchFamily="34" charset="-122"/>
-                <a:cs typeface="Consolas" pitchFamily="34" charset="-120"/>
+                <a:latin typeface="Consolas" panose="020B0609020204030204" pitchFamily="34" charset="0"/>
+                <a:ea typeface="Consolas" panose="020B0609020204030204" pitchFamily="34" charset="-122"/>
+                <a:cs typeface="Consolas" panose="020B0609020204030204" pitchFamily="34" charset="-120"/>
               </a:rPr>
               <a:t>int degree = 0;                        // 全局变量，记最大度
 int Post(CSNode *p){
@@ -4117,13 +4009,12 @@
             <a:avLst/>
           </a:prstGeom>
           <a:noFill/>
-          <a:ln/>
         </p:spPr>
         <p:txBody>
           <a:bodyPr wrap="square" rtlCol="0" anchor="t"/>
           <a:lstStyle/>
           <a:p>
-            <a:pPr algn="l" indent="0" marL="0">
+            <a:pPr marL="0" indent="0" algn="l">
               <a:buNone/>
             </a:pPr>
             <a:r>
@@ -4131,9 +4022,9 @@
                 <a:solidFill>
                   <a:srgbClr val="8A9099"/>
                 </a:solidFill>
-                <a:latin typeface="微软雅黑" pitchFamily="34" charset="0"/>
-                <a:ea typeface="微软雅黑" pitchFamily="34" charset="-122"/>
-                <a:cs typeface="微软雅黑" pitchFamily="34" charset="-120"/>
+                <a:latin typeface="微软雅黑" panose="020B0503020204020204" pitchFamily="34" charset="-122"/>
+                <a:ea typeface="微软雅黑" panose="020B0503020204020204" pitchFamily="34" charset="-122"/>
+                <a:cs typeface="微软雅黑" panose="020B0503020204020204" pitchFamily="34" charset="-120"/>
               </a:rPr>
               <a:t>两个要点：Post(firstchild) 的返回值丢掉，它只负责递归进子树更新 degree；1+Post(nextbro) 数的是一条兄弟链的长度，正好是那个父结点的度</a:t>
             </a:r>
@@ -4151,7 +4042,7 @@
 
 <file path=ppt/slides/slide14.xml><?xml version="1.0" encoding="utf-8"?>
 <p:sld xmlns:a="http://schemas.openxmlformats.org/drawingml/2006/main" xmlns:r="http://schemas.openxmlformats.org/officeDocument/2006/relationships" xmlns:p="http://schemas.openxmlformats.org/presentationml/2006/main">
-  <p:cSld name="Slide 14">
+  <p:cSld>
     <p:bg>
       <p:bgPr>
         <a:blipFill dpi="0" rotWithShape="1">
@@ -4195,13 +4086,12 @@
             <a:avLst/>
           </a:prstGeom>
           <a:noFill/>
-          <a:ln/>
         </p:spPr>
         <p:txBody>
           <a:bodyPr wrap="square" rtlCol="0" anchor="ctr"/>
           <a:lstStyle/>
           <a:p>
-            <a:pPr algn="r" indent="0" marL="0">
+            <a:pPr marL="0" indent="0" algn="r">
               <a:buNone/>
             </a:pPr>
             <a:r>
@@ -4209,9 +4099,9 @@
                 <a:solidFill>
                   <a:srgbClr val="8A9099"/>
                 </a:solidFill>
-                <a:latin typeface="微软雅黑" pitchFamily="34" charset="0"/>
-                <a:ea typeface="微软雅黑" pitchFamily="34" charset="-122"/>
-                <a:cs typeface="微软雅黑" pitchFamily="34" charset="-120"/>
+                <a:latin typeface="微软雅黑" panose="020B0503020204020204" pitchFamily="34" charset="-122"/>
+                <a:ea typeface="微软雅黑" panose="020B0503020204020204" pitchFamily="34" charset="-122"/>
+                <a:cs typeface="微软雅黑" panose="020B0503020204020204" pitchFamily="34" charset="-120"/>
               </a:rPr>
               <a:t>14 / 16</a:t>
             </a:r>
@@ -4234,13 +4124,12 @@
             <a:avLst/>
           </a:prstGeom>
           <a:noFill/>
-          <a:ln/>
         </p:spPr>
         <p:txBody>
           <a:bodyPr wrap="square" rtlCol="0" anchor="ctr"/>
           <a:lstStyle/>
           <a:p>
-            <a:pPr algn="l" indent="0" marL="0">
+            <a:pPr marL="0" indent="0" algn="l">
               <a:buNone/>
             </a:pPr>
             <a:r>
@@ -4248,9 +4137,9 @@
                 <a:solidFill>
                   <a:srgbClr val="1F4E9C"/>
                 </a:solidFill>
-                <a:latin typeface="微软雅黑" pitchFamily="34" charset="0"/>
-                <a:ea typeface="微软雅黑" pitchFamily="34" charset="-122"/>
-                <a:cs typeface="微软雅黑" pitchFamily="34" charset="-120"/>
+                <a:latin typeface="微软雅黑" panose="020B0503020204020204" pitchFamily="34" charset="-122"/>
+                <a:ea typeface="微软雅黑" panose="020B0503020204020204" pitchFamily="34" charset="-122"/>
+                <a:cs typeface="微软雅黑" panose="020B0503020204020204" pitchFamily="34" charset="-120"/>
               </a:rPr>
               <a:t>本节小结与课后</a:t>
             </a:r>
@@ -4273,13 +4162,12 @@
             <a:avLst/>
           </a:prstGeom>
           <a:noFill/>
-          <a:ln/>
         </p:spPr>
         <p:txBody>
           <a:bodyPr wrap="square" rtlCol="0" anchor="ctr"/>
           <a:lstStyle/>
           <a:p>
-            <a:pPr algn="l" indent="0" marL="0">
+            <a:pPr marL="0" indent="0" algn="l">
               <a:buNone/>
             </a:pPr>
             <a:r>
@@ -4287,9 +4175,9 @@
                 <a:solidFill>
                   <a:srgbClr val="1F2329"/>
                 </a:solidFill>
-                <a:latin typeface="微软雅黑" pitchFamily="34" charset="0"/>
-                <a:ea typeface="微软雅黑" pitchFamily="34" charset="-122"/>
-                <a:cs typeface="微软雅黑" pitchFamily="34" charset="-120"/>
+                <a:latin typeface="微软雅黑" panose="020B0503020204020204" pitchFamily="34" charset="-122"/>
+                <a:ea typeface="微软雅黑" panose="020B0503020204020204" pitchFamily="34" charset="-122"/>
+                <a:cs typeface="微软雅黑" panose="020B0503020204020204" pitchFamily="34" charset="-120"/>
               </a:rPr>
               <a:t>小结与课后任务</a:t>
             </a:r>
@@ -4312,13 +4200,12 @@
             <a:avLst/>
           </a:prstGeom>
           <a:noFill/>
-          <a:ln/>
         </p:spPr>
         <p:txBody>
           <a:bodyPr wrap="square" rtlCol="0" anchor="t"/>
           <a:lstStyle/>
           <a:p>
-            <a:pPr algn="l" indent="0" marL="0">
+            <a:pPr marL="0" indent="0" algn="l">
               <a:lnSpc>
                 <a:spcPct val="115000"/>
               </a:lnSpc>
@@ -4329,25 +4216,68 @@
                 <a:solidFill>
                   <a:srgbClr val="1F4E9C"/>
                 </a:solidFill>
-                <a:latin typeface="微软雅黑" pitchFamily="34" charset="0"/>
-                <a:ea typeface="微软雅黑" pitchFamily="34" charset="-122"/>
-                <a:cs typeface="微软雅黑" pitchFamily="34" charset="-120"/>
+                <a:latin typeface="微软雅黑" panose="020B0503020204020204" pitchFamily="34" charset="-122"/>
+                <a:ea typeface="微软雅黑" panose="020B0503020204020204" pitchFamily="34" charset="-122"/>
+                <a:cs typeface="微软雅黑" panose="020B0503020204020204" pitchFamily="34" charset="-120"/>
               </a:rPr>
               <a:t>•  </a:t>
             </a:r>
-            <a:pPr algn="l" indent="0" marL="0">
+            <a:r>
+              <a:rPr lang="en-US" sz="1800" dirty="0">
+                <a:solidFill>
+                  <a:srgbClr val="000000"/>
+                </a:solidFill>
+              </a:rPr>
+              <a:t>线索化：利用 n+1 个空链域指前驱后继，ltag/rtag 区分孩子与线索；InThread 靠 pre 建前驱线索、回填后继线索</a:t>
+            </a:r>
+            <a:endParaRPr lang="en-US" sz="1800" dirty="0"/>
+          </a:p>
+        </p:txBody>
+      </p:sp>
+      <p:sp>
+        <p:nvSpPr>
+          <p:cNvPr id="6" name="Text 4"/>
+          <p:cNvSpPr/>
+          <p:nvPr/>
+        </p:nvSpPr>
+        <p:spPr>
+          <a:xfrm>
+            <a:off x="896112" y="3209544"/>
+            <a:ext cx="10454335" cy="740664"/>
+          </a:xfrm>
+          <a:prstGeom prst="rect">
+            <a:avLst/>
+          </a:prstGeom>
+          <a:noFill/>
+        </p:spPr>
+        <p:txBody>
+          <a:bodyPr wrap="square" rtlCol="0" anchor="t"/>
+          <a:lstStyle/>
+          <a:p>
+            <a:pPr marL="0" indent="0" algn="l">
               <a:lnSpc>
                 <a:spcPct val="115000"/>
               </a:lnSpc>
               <a:buNone/>
             </a:pPr>
             <a:r>
+              <a:rPr lang="en-US" sz="1800" b="1" dirty="0">
+                <a:solidFill>
+                  <a:srgbClr val="1F4E9C"/>
+                </a:solidFill>
+                <a:latin typeface="微软雅黑" panose="020B0503020204020204" pitchFamily="34" charset="-122"/>
+                <a:ea typeface="微软雅黑" panose="020B0503020204020204" pitchFamily="34" charset="-122"/>
+                <a:cs typeface="微软雅黑" panose="020B0503020204020204" pitchFamily="34" charset="-120"/>
+              </a:rPr>
+              <a:t>•  </a:t>
+            </a:r>
+            <a:r>
               <a:rPr lang="en-US" sz="1800" dirty="0">
                 <a:solidFill>
                   <a:srgbClr val="000000"/>
                 </a:solidFill>
               </a:rPr>
-              <a:t>线索化：利用 n+1 个空链域指前驱后继，ltag/rtag 区分孩子与线索；InThread 靠 pre 建前驱线索、回填后继线索</a:t>
+              <a:t>线索树遍历：Firstnode 找起点、Nextnode 找后继，不用栈、空间 O(1)</a:t>
             </a:r>
             <a:endParaRPr lang="en-US" sz="1800" dirty="0"/>
           </a:p>
@@ -4355,26 +4285,25 @@
       </p:sp>
       <p:sp>
         <p:nvSpPr>
-          <p:cNvPr id="6" name="Text 4"/>
-          <p:cNvSpPr/>
-          <p:nvPr/>
-        </p:nvSpPr>
-        <p:spPr>
-          <a:xfrm>
-            <a:off x="896112" y="3209544"/>
-            <a:ext cx="10454335" cy="740664"/>
-          </a:xfrm>
-          <a:prstGeom prst="rect">
-            <a:avLst/>
-          </a:prstGeom>
-          <a:noFill/>
-          <a:ln/>
+          <p:cNvPr id="7" name="Text 5"/>
+          <p:cNvSpPr/>
+          <p:nvPr/>
+        </p:nvSpPr>
+        <p:spPr>
+          <a:xfrm>
+            <a:off x="896112" y="4023360"/>
+            <a:ext cx="10454335" cy="397764"/>
+          </a:xfrm>
+          <a:prstGeom prst="rect">
+            <a:avLst/>
+          </a:prstGeom>
+          <a:noFill/>
         </p:spPr>
         <p:txBody>
           <a:bodyPr wrap="square" rtlCol="0" anchor="t"/>
           <a:lstStyle/>
           <a:p>
-            <a:pPr algn="l" indent="0" marL="0">
+            <a:pPr marL="0" indent="0" algn="l">
               <a:lnSpc>
                 <a:spcPct val="115000"/>
               </a:lnSpc>
@@ -4385,172 +4314,85 @@
                 <a:solidFill>
                   <a:srgbClr val="1F4E9C"/>
                 </a:solidFill>
-                <a:latin typeface="微软雅黑" pitchFamily="34" charset="0"/>
-                <a:ea typeface="微软雅黑" pitchFamily="34" charset="-122"/>
-                <a:cs typeface="微软雅黑" pitchFamily="34" charset="-120"/>
+                <a:latin typeface="微软雅黑" panose="020B0503020204020204" pitchFamily="34" charset="-122"/>
+                <a:ea typeface="微软雅黑" panose="020B0503020204020204" pitchFamily="34" charset="-122"/>
+                <a:cs typeface="微软雅黑" panose="020B0503020204020204" pitchFamily="34" charset="-120"/>
               </a:rPr>
               <a:t>•  </a:t>
             </a:r>
-            <a:pPr algn="l" indent="0" marL="0">
+            <a:r>
+              <a:rPr lang="en-US" sz="1800" dirty="0">
+                <a:solidFill>
+                  <a:srgbClr val="000000"/>
+                </a:solidFill>
+              </a:rPr>
+              <a:t>树与森林：孩子兄弟存储，第一个孩子往左、兄弟往右转成二叉树；先根对先序、后根对中序</a:t>
+            </a:r>
+            <a:endParaRPr lang="en-US" sz="1800" dirty="0"/>
+          </a:p>
+        </p:txBody>
+      </p:sp>
+      <p:sp>
+        <p:nvSpPr>
+          <p:cNvPr id="8" name="Text 6"/>
+          <p:cNvSpPr/>
+          <p:nvPr/>
+        </p:nvSpPr>
+        <p:spPr>
+          <a:xfrm>
+            <a:off x="896112" y="4494276"/>
+            <a:ext cx="10454335" cy="740664"/>
+          </a:xfrm>
+          <a:prstGeom prst="rect">
+            <a:avLst/>
+          </a:prstGeom>
+          <a:noFill/>
+        </p:spPr>
+        <p:txBody>
+          <a:bodyPr wrap="square" rtlCol="0" anchor="t"/>
+          <a:lstStyle/>
+          <a:p>
+            <a:pPr marL="0" indent="0" algn="l">
               <a:lnSpc>
                 <a:spcPct val="115000"/>
               </a:lnSpc>
               <a:buNone/>
             </a:pPr>
             <a:r>
+              <a:rPr lang="en-US" sz="1800" b="1" dirty="0">
+                <a:solidFill>
+                  <a:srgbClr val="1F4E9C"/>
+                </a:solidFill>
+                <a:latin typeface="微软雅黑" panose="020B0503020204020204" pitchFamily="34" charset="-122"/>
+                <a:ea typeface="微软雅黑" panose="020B0503020204020204" pitchFamily="34" charset="-122"/>
+                <a:cs typeface="微软雅黑" panose="020B0503020204020204" pitchFamily="34" charset="-120"/>
+              </a:rPr>
+              <a:t>•  </a:t>
+            </a:r>
+            <a:r>
+              <a:rPr lang="en-US" sz="1800" b="1" dirty="0">
+                <a:solidFill>
+                  <a:srgbClr val="000000"/>
+                </a:solidFill>
+              </a:rPr>
+              <a:t>跟练</a:t>
+            </a:r>
+            <a:r>
               <a:rPr lang="en-US" sz="1800" dirty="0">
                 <a:solidFill>
                   <a:srgbClr val="000000"/>
                 </a:solidFill>
               </a:rPr>
-              <a:t>线索树遍历：Firstnode 找起点、Nextnode 找后继，不用栈、空间 O(1)</a:t>
-            </a:r>
-            <a:endParaRPr lang="en-US" sz="1800" dirty="0"/>
-          </a:p>
-        </p:txBody>
-      </p:sp>
-      <p:sp>
-        <p:nvSpPr>
-          <p:cNvPr id="7" name="Text 5"/>
-          <p:cNvSpPr/>
-          <p:nvPr/>
-        </p:nvSpPr>
-        <p:spPr>
-          <a:xfrm>
-            <a:off x="896112" y="4023360"/>
-            <a:ext cx="10454335" cy="397764"/>
-          </a:xfrm>
-          <a:prstGeom prst="rect">
-            <a:avLst/>
-          </a:prstGeom>
-          <a:noFill/>
-          <a:ln/>
-        </p:spPr>
-        <p:txBody>
-          <a:bodyPr wrap="square" rtlCol="0" anchor="t"/>
-          <a:lstStyle/>
-          <a:p>
-            <a:pPr algn="l" indent="0" marL="0">
-              <a:lnSpc>
-                <a:spcPct val="115000"/>
-              </a:lnSpc>
-              <a:buNone/>
-            </a:pPr>
+              <a:t>：默写 BiThrNode 定义与中序线索化两个函数；给一棵三层的树画先根、后根序列和对应二叉树。</a:t>
+            </a:r>
             <a:r>
               <a:rPr lang="en-US" sz="1800" b="1" dirty="0">
                 <a:solidFill>
-                  <a:srgbClr val="1F4E9C"/>
-                </a:solidFill>
-                <a:latin typeface="微软雅黑" pitchFamily="34" charset="0"/>
-                <a:ea typeface="微软雅黑" pitchFamily="34" charset="-122"/>
-                <a:cs typeface="微软雅黑" pitchFamily="34" charset="-120"/>
-              </a:rPr>
-              <a:t>•  </a:t>
-            </a:r>
-            <a:pPr algn="l" indent="0" marL="0">
-              <a:lnSpc>
-                <a:spcPct val="115000"/>
-              </a:lnSpc>
-              <a:buNone/>
-            </a:pPr>
-            <a:r>
-              <a:rPr lang="en-US" sz="1800" dirty="0">
-                <a:solidFill>
                   <a:srgbClr val="000000"/>
                 </a:solidFill>
               </a:rPr>
-              <a:t>树与森林：孩子兄弟存储，第一个孩子往左、兄弟往右转成二叉树；先根对先序、后根对中序</a:t>
-            </a:r>
-            <a:endParaRPr lang="en-US" sz="1800" dirty="0"/>
-          </a:p>
-        </p:txBody>
-      </p:sp>
-      <p:sp>
-        <p:nvSpPr>
-          <p:cNvPr id="8" name="Text 6"/>
-          <p:cNvSpPr/>
-          <p:nvPr/>
-        </p:nvSpPr>
-        <p:spPr>
-          <a:xfrm>
-            <a:off x="896112" y="4494276"/>
-            <a:ext cx="10454335" cy="740664"/>
-          </a:xfrm>
-          <a:prstGeom prst="rect">
-            <a:avLst/>
-          </a:prstGeom>
-          <a:noFill/>
-          <a:ln/>
-        </p:spPr>
-        <p:txBody>
-          <a:bodyPr wrap="square" rtlCol="0" anchor="t"/>
-          <a:lstStyle/>
-          <a:p>
-            <a:pPr algn="l" indent="0" marL="0">
-              <a:lnSpc>
-                <a:spcPct val="115000"/>
-              </a:lnSpc>
-              <a:buNone/>
-            </a:pPr>
-            <a:r>
-              <a:rPr lang="en-US" sz="1800" b="1" dirty="0">
-                <a:solidFill>
-                  <a:srgbClr val="1F4E9C"/>
-                </a:solidFill>
-                <a:latin typeface="微软雅黑" pitchFamily="34" charset="0"/>
-                <a:ea typeface="微软雅黑" pitchFamily="34" charset="-122"/>
-                <a:cs typeface="微软雅黑" pitchFamily="34" charset="-120"/>
-              </a:rPr>
-              <a:t>•  </a:t>
-            </a:r>
-            <a:pPr algn="l" indent="0" marL="0">
-              <a:lnSpc>
-                <a:spcPct val="115000"/>
-              </a:lnSpc>
-              <a:buNone/>
-            </a:pPr>
-            <a:r>
-              <a:rPr lang="en-US" sz="1800" b="1" dirty="0">
-                <a:solidFill>
-                  <a:srgbClr val="000000"/>
-                </a:solidFill>
-              </a:rPr>
-              <a:t>跟练</a:t>
-            </a:r>
-            <a:pPr algn="l" indent="0" marL="0">
-              <a:lnSpc>
-                <a:spcPct val="115000"/>
-              </a:lnSpc>
-              <a:buNone/>
-            </a:pPr>
-            <a:r>
-              <a:rPr lang="en-US" sz="1800" dirty="0">
-                <a:solidFill>
-                  <a:srgbClr val="000000"/>
-                </a:solidFill>
-              </a:rPr>
-              <a:t>：默写 BiThrNode 定义与中序线索化两个函数；给一棵三层的树画先根、后根序列和对应二叉树。</a:t>
-            </a:r>
-            <a:pPr algn="l" indent="0" marL="0">
-              <a:lnSpc>
-                <a:spcPct val="115000"/>
-              </a:lnSpc>
-              <a:buNone/>
-            </a:pPr>
-            <a:r>
-              <a:rPr lang="en-US" sz="1800" b="1" dirty="0">
-                <a:solidFill>
-                  <a:srgbClr val="000000"/>
-                </a:solidFill>
-              </a:rPr>
               <a:t>模仿</a:t>
             </a:r>
-            <a:pPr algn="l" indent="0" marL="0">
-              <a:lnSpc>
-                <a:spcPct val="115000"/>
-              </a:lnSpc>
-              <a:buNone/>
-            </a:pPr>
             <a:r>
               <a:rPr lang="en-US" sz="1800" dirty="0">
                 <a:solidFill>
@@ -4578,13 +4420,12 @@
             <a:avLst/>
           </a:prstGeom>
           <a:noFill/>
-          <a:ln/>
         </p:spPr>
         <p:txBody>
           <a:bodyPr wrap="square" rtlCol="0" anchor="t"/>
           <a:lstStyle/>
           <a:p>
-            <a:pPr algn="l" indent="0" marL="0">
+            <a:pPr marL="0" indent="0" algn="l">
               <a:buNone/>
             </a:pPr>
             <a:r>
@@ -4592,9 +4433,9 @@
                 <a:solidFill>
                   <a:srgbClr val="8A9099"/>
                 </a:solidFill>
-                <a:latin typeface="微软雅黑" pitchFamily="34" charset="0"/>
-                <a:ea typeface="微软雅黑" pitchFamily="34" charset="-122"/>
-                <a:cs typeface="微软雅黑" pitchFamily="34" charset="-120"/>
+                <a:latin typeface="微软雅黑" panose="020B0503020204020204" pitchFamily="34" charset="-122"/>
+                <a:ea typeface="微软雅黑" panose="020B0503020204020204" pitchFamily="34" charset="-122"/>
+                <a:cs typeface="微软雅黑" panose="020B0503020204020204" pitchFamily="34" charset="-120"/>
               </a:rPr>
               <a:t>线索化和树森林看似无关，其实共用孩子兄弟这一个结构；参考答案在本PPT最后两页，课后自行对照</a:t>
             </a:r>
@@ -4612,7 +4453,7 @@
 
 <file path=ppt/slides/slide15.xml><?xml version="1.0" encoding="utf-8"?>
 <p:sld xmlns:a="http://schemas.openxmlformats.org/drawingml/2006/main" xmlns:r="http://schemas.openxmlformats.org/officeDocument/2006/relationships" xmlns:p="http://schemas.openxmlformats.org/presentationml/2006/main">
-  <p:cSld name="Slide 15">
+  <p:cSld>
     <p:bg>
       <p:bgPr>
         <a:blipFill dpi="0" rotWithShape="1">
@@ -4656,13 +4497,12 @@
             <a:avLst/>
           </a:prstGeom>
           <a:noFill/>
-          <a:ln/>
         </p:spPr>
         <p:txBody>
           <a:bodyPr wrap="square" rtlCol="0" anchor="ctr"/>
           <a:lstStyle/>
           <a:p>
-            <a:pPr algn="r" indent="0" marL="0">
+            <a:pPr marL="0" indent="0" algn="r">
               <a:buNone/>
             </a:pPr>
             <a:r>
@@ -4670,9 +4510,9 @@
                 <a:solidFill>
                   <a:srgbClr val="8A9099"/>
                 </a:solidFill>
-                <a:latin typeface="微软雅黑" pitchFamily="34" charset="0"/>
-                <a:ea typeface="微软雅黑" pitchFamily="34" charset="-122"/>
-                <a:cs typeface="微软雅黑" pitchFamily="34" charset="-120"/>
+                <a:latin typeface="微软雅黑" panose="020B0503020204020204" pitchFamily="34" charset="-122"/>
+                <a:ea typeface="微软雅黑" panose="020B0503020204020204" pitchFamily="34" charset="-122"/>
+                <a:cs typeface="微软雅黑" panose="020B0503020204020204" pitchFamily="34" charset="-120"/>
               </a:rPr>
               <a:t>15 / 16</a:t>
             </a:r>
@@ -4695,13 +4535,12 @@
             <a:avLst/>
           </a:prstGeom>
           <a:noFill/>
-          <a:ln/>
         </p:spPr>
         <p:txBody>
           <a:bodyPr wrap="square" rtlCol="0" anchor="ctr"/>
           <a:lstStyle/>
           <a:p>
-            <a:pPr algn="l" indent="0" marL="0">
+            <a:pPr marL="0" indent="0" algn="l">
               <a:buNone/>
             </a:pPr>
             <a:r>
@@ -4709,9 +4548,9 @@
                 <a:solidFill>
                   <a:srgbClr val="1F4E9C"/>
                 </a:solidFill>
-                <a:latin typeface="微软雅黑" pitchFamily="34" charset="0"/>
-                <a:ea typeface="微软雅黑" pitchFamily="34" charset="-122"/>
-                <a:cs typeface="微软雅黑" pitchFamily="34" charset="-120"/>
+                <a:latin typeface="微软雅黑" panose="020B0503020204020204" pitchFamily="34" charset="-122"/>
+                <a:ea typeface="微软雅黑" panose="020B0503020204020204" pitchFamily="34" charset="-122"/>
+                <a:cs typeface="微软雅黑" panose="020B0503020204020204" pitchFamily="34" charset="-120"/>
               </a:rPr>
               <a:t>参考答案 · 跟练题</a:t>
             </a:r>
@@ -4734,13 +4573,12 @@
             <a:avLst/>
           </a:prstGeom>
           <a:noFill/>
-          <a:ln/>
         </p:spPr>
         <p:txBody>
           <a:bodyPr wrap="square" rtlCol="0" anchor="ctr"/>
           <a:lstStyle/>
           <a:p>
-            <a:pPr algn="l" indent="0" marL="0">
+            <a:pPr marL="0" indent="0" algn="l">
               <a:buNone/>
             </a:pPr>
             <a:r>
@@ -4748,9 +4586,9 @@
                 <a:solidFill>
                   <a:srgbClr val="1F2329"/>
                 </a:solidFill>
-                <a:latin typeface="微软雅黑" pitchFamily="34" charset="0"/>
-                <a:ea typeface="微软雅黑" pitchFamily="34" charset="-122"/>
-                <a:cs typeface="微软雅黑" pitchFamily="34" charset="-120"/>
+                <a:latin typeface="微软雅黑" panose="020B0503020204020204" pitchFamily="34" charset="-122"/>
+                <a:ea typeface="微软雅黑" panose="020B0503020204020204" pitchFamily="34" charset="-122"/>
+                <a:cs typeface="微软雅黑" panose="020B0503020204020204" pitchFamily="34" charset="-120"/>
               </a:rPr>
               <a:t>跟练题参考答案（自行对照）</a:t>
             </a:r>
@@ -4775,7 +4613,6 @@
           <a:solidFill>
             <a:srgbClr val="F7F9FC"/>
           </a:solidFill>
-          <a:ln/>
         </p:spPr>
       </p:sp>
       <p:sp>
@@ -4795,7 +4632,6 @@
           <a:solidFill>
             <a:srgbClr val="1F4E9C"/>
           </a:solidFill>
-          <a:ln/>
         </p:spPr>
       </p:sp>
       <p:sp>
@@ -4813,13 +4649,12 @@
             <a:avLst/>
           </a:prstGeom>
           <a:noFill/>
-          <a:ln/>
         </p:spPr>
         <p:txBody>
           <a:bodyPr wrap="square" rtlCol="0" anchor="t"/>
           <a:lstStyle/>
           <a:p>
-            <a:pPr algn="l" indent="0" marL="0">
+            <a:pPr marL="0" indent="0" algn="l">
               <a:lnSpc>
                 <a:spcPct val="125000"/>
               </a:lnSpc>
@@ -4830,9 +4665,9 @@
                 <a:solidFill>
                   <a:srgbClr val="1F2329"/>
                 </a:solidFill>
-                <a:latin typeface="Consolas" pitchFamily="34" charset="0"/>
-                <a:ea typeface="Consolas" pitchFamily="34" charset="-122"/>
-                <a:cs typeface="Consolas" pitchFamily="34" charset="-120"/>
+                <a:latin typeface="Consolas" panose="020B0609020204030204" pitchFamily="34" charset="0"/>
+                <a:ea typeface="Consolas" panose="020B0609020204030204" pitchFamily="34" charset="-122"/>
+                <a:cs typeface="Consolas" panose="020B0609020204030204" pitchFamily="34" charset="-120"/>
               </a:rPr>
               <a:t>typedef struct BiThrNode{ int data;
     struct BiThrNode *lchild, *rchild; int ltag, rtag; }BiThrNode, *BiThrTree;
@@ -4864,13 +4699,12 @@
             <a:avLst/>
           </a:prstGeom>
           <a:noFill/>
-          <a:ln/>
         </p:spPr>
         <p:txBody>
           <a:bodyPr wrap="square" rtlCol="0" anchor="t"/>
           <a:lstStyle/>
           <a:p>
-            <a:pPr algn="l" indent="0" marL="0">
+            <a:pPr marL="0" indent="0" algn="l">
               <a:buNone/>
             </a:pPr>
             <a:r>
@@ -4878,9 +4712,9 @@
                 <a:solidFill>
                   <a:srgbClr val="8A9099"/>
                 </a:solidFill>
-                <a:latin typeface="微软雅黑" pitchFamily="34" charset="0"/>
-                <a:ea typeface="微软雅黑" pitchFamily="34" charset="-122"/>
-                <a:cs typeface="微软雅黑" pitchFamily="34" charset="-120"/>
+                <a:latin typeface="微软雅黑" panose="020B0503020204020204" pitchFamily="34" charset="-122"/>
+                <a:ea typeface="微软雅黑" panose="020B0503020204020204" pitchFamily="34" charset="-122"/>
+                <a:cs typeface="微软雅黑" panose="020B0503020204020204" pitchFamily="34" charset="-120"/>
               </a:rPr>
               <a:t>三层树的先根=根先、后根=根后；对应二叉树按“第一个孩子往左、兄弟往右”画。求度与遍历见本节代码</a:t>
             </a:r>
@@ -4898,7 +4732,7 @@
 
 <file path=ppt/slides/slide16.xml><?xml version="1.0" encoding="utf-8"?>
 <p:sld xmlns:a="http://schemas.openxmlformats.org/drawingml/2006/main" xmlns:r="http://schemas.openxmlformats.org/officeDocument/2006/relationships" xmlns:p="http://schemas.openxmlformats.org/presentationml/2006/main">
-  <p:cSld name="Slide 16">
+  <p:cSld>
     <p:bg>
       <p:bgPr>
         <a:blipFill dpi="0" rotWithShape="1">
@@ -4942,13 +4776,12 @@
             <a:avLst/>
           </a:prstGeom>
           <a:noFill/>
-          <a:ln/>
         </p:spPr>
         <p:txBody>
           <a:bodyPr wrap="square" rtlCol="0" anchor="ctr"/>
           <a:lstStyle/>
           <a:p>
-            <a:pPr algn="r" indent="0" marL="0">
+            <a:pPr marL="0" indent="0" algn="r">
               <a:buNone/>
             </a:pPr>
             <a:r>
@@ -4956,9 +4789,9 @@
                 <a:solidFill>
                   <a:srgbClr val="8A9099"/>
                 </a:solidFill>
-                <a:latin typeface="微软雅黑" pitchFamily="34" charset="0"/>
-                <a:ea typeface="微软雅黑" pitchFamily="34" charset="-122"/>
-                <a:cs typeface="微软雅黑" pitchFamily="34" charset="-120"/>
+                <a:latin typeface="微软雅黑" panose="020B0503020204020204" pitchFamily="34" charset="-122"/>
+                <a:ea typeface="微软雅黑" panose="020B0503020204020204" pitchFamily="34" charset="-122"/>
+                <a:cs typeface="微软雅黑" panose="020B0503020204020204" pitchFamily="34" charset="-120"/>
               </a:rPr>
               <a:t>16 / 16</a:t>
             </a:r>
@@ -4981,13 +4814,12 @@
             <a:avLst/>
           </a:prstGeom>
           <a:noFill/>
-          <a:ln/>
         </p:spPr>
         <p:txBody>
           <a:bodyPr wrap="square" rtlCol="0" anchor="ctr"/>
           <a:lstStyle/>
           <a:p>
-            <a:pPr algn="l" indent="0" marL="0">
+            <a:pPr marL="0" indent="0" algn="l">
               <a:buNone/>
             </a:pPr>
             <a:r>
@@ -4995,9 +4827,9 @@
                 <a:solidFill>
                   <a:srgbClr val="1F4E9C"/>
                 </a:solidFill>
-                <a:latin typeface="微软雅黑" pitchFamily="34" charset="0"/>
-                <a:ea typeface="微软雅黑" pitchFamily="34" charset="-122"/>
-                <a:cs typeface="微软雅黑" pitchFamily="34" charset="-120"/>
+                <a:latin typeface="微软雅黑" panose="020B0503020204020204" pitchFamily="34" charset="-122"/>
+                <a:ea typeface="微软雅黑" panose="020B0503020204020204" pitchFamily="34" charset="-122"/>
+                <a:cs typeface="微软雅黑" panose="020B0503020204020204" pitchFamily="34" charset="-120"/>
               </a:rPr>
               <a:t>参考答案 · 模仿题</a:t>
             </a:r>
@@ -5020,13 +4852,12 @@
             <a:avLst/>
           </a:prstGeom>
           <a:noFill/>
-          <a:ln/>
         </p:spPr>
         <p:txBody>
           <a:bodyPr wrap="square" rtlCol="0" anchor="ctr"/>
           <a:lstStyle/>
           <a:p>
-            <a:pPr algn="l" indent="0" marL="0">
+            <a:pPr marL="0" indent="0" algn="l">
               <a:buNone/>
             </a:pPr>
             <a:r>
@@ -5034,9 +4865,9 @@
                 <a:solidFill>
                   <a:srgbClr val="1F2329"/>
                 </a:solidFill>
-                <a:latin typeface="微软雅黑" pitchFamily="34" charset="0"/>
-                <a:ea typeface="微软雅黑" pitchFamily="34" charset="-122"/>
-                <a:cs typeface="微软雅黑" pitchFamily="34" charset="-120"/>
+                <a:latin typeface="微软雅黑" panose="020B0503020204020204" pitchFamily="34" charset="-122"/>
+                <a:ea typeface="微软雅黑" panose="020B0503020204020204" pitchFamily="34" charset="-122"/>
+                <a:cs typeface="微软雅黑" panose="020B0503020204020204" pitchFamily="34" charset="-120"/>
               </a:rPr>
               <a:t>模仿题参考答案（自行对照）</a:t>
             </a:r>
@@ -5059,13 +4890,12 @@
             <a:avLst/>
           </a:prstGeom>
           <a:noFill/>
-          <a:ln/>
         </p:spPr>
         <p:txBody>
           <a:bodyPr wrap="square" rtlCol="0" anchor="t"/>
           <a:lstStyle/>
           <a:p>
-            <a:pPr algn="l" indent="0" marL="0">
+            <a:pPr marL="0" indent="0" algn="l">
               <a:lnSpc>
                 <a:spcPct val="115000"/>
               </a:lnSpc>
@@ -5076,25 +4906,68 @@
                 <a:solidFill>
                   <a:srgbClr val="1F4E9C"/>
                 </a:solidFill>
-                <a:latin typeface="微软雅黑" pitchFamily="34" charset="0"/>
-                <a:ea typeface="微软雅黑" pitchFamily="34" charset="-122"/>
-                <a:cs typeface="微软雅黑" pitchFamily="34" charset="-120"/>
+                <a:latin typeface="微软雅黑" panose="020B0503020204020204" pitchFamily="34" charset="-122"/>
+                <a:ea typeface="微软雅黑" panose="020B0503020204020204" pitchFamily="34" charset="-122"/>
+                <a:cs typeface="微软雅黑" panose="020B0503020204020204" pitchFamily="34" charset="-120"/>
               </a:rPr>
               <a:t>•  </a:t>
             </a:r>
-            <a:pPr algn="l" indent="0" marL="0">
+            <a:r>
+              <a:rPr lang="en-US" sz="1800" dirty="0">
+                <a:solidFill>
+                  <a:srgbClr val="000000"/>
+                </a:solidFill>
+              </a:rPr>
+              <a:t>二叉树还原成森林，是树转二叉树的逆过程：根往下的左链是各棵树的根，右链是森林里的后续树</a:t>
+            </a:r>
+            <a:endParaRPr lang="en-US" sz="1800" dirty="0"/>
+          </a:p>
+        </p:txBody>
+      </p:sp>
+      <p:sp>
+        <p:nvSpPr>
+          <p:cNvPr id="6" name="Text 4"/>
+          <p:cNvSpPr/>
+          <p:nvPr/>
+        </p:nvSpPr>
+        <p:spPr>
+          <a:xfrm>
+            <a:off x="896112" y="3209544"/>
+            <a:ext cx="10454335" cy="397764"/>
+          </a:xfrm>
+          <a:prstGeom prst="rect">
+            <a:avLst/>
+          </a:prstGeom>
+          <a:noFill/>
+        </p:spPr>
+        <p:txBody>
+          <a:bodyPr wrap="square" rtlCol="0" anchor="t"/>
+          <a:lstStyle/>
+          <a:p>
+            <a:pPr marL="0" indent="0" algn="l">
               <a:lnSpc>
                 <a:spcPct val="115000"/>
               </a:lnSpc>
               <a:buNone/>
             </a:pPr>
             <a:r>
+              <a:rPr lang="en-US" sz="1800" b="1" dirty="0">
+                <a:solidFill>
+                  <a:srgbClr val="1F4E9C"/>
+                </a:solidFill>
+                <a:latin typeface="微软雅黑" panose="020B0503020204020204" pitchFamily="34" charset="-122"/>
+                <a:ea typeface="微软雅黑" panose="020B0503020204020204" pitchFamily="34" charset="-122"/>
+                <a:cs typeface="微软雅黑" panose="020B0503020204020204" pitchFamily="34" charset="-120"/>
+              </a:rPr>
+              <a:t>•  </a:t>
+            </a:r>
+            <a:r>
               <a:rPr lang="en-US" sz="1800" dirty="0">
                 <a:solidFill>
                   <a:srgbClr val="000000"/>
                 </a:solidFill>
               </a:rPr>
-              <a:t>二叉树还原成森林，是树转二叉树的逆过程：根往下的左链是各棵树的根，右链是森林里的后续树</a:t>
+              <a:t>具体：从根出发，沿左孩子走下去的每个结点，它的右子树都拆出来作为一棵独立的树</a:t>
             </a:r>
             <a:endParaRPr lang="en-US" sz="1800" dirty="0"/>
           </a:p>
@@ -5102,26 +4975,25 @@
       </p:sp>
       <p:sp>
         <p:nvSpPr>
-          <p:cNvPr id="6" name="Text 4"/>
-          <p:cNvSpPr/>
-          <p:nvPr/>
-        </p:nvSpPr>
-        <p:spPr>
-          <a:xfrm>
-            <a:off x="896112" y="3209544"/>
-            <a:ext cx="10454335" cy="397764"/>
-          </a:xfrm>
-          <a:prstGeom prst="rect">
-            <a:avLst/>
-          </a:prstGeom>
-          <a:noFill/>
-          <a:ln/>
+          <p:cNvPr id="7" name="Text 5"/>
+          <p:cNvSpPr/>
+          <p:nvPr/>
+        </p:nvSpPr>
+        <p:spPr>
+          <a:xfrm>
+            <a:off x="896112" y="3680460"/>
+            <a:ext cx="10454335" cy="740664"/>
+          </a:xfrm>
+          <a:prstGeom prst="rect">
+            <a:avLst/>
+          </a:prstGeom>
+          <a:noFill/>
         </p:spPr>
         <p:txBody>
           <a:bodyPr wrap="square" rtlCol="0" anchor="t"/>
           <a:lstStyle/>
           <a:p>
-            <a:pPr algn="l" indent="0" marL="0">
+            <a:pPr marL="0" indent="0" algn="l">
               <a:lnSpc>
                 <a:spcPct val="115000"/>
               </a:lnSpc>
@@ -5132,74 +5004,12 @@
                 <a:solidFill>
                   <a:srgbClr val="1F4E9C"/>
                 </a:solidFill>
-                <a:latin typeface="微软雅黑" pitchFamily="34" charset="0"/>
-                <a:ea typeface="微软雅黑" pitchFamily="34" charset="-122"/>
-                <a:cs typeface="微软雅黑" pitchFamily="34" charset="-120"/>
+                <a:latin typeface="微软雅黑" panose="020B0503020204020204" pitchFamily="34" charset="-122"/>
+                <a:ea typeface="微软雅黑" panose="020B0503020204020204" pitchFamily="34" charset="-122"/>
+                <a:cs typeface="微软雅黑" panose="020B0503020204020204" pitchFamily="34" charset="-120"/>
               </a:rPr>
               <a:t>•  </a:t>
             </a:r>
-            <a:pPr algn="l" indent="0" marL="0">
-              <a:lnSpc>
-                <a:spcPct val="115000"/>
-              </a:lnSpc>
-              <a:buNone/>
-            </a:pPr>
-            <a:r>
-              <a:rPr lang="en-US" sz="1800" dirty="0">
-                <a:solidFill>
-                  <a:srgbClr val="000000"/>
-                </a:solidFill>
-              </a:rPr>
-              <a:t>具体：从根出发，沿左孩子走下去的每个结点，它的右子树都拆出来作为一棵独立的树</a:t>
-            </a:r>
-            <a:endParaRPr lang="en-US" sz="1800" dirty="0"/>
-          </a:p>
-        </p:txBody>
-      </p:sp>
-      <p:sp>
-        <p:nvSpPr>
-          <p:cNvPr id="7" name="Text 5"/>
-          <p:cNvSpPr/>
-          <p:nvPr/>
-        </p:nvSpPr>
-        <p:spPr>
-          <a:xfrm>
-            <a:off x="896112" y="3680460"/>
-            <a:ext cx="10454335" cy="740664"/>
-          </a:xfrm>
-          <a:prstGeom prst="rect">
-            <a:avLst/>
-          </a:prstGeom>
-          <a:noFill/>
-          <a:ln/>
-        </p:spPr>
-        <p:txBody>
-          <a:bodyPr wrap="square" rtlCol="0" anchor="t"/>
-          <a:lstStyle/>
-          <a:p>
-            <a:pPr algn="l" indent="0" marL="0">
-              <a:lnSpc>
-                <a:spcPct val="115000"/>
-              </a:lnSpc>
-              <a:buNone/>
-            </a:pPr>
-            <a:r>
-              <a:rPr lang="en-US" sz="1800" b="1" dirty="0">
-                <a:solidFill>
-                  <a:srgbClr val="1F4E9C"/>
-                </a:solidFill>
-                <a:latin typeface="微软雅黑" pitchFamily="34" charset="0"/>
-                <a:ea typeface="微软雅黑" pitchFamily="34" charset="-122"/>
-                <a:cs typeface="微软雅黑" pitchFamily="34" charset="-120"/>
-              </a:rPr>
-              <a:t>•  </a:t>
-            </a:r>
-            <a:pPr algn="l" indent="0" marL="0">
-              <a:lnSpc>
-                <a:spcPct val="115000"/>
-              </a:lnSpc>
-              <a:buNone/>
-            </a:pPr>
             <a:r>
               <a:rPr lang="en-US" sz="1800" dirty="0">
                 <a:solidFill>
@@ -5227,13 +5037,12 @@
             <a:avLst/>
           </a:prstGeom>
           <a:noFill/>
-          <a:ln/>
         </p:spPr>
         <p:txBody>
           <a:bodyPr wrap="square" rtlCol="0" anchor="t"/>
           <a:lstStyle/>
           <a:p>
-            <a:pPr algn="l" indent="0" marL="0">
+            <a:pPr marL="0" indent="0" algn="l">
               <a:buNone/>
             </a:pPr>
             <a:r>
@@ -5241,9 +5050,9 @@
                 <a:solidFill>
                   <a:srgbClr val="8A9099"/>
                 </a:solidFill>
-                <a:latin typeface="微软雅黑" pitchFamily="34" charset="0"/>
-                <a:ea typeface="微软雅黑" pitchFamily="34" charset="-122"/>
-                <a:cs typeface="微软雅黑" pitchFamily="34" charset="-120"/>
+                <a:latin typeface="微软雅黑" panose="020B0503020204020204" pitchFamily="34" charset="-122"/>
+                <a:ea typeface="微软雅黑" panose="020B0503020204020204" pitchFamily="34" charset="-122"/>
+                <a:cs typeface="微软雅黑" panose="020B0503020204020204" pitchFamily="34" charset="-120"/>
               </a:rPr>
               <a:t>森林叶数 = 二叉树里左指针为空的结点数（题集勾画 6选43 的结论）；还原时抓住“左孩子右兄弟”反过来拆即可</a:t>
             </a:r>
@@ -5261,7 +5070,7 @@
 
 <file path=ppt/slides/slide2.xml><?xml version="1.0" encoding="utf-8"?>
 <p:sld xmlns:a="http://schemas.openxmlformats.org/drawingml/2006/main" xmlns:r="http://schemas.openxmlformats.org/officeDocument/2006/relationships" xmlns:p="http://schemas.openxmlformats.org/presentationml/2006/main">
-  <p:cSld name="Slide 2">
+  <p:cSld>
     <p:bg>
       <p:bgPr>
         <a:blipFill dpi="0" rotWithShape="1">
@@ -5305,13 +5114,12 @@
             <a:avLst/>
           </a:prstGeom>
           <a:noFill/>
-          <a:ln/>
         </p:spPr>
         <p:txBody>
           <a:bodyPr wrap="square" rtlCol="0" anchor="ctr"/>
           <a:lstStyle/>
           <a:p>
-            <a:pPr algn="r" indent="0" marL="0">
+            <a:pPr marL="0" indent="0" algn="r">
               <a:buNone/>
             </a:pPr>
             <a:r>
@@ -5319,9 +5127,9 @@
                 <a:solidFill>
                   <a:srgbClr val="8A9099"/>
                 </a:solidFill>
-                <a:latin typeface="微软雅黑" pitchFamily="34" charset="0"/>
-                <a:ea typeface="微软雅黑" pitchFamily="34" charset="-122"/>
-                <a:cs typeface="微软雅黑" pitchFamily="34" charset="-120"/>
+                <a:latin typeface="微软雅黑" panose="020B0503020204020204" pitchFamily="34" charset="-122"/>
+                <a:ea typeface="微软雅黑" panose="020B0503020204020204" pitchFamily="34" charset="-122"/>
+                <a:cs typeface="微软雅黑" panose="020B0503020204020204" pitchFamily="34" charset="-120"/>
               </a:rPr>
               <a:t>2 / 16</a:t>
             </a:r>
@@ -5344,13 +5152,12 @@
             <a:avLst/>
           </a:prstGeom>
           <a:noFill/>
-          <a:ln/>
         </p:spPr>
         <p:txBody>
           <a:bodyPr wrap="square" rtlCol="0" anchor="ctr"/>
           <a:lstStyle/>
           <a:p>
-            <a:pPr algn="l" indent="0" marL="0">
+            <a:pPr marL="0" indent="0" algn="l">
               <a:buNone/>
             </a:pPr>
             <a:r>
@@ -5358,9 +5165,9 @@
                 <a:solidFill>
                   <a:srgbClr val="1F4E9C"/>
                 </a:solidFill>
-                <a:latin typeface="微软雅黑" pitchFamily="34" charset="0"/>
-                <a:ea typeface="微软雅黑" pitchFamily="34" charset="-122"/>
-                <a:cs typeface="微软雅黑" pitchFamily="34" charset="-120"/>
+                <a:latin typeface="微软雅黑" panose="020B0503020204020204" pitchFamily="34" charset="-122"/>
+                <a:ea typeface="微软雅黑" panose="020B0503020204020204" pitchFamily="34" charset="-122"/>
+                <a:cs typeface="微软雅黑" panose="020B0503020204020204" pitchFamily="34" charset="-120"/>
               </a:rPr>
               <a:t>引题</a:t>
             </a:r>
@@ -5383,13 +5190,12 @@
             <a:avLst/>
           </a:prstGeom>
           <a:noFill/>
-          <a:ln/>
         </p:spPr>
         <p:txBody>
           <a:bodyPr wrap="square" rtlCol="0" anchor="ctr"/>
           <a:lstStyle/>
           <a:p>
-            <a:pPr algn="l" indent="0" marL="0">
+            <a:pPr marL="0" indent="0" algn="l">
               <a:buNone/>
             </a:pPr>
             <a:r>
@@ -5397,9 +5203,9 @@
                 <a:solidFill>
                   <a:srgbClr val="1F2329"/>
                 </a:solidFill>
-                <a:latin typeface="微软雅黑" pitchFamily="34" charset="0"/>
-                <a:ea typeface="微软雅黑" pitchFamily="34" charset="-122"/>
-                <a:cs typeface="微软雅黑" pitchFamily="34" charset="-120"/>
+                <a:latin typeface="微软雅黑" panose="020B0503020204020204" pitchFamily="34" charset="-122"/>
+                <a:ea typeface="微软雅黑" panose="020B0503020204020204" pitchFamily="34" charset="-122"/>
+                <a:cs typeface="微软雅黑" panose="020B0503020204020204" pitchFamily="34" charset="-120"/>
               </a:rPr>
               <a:t>n 个结点的二叉链表，有多少个空链域</a:t>
             </a:r>
@@ -5422,13 +5228,12 @@
             <a:avLst/>
           </a:prstGeom>
           <a:noFill/>
-          <a:ln/>
         </p:spPr>
         <p:txBody>
           <a:bodyPr wrap="square" rtlCol="0" anchor="t"/>
           <a:lstStyle/>
           <a:p>
-            <a:pPr algn="l" indent="0" marL="0">
+            <a:pPr marL="0" indent="0" algn="l">
               <a:lnSpc>
                 <a:spcPct val="115000"/>
               </a:lnSpc>
@@ -5439,25 +5244,68 @@
                 <a:solidFill>
                   <a:srgbClr val="1F4E9C"/>
                 </a:solidFill>
-                <a:latin typeface="微软雅黑" pitchFamily="34" charset="0"/>
-                <a:ea typeface="微软雅黑" pitchFamily="34" charset="-122"/>
-                <a:cs typeface="微软雅黑" pitchFamily="34" charset="-120"/>
+                <a:latin typeface="微软雅黑" panose="020B0503020204020204" pitchFamily="34" charset="-122"/>
+                <a:ea typeface="微软雅黑" panose="020B0503020204020204" pitchFamily="34" charset="-122"/>
+                <a:cs typeface="微软雅黑" panose="020B0503020204020204" pitchFamily="34" charset="-120"/>
               </a:rPr>
               <a:t>•  </a:t>
             </a:r>
-            <a:pPr algn="l" indent="0" marL="0">
+            <a:r>
+              <a:rPr lang="en-US" sz="1800" dirty="0">
+                <a:solidFill>
+                  <a:srgbClr val="000000"/>
+                </a:solidFill>
+              </a:rPr>
+              <a:t>n 个结点，每个有左右两个链域，一共 2n 个链域</a:t>
+            </a:r>
+            <a:endParaRPr lang="en-US" sz="1800" dirty="0"/>
+          </a:p>
+        </p:txBody>
+      </p:sp>
+      <p:sp>
+        <p:nvSpPr>
+          <p:cNvPr id="6" name="Text 4"/>
+          <p:cNvSpPr/>
+          <p:nvPr/>
+        </p:nvSpPr>
+        <p:spPr>
+          <a:xfrm>
+            <a:off x="896112" y="2866644"/>
+            <a:ext cx="10454335" cy="740664"/>
+          </a:xfrm>
+          <a:prstGeom prst="rect">
+            <a:avLst/>
+          </a:prstGeom>
+          <a:noFill/>
+        </p:spPr>
+        <p:txBody>
+          <a:bodyPr wrap="square" rtlCol="0" anchor="t"/>
+          <a:lstStyle/>
+          <a:p>
+            <a:pPr marL="0" indent="0" algn="l">
               <a:lnSpc>
                 <a:spcPct val="115000"/>
               </a:lnSpc>
               <a:buNone/>
             </a:pPr>
             <a:r>
+              <a:rPr lang="en-US" sz="1800" b="1" dirty="0">
+                <a:solidFill>
+                  <a:srgbClr val="1F4E9C"/>
+                </a:solidFill>
+                <a:latin typeface="微软雅黑" panose="020B0503020204020204" pitchFamily="34" charset="-122"/>
+                <a:ea typeface="微软雅黑" panose="020B0503020204020204" pitchFamily="34" charset="-122"/>
+                <a:cs typeface="微软雅黑" panose="020B0503020204020204" pitchFamily="34" charset="-120"/>
+              </a:rPr>
+              <a:t>•  </a:t>
+            </a:r>
+            <a:r>
               <a:rPr lang="en-US" sz="1800" dirty="0">
                 <a:solidFill>
                   <a:srgbClr val="000000"/>
                 </a:solidFill>
               </a:rPr>
-              <a:t>n 个结点，每个有左右两个链域，一共 2n 个链域</a:t>
+              <a:t>非空的链域等于分支数，一棵 n 结点的树有 n-1 条分支，所以非空链域是 n-1 个</a:t>
             </a:r>
             <a:endParaRPr lang="en-US" sz="1800" dirty="0"/>
           </a:p>
@@ -5465,26 +5313,25 @@
       </p:sp>
       <p:sp>
         <p:nvSpPr>
-          <p:cNvPr id="6" name="Text 4"/>
-          <p:cNvSpPr/>
-          <p:nvPr/>
-        </p:nvSpPr>
-        <p:spPr>
-          <a:xfrm>
-            <a:off x="896112" y="2866644"/>
+          <p:cNvPr id="7" name="Text 5"/>
+          <p:cNvSpPr/>
+          <p:nvPr/>
+        </p:nvSpPr>
+        <p:spPr>
+          <a:xfrm>
+            <a:off x="896112" y="3680460"/>
             <a:ext cx="10454335" cy="740664"/>
           </a:xfrm>
           <a:prstGeom prst="rect">
             <a:avLst/>
           </a:prstGeom>
           <a:noFill/>
-          <a:ln/>
         </p:spPr>
         <p:txBody>
           <a:bodyPr wrap="square" rtlCol="0" anchor="t"/>
           <a:lstStyle/>
           <a:p>
-            <a:pPr algn="l" indent="0" marL="0">
+            <a:pPr marL="0" indent="0" algn="l">
               <a:lnSpc>
                 <a:spcPct val="115000"/>
               </a:lnSpc>
@@ -5495,74 +5342,12 @@
                 <a:solidFill>
                   <a:srgbClr val="1F4E9C"/>
                 </a:solidFill>
-                <a:latin typeface="微软雅黑" pitchFamily="34" charset="0"/>
-                <a:ea typeface="微软雅黑" pitchFamily="34" charset="-122"/>
-                <a:cs typeface="微软雅黑" pitchFamily="34" charset="-120"/>
+                <a:latin typeface="微软雅黑" panose="020B0503020204020204" pitchFamily="34" charset="-122"/>
+                <a:ea typeface="微软雅黑" panose="020B0503020204020204" pitchFamily="34" charset="-122"/>
+                <a:cs typeface="微软雅黑" panose="020B0503020204020204" pitchFamily="34" charset="-120"/>
               </a:rPr>
               <a:t>•  </a:t>
             </a:r>
-            <a:pPr algn="l" indent="0" marL="0">
-              <a:lnSpc>
-                <a:spcPct val="115000"/>
-              </a:lnSpc>
-              <a:buNone/>
-            </a:pPr>
-            <a:r>
-              <a:rPr lang="en-US" sz="1800" dirty="0">
-                <a:solidFill>
-                  <a:srgbClr val="000000"/>
-                </a:solidFill>
-              </a:rPr>
-              <a:t>非空的链域等于分支数，一棵 n 结点的树有 n-1 条分支，所以非空链域是 n-1 个</a:t>
-            </a:r>
-            <a:endParaRPr lang="en-US" sz="1800" dirty="0"/>
-          </a:p>
-        </p:txBody>
-      </p:sp>
-      <p:sp>
-        <p:nvSpPr>
-          <p:cNvPr id="7" name="Text 5"/>
-          <p:cNvSpPr/>
-          <p:nvPr/>
-        </p:nvSpPr>
-        <p:spPr>
-          <a:xfrm>
-            <a:off x="896112" y="3680460"/>
-            <a:ext cx="10454335" cy="740664"/>
-          </a:xfrm>
-          <a:prstGeom prst="rect">
-            <a:avLst/>
-          </a:prstGeom>
-          <a:noFill/>
-          <a:ln/>
-        </p:spPr>
-        <p:txBody>
-          <a:bodyPr wrap="square" rtlCol="0" anchor="t"/>
-          <a:lstStyle/>
-          <a:p>
-            <a:pPr algn="l" indent="0" marL="0">
-              <a:lnSpc>
-                <a:spcPct val="115000"/>
-              </a:lnSpc>
-              <a:buNone/>
-            </a:pPr>
-            <a:r>
-              <a:rPr lang="en-US" sz="1800" b="1" dirty="0">
-                <a:solidFill>
-                  <a:srgbClr val="1F4E9C"/>
-                </a:solidFill>
-                <a:latin typeface="微软雅黑" pitchFamily="34" charset="0"/>
-                <a:ea typeface="微软雅黑" pitchFamily="34" charset="-122"/>
-                <a:cs typeface="微软雅黑" pitchFamily="34" charset="-120"/>
-              </a:rPr>
-              <a:t>•  </a:t>
-            </a:r>
-            <a:pPr algn="l" indent="0" marL="0">
-              <a:lnSpc>
-                <a:spcPct val="115000"/>
-              </a:lnSpc>
-              <a:buNone/>
-            </a:pPr>
             <a:r>
               <a:rPr lang="en-US" sz="1800" dirty="0">
                 <a:solidFill>
@@ -5590,13 +5375,12 @@
             <a:avLst/>
           </a:prstGeom>
           <a:noFill/>
-          <a:ln/>
         </p:spPr>
         <p:txBody>
           <a:bodyPr wrap="square" rtlCol="0" anchor="t"/>
           <a:lstStyle/>
           <a:p>
-            <a:pPr algn="l" indent="0" marL="0">
+            <a:pPr marL="0" indent="0" algn="l">
               <a:buNone/>
             </a:pPr>
             <a:r>
@@ -5604,9 +5388,9 @@
                 <a:solidFill>
                   <a:srgbClr val="8A9099"/>
                 </a:solidFill>
-                <a:latin typeface="微软雅黑" pitchFamily="34" charset="0"/>
-                <a:ea typeface="微软雅黑" pitchFamily="34" charset="-122"/>
-                <a:cs typeface="微软雅黑" pitchFamily="34" charset="-120"/>
+                <a:latin typeface="微软雅黑" panose="020B0503020204020204" pitchFamily="34" charset="-122"/>
+                <a:ea typeface="微软雅黑" panose="020B0503020204020204" pitchFamily="34" charset="-122"/>
+                <a:cs typeface="微软雅黑" panose="020B0503020204020204" pitchFamily="34" charset="-120"/>
               </a:rPr>
               <a:t>线索化的想法就是：把这 n+1 个空链域利用起来，让它们指向前驱和后继，这样找前驱后继就不用再从头遍历</a:t>
             </a:r>
@@ -5624,7 +5408,7 @@
 
 <file path=ppt/slides/slide3.xml><?xml version="1.0" encoding="utf-8"?>
 <p:sld xmlns:a="http://schemas.openxmlformats.org/drawingml/2006/main" xmlns:r="http://schemas.openxmlformats.org/officeDocument/2006/relationships" xmlns:p="http://schemas.openxmlformats.org/presentationml/2006/main">
-  <p:cSld name="Slide 3">
+  <p:cSld>
     <p:bg>
       <p:bgPr>
         <a:blipFill dpi="0" rotWithShape="1">
@@ -5668,13 +5452,12 @@
             <a:avLst/>
           </a:prstGeom>
           <a:noFill/>
-          <a:ln/>
         </p:spPr>
         <p:txBody>
           <a:bodyPr wrap="square" rtlCol="0" anchor="ctr"/>
           <a:lstStyle/>
           <a:p>
-            <a:pPr algn="r" indent="0" marL="0">
+            <a:pPr marL="0" indent="0" algn="r">
               <a:buNone/>
             </a:pPr>
             <a:r>
@@ -5682,9 +5465,9 @@
                 <a:solidFill>
                   <a:srgbClr val="8A9099"/>
                 </a:solidFill>
-                <a:latin typeface="微软雅黑" pitchFamily="34" charset="0"/>
-                <a:ea typeface="微软雅黑" pitchFamily="34" charset="-122"/>
-                <a:cs typeface="微软雅黑" pitchFamily="34" charset="-120"/>
+                <a:latin typeface="微软雅黑" panose="020B0503020204020204" pitchFamily="34" charset="-122"/>
+                <a:ea typeface="微软雅黑" panose="020B0503020204020204" pitchFamily="34" charset="-122"/>
+                <a:cs typeface="微软雅黑" panose="020B0503020204020204" pitchFamily="34" charset="-120"/>
               </a:rPr>
               <a:t>3 / 16</a:t>
             </a:r>
@@ -5707,13 +5490,12 @@
             <a:avLst/>
           </a:prstGeom>
           <a:noFill/>
-          <a:ln/>
         </p:spPr>
         <p:txBody>
           <a:bodyPr wrap="square" rtlCol="0" anchor="ctr"/>
           <a:lstStyle/>
           <a:p>
-            <a:pPr algn="l" indent="0" marL="0">
+            <a:pPr marL="0" indent="0" algn="l">
               <a:buNone/>
             </a:pPr>
             <a:r>
@@ -5721,9 +5503,9 @@
                 <a:solidFill>
                   <a:srgbClr val="1F4E9C"/>
                 </a:solidFill>
-                <a:latin typeface="微软雅黑" pitchFamily="34" charset="0"/>
-                <a:ea typeface="微软雅黑" pitchFamily="34" charset="-122"/>
-                <a:cs typeface="微软雅黑" pitchFamily="34" charset="-120"/>
+                <a:latin typeface="微软雅黑" panose="020B0503020204020204" pitchFamily="34" charset="-122"/>
+                <a:ea typeface="微软雅黑" panose="020B0503020204020204" pitchFamily="34" charset="-122"/>
+                <a:cs typeface="微软雅黑" panose="020B0503020204020204" pitchFamily="34" charset="-120"/>
               </a:rPr>
               <a:t>线索化 · 结构</a:t>
             </a:r>
@@ -5746,13 +5528,12 @@
             <a:avLst/>
           </a:prstGeom>
           <a:noFill/>
-          <a:ln/>
         </p:spPr>
         <p:txBody>
           <a:bodyPr wrap="square" rtlCol="0" anchor="ctr"/>
           <a:lstStyle/>
           <a:p>
-            <a:pPr algn="l" indent="0" marL="0">
+            <a:pPr marL="0" indent="0" algn="l">
               <a:buNone/>
             </a:pPr>
             <a:r>
@@ -5760,9 +5541,9 @@
                 <a:solidFill>
                   <a:srgbClr val="1F2329"/>
                 </a:solidFill>
-                <a:latin typeface="微软雅黑" pitchFamily="34" charset="0"/>
-                <a:ea typeface="微软雅黑" pitchFamily="34" charset="-122"/>
-                <a:cs typeface="微软雅黑" pitchFamily="34" charset="-120"/>
+                <a:latin typeface="微软雅黑" panose="020B0503020204020204" pitchFamily="34" charset="-122"/>
+                <a:ea typeface="微软雅黑" panose="020B0503020204020204" pitchFamily="34" charset="-122"/>
+                <a:cs typeface="微软雅黑" panose="020B0503020204020204" pitchFamily="34" charset="-120"/>
               </a:rPr>
               <a:t>线索二叉树：加两个 tag 区分孩子和线索</a:t>
             </a:r>
@@ -5787,7 +5568,6 @@
           <a:solidFill>
             <a:srgbClr val="F7F9FC"/>
           </a:solidFill>
-          <a:ln/>
         </p:spPr>
       </p:sp>
       <p:sp>
@@ -5807,7 +5587,6 @@
           <a:solidFill>
             <a:srgbClr val="1F4E9C"/>
           </a:solidFill>
-          <a:ln/>
         </p:spPr>
       </p:sp>
       <p:sp>
@@ -5825,13 +5604,12 @@
             <a:avLst/>
           </a:prstGeom>
           <a:noFill/>
-          <a:ln/>
         </p:spPr>
         <p:txBody>
           <a:bodyPr wrap="square" rtlCol="0" anchor="t"/>
           <a:lstStyle/>
           <a:p>
-            <a:pPr algn="l" indent="0" marL="0">
+            <a:pPr marL="0" indent="0" algn="l">
               <a:lnSpc>
                 <a:spcPct val="125000"/>
               </a:lnSpc>
@@ -5842,9 +5620,9 @@
                 <a:solidFill>
                   <a:srgbClr val="1F2329"/>
                 </a:solidFill>
-                <a:latin typeface="Consolas" pitchFamily="34" charset="0"/>
-                <a:ea typeface="Consolas" pitchFamily="34" charset="-122"/>
-                <a:cs typeface="Consolas" pitchFamily="34" charset="-120"/>
+                <a:latin typeface="Consolas" panose="020B0609020204030204" pitchFamily="34" charset="0"/>
+                <a:ea typeface="Consolas" panose="020B0609020204030204" pitchFamily="34" charset="-122"/>
+                <a:cs typeface="Consolas" panose="020B0609020204030204" pitchFamily="34" charset="-120"/>
               </a:rPr>
               <a:t>typedef struct BiThrNode{
     int data;
@@ -5872,13 +5650,12 @@
             <a:avLst/>
           </a:prstGeom>
           <a:noFill/>
-          <a:ln/>
         </p:spPr>
         <p:txBody>
           <a:bodyPr wrap="square" rtlCol="0" anchor="t"/>
           <a:lstStyle/>
           <a:p>
-            <a:pPr algn="l" indent="0" marL="0">
+            <a:pPr marL="0" indent="0" algn="l">
               <a:lnSpc>
                 <a:spcPct val="115000"/>
               </a:lnSpc>
@@ -5889,25 +5666,68 @@
                 <a:solidFill>
                   <a:srgbClr val="1F4E9C"/>
                 </a:solidFill>
-                <a:latin typeface="微软雅黑" pitchFamily="34" charset="0"/>
-                <a:ea typeface="微软雅黑" pitchFamily="34" charset="-122"/>
-                <a:cs typeface="微软雅黑" pitchFamily="34" charset="-120"/>
+                <a:latin typeface="微软雅黑" panose="020B0503020204020204" pitchFamily="34" charset="-122"/>
+                <a:ea typeface="微软雅黑" panose="020B0503020204020204" pitchFamily="34" charset="-122"/>
+                <a:cs typeface="微软雅黑" panose="020B0503020204020204" pitchFamily="34" charset="-120"/>
               </a:rPr>
               <a:t>•  </a:t>
             </a:r>
-            <a:pPr algn="l" indent="0" marL="0">
+            <a:r>
+              <a:rPr lang="en-US" sz="1600" dirty="0">
+                <a:solidFill>
+                  <a:srgbClr val="000000"/>
+                </a:solidFill>
+              </a:rPr>
+              <a:t>空链域拿来指前驱后继，但一个链域到底是孩子还是线索，光看指针分不清，所以要配一个 tag</a:t>
+            </a:r>
+            <a:endParaRPr lang="en-US" sz="1600" dirty="0"/>
+          </a:p>
+        </p:txBody>
+      </p:sp>
+      <p:sp>
+        <p:nvSpPr>
+          <p:cNvPr id="9" name="Text 7"/>
+          <p:cNvSpPr/>
+          <p:nvPr/>
+        </p:nvSpPr>
+        <p:spPr>
+          <a:xfrm>
+            <a:off x="896112" y="4648090"/>
+            <a:ext cx="10454335" cy="664464"/>
+          </a:xfrm>
+          <a:prstGeom prst="rect">
+            <a:avLst/>
+          </a:prstGeom>
+          <a:noFill/>
+        </p:spPr>
+        <p:txBody>
+          <a:bodyPr wrap="square" rtlCol="0" anchor="t"/>
+          <a:lstStyle/>
+          <a:p>
+            <a:pPr marL="0" indent="0" algn="l">
               <a:lnSpc>
                 <a:spcPct val="115000"/>
               </a:lnSpc>
               <a:buNone/>
             </a:pPr>
             <a:r>
+              <a:rPr lang="en-US" sz="1600" b="1" dirty="0">
+                <a:solidFill>
+                  <a:srgbClr val="1F4E9C"/>
+                </a:solidFill>
+                <a:latin typeface="微软雅黑" panose="020B0503020204020204" pitchFamily="34" charset="-122"/>
+                <a:ea typeface="微软雅黑" panose="020B0503020204020204" pitchFamily="34" charset="-122"/>
+                <a:cs typeface="微软雅黑" panose="020B0503020204020204" pitchFamily="34" charset="-120"/>
+              </a:rPr>
+              <a:t>•  </a:t>
+            </a:r>
+            <a:r>
               <a:rPr lang="en-US" sz="1600" dirty="0">
                 <a:solidFill>
                   <a:srgbClr val="000000"/>
                 </a:solidFill>
               </a:rPr>
-              <a:t>空链域拿来指前驱后继，但一个链域到底是孩子还是线索，光看指针分不清，所以要配一个 tag</a:t>
+              <a:t>ltag=0 时 lchild 指左孩子，ltag=1 时 lchild 指中序前驱；rtag 同理，1 时 rchild 指中序后继</a:t>
             </a:r>
             <a:endParaRPr lang="en-US" sz="1600" dirty="0"/>
           </a:p>
@@ -5915,26 +5735,25 @@
       </p:sp>
       <p:sp>
         <p:nvSpPr>
-          <p:cNvPr id="9" name="Text 7"/>
-          <p:cNvSpPr/>
-          <p:nvPr/>
-        </p:nvSpPr>
-        <p:spPr>
-          <a:xfrm>
-            <a:off x="896112" y="4648090"/>
-            <a:ext cx="10454335" cy="664464"/>
-          </a:xfrm>
-          <a:prstGeom prst="rect">
-            <a:avLst/>
-          </a:prstGeom>
-          <a:noFill/>
-          <a:ln/>
+          <p:cNvPr id="10" name="Text 8"/>
+          <p:cNvSpPr/>
+          <p:nvPr/>
+        </p:nvSpPr>
+        <p:spPr>
+          <a:xfrm>
+            <a:off x="873252" y="5385706"/>
+            <a:ext cx="10454335" cy="359664"/>
+          </a:xfrm>
+          <a:prstGeom prst="rect">
+            <a:avLst/>
+          </a:prstGeom>
+          <a:noFill/>
         </p:spPr>
         <p:txBody>
           <a:bodyPr wrap="square" rtlCol="0" anchor="t"/>
           <a:lstStyle/>
           <a:p>
-            <a:pPr algn="l" indent="0" marL="0">
+            <a:pPr marL="0" indent="0" algn="l">
               <a:lnSpc>
                 <a:spcPct val="115000"/>
               </a:lnSpc>
@@ -5945,74 +5764,12 @@
                 <a:solidFill>
                   <a:srgbClr val="1F4E9C"/>
                 </a:solidFill>
-                <a:latin typeface="微软雅黑" pitchFamily="34" charset="0"/>
-                <a:ea typeface="微软雅黑" pitchFamily="34" charset="-122"/>
-                <a:cs typeface="微软雅黑" pitchFamily="34" charset="-120"/>
+                <a:latin typeface="微软雅黑" panose="020B0503020204020204" pitchFamily="34" charset="-122"/>
+                <a:ea typeface="微软雅黑" panose="020B0503020204020204" pitchFamily="34" charset="-122"/>
+                <a:cs typeface="微软雅黑" panose="020B0503020204020204" pitchFamily="34" charset="-120"/>
               </a:rPr>
               <a:t>•  </a:t>
             </a:r>
-            <a:pPr algn="l" indent="0" marL="0">
-              <a:lnSpc>
-                <a:spcPct val="115000"/>
-              </a:lnSpc>
-              <a:buNone/>
-            </a:pPr>
-            <a:r>
-              <a:rPr lang="en-US" sz="1600" dirty="0">
-                <a:solidFill>
-                  <a:srgbClr val="000000"/>
-                </a:solidFill>
-              </a:rPr>
-              <a:t>ltag=0 时 lchild 指左孩子，ltag=1 时 lchild 指中序前驱；rtag 同理，1 时 rchild 指中序后继</a:t>
-            </a:r>
-            <a:endParaRPr lang="en-US" sz="1600" dirty="0"/>
-          </a:p>
-        </p:txBody>
-      </p:sp>
-      <p:sp>
-        <p:nvSpPr>
-          <p:cNvPr id="10" name="Text 8"/>
-          <p:cNvSpPr/>
-          <p:nvPr/>
-        </p:nvSpPr>
-        <p:spPr>
-          <a:xfrm>
-            <a:off x="896112" y="5385706"/>
-            <a:ext cx="10454335" cy="359664"/>
-          </a:xfrm>
-          <a:prstGeom prst="rect">
-            <a:avLst/>
-          </a:prstGeom>
-          <a:noFill/>
-          <a:ln/>
-        </p:spPr>
-        <p:txBody>
-          <a:bodyPr wrap="square" rtlCol="0" anchor="t"/>
-          <a:lstStyle/>
-          <a:p>
-            <a:pPr algn="l" indent="0" marL="0">
-              <a:lnSpc>
-                <a:spcPct val="115000"/>
-              </a:lnSpc>
-              <a:buNone/>
-            </a:pPr>
-            <a:r>
-              <a:rPr lang="en-US" sz="1600" b="1" dirty="0">
-                <a:solidFill>
-                  <a:srgbClr val="1F4E9C"/>
-                </a:solidFill>
-                <a:latin typeface="微软雅黑" pitchFamily="34" charset="0"/>
-                <a:ea typeface="微软雅黑" pitchFamily="34" charset="-122"/>
-                <a:cs typeface="微软雅黑" pitchFamily="34" charset="-120"/>
-              </a:rPr>
-              <a:t>•  </a:t>
-            </a:r>
-            <a:pPr algn="l" indent="0" marL="0">
-              <a:lnSpc>
-                <a:spcPct val="115000"/>
-              </a:lnSpc>
-              <a:buNone/>
-            </a:pPr>
             <a:r>
               <a:rPr lang="en-US" sz="1600" dirty="0">
                 <a:solidFill>
@@ -6030,12 +5787,526 @@
   <p:clrMapOvr>
     <a:masterClrMapping/>
   </p:clrMapOvr>
+  <p:timing>
+    <p:tnLst>
+      <p:par>
+        <p:cTn id="1" dur="indefinite" restart="never" nodeType="tmRoot">
+          <p:childTnLst>
+            <p:seq concurrent="1" nextAc="seek">
+              <p:cTn id="2" dur="indefinite" nodeType="mainSeq">
+                <p:childTnLst>
+                  <p:par>
+                    <p:cTn id="3" fill="hold">
+                      <p:stCondLst>
+                        <p:cond delay="indefinite"/>
+                      </p:stCondLst>
+                      <p:childTnLst>
+                        <p:par>
+                          <p:cTn id="4" fill="hold">
+                            <p:stCondLst>
+                              <p:cond delay="0"/>
+                            </p:stCondLst>
+                            <p:childTnLst>
+                              <p:par>
+                                <p:cTn id="5" presetID="2" presetClass="entr" presetSubtype="4" fill="hold" nodeType="clickEffect">
+                                  <p:stCondLst>
+                                    <p:cond delay="0"/>
+                                  </p:stCondLst>
+                                  <p:childTnLst>
+                                    <p:set>
+                                      <p:cBhvr>
+                                        <p:cTn id="6" dur="1" fill="hold">
+                                          <p:stCondLst>
+                                            <p:cond delay="0"/>
+                                          </p:stCondLst>
+                                        </p:cTn>
+                                        <p:tgtEl>
+                                          <p:spTgt spid="5"/>
+                                        </p:tgtEl>
+                                        <p:attrNameLst>
+                                          <p:attrName>style.visibility</p:attrName>
+                                        </p:attrNameLst>
+                                      </p:cBhvr>
+                                      <p:to>
+                                        <p:strVal val="visible"/>
+                                      </p:to>
+                                    </p:set>
+                                    <p:anim calcmode="lin" valueType="num">
+                                      <p:cBhvr additive="base">
+                                        <p:cTn id="7" dur="500" fill="hold"/>
+                                        <p:tgtEl>
+                                          <p:spTgt spid="5"/>
+                                        </p:tgtEl>
+                                        <p:attrNameLst>
+                                          <p:attrName>ppt_x</p:attrName>
+                                        </p:attrNameLst>
+                                      </p:cBhvr>
+                                      <p:tavLst>
+                                        <p:tav tm="0">
+                                          <p:val>
+                                            <p:strVal val="#ppt_x"/>
+                                          </p:val>
+                                        </p:tav>
+                                        <p:tav tm="100000">
+                                          <p:val>
+                                            <p:strVal val="#ppt_x"/>
+                                          </p:val>
+                                        </p:tav>
+                                      </p:tavLst>
+                                    </p:anim>
+                                    <p:anim calcmode="lin" valueType="num">
+                                      <p:cBhvr additive="base">
+                                        <p:cTn id="8" dur="500" fill="hold"/>
+                                        <p:tgtEl>
+                                          <p:spTgt spid="5"/>
+                                        </p:tgtEl>
+                                        <p:attrNameLst>
+                                          <p:attrName>ppt_y</p:attrName>
+                                        </p:attrNameLst>
+                                      </p:cBhvr>
+                                      <p:tavLst>
+                                        <p:tav tm="0">
+                                          <p:val>
+                                            <p:strVal val="1+#ppt_h/2"/>
+                                          </p:val>
+                                        </p:tav>
+                                        <p:tav tm="100000">
+                                          <p:val>
+                                            <p:strVal val="#ppt_y"/>
+                                          </p:val>
+                                        </p:tav>
+                                      </p:tavLst>
+                                    </p:anim>
+                                  </p:childTnLst>
+                                </p:cTn>
+                              </p:par>
+                              <p:par>
+                                <p:cTn id="9" presetID="2" presetClass="entr" presetSubtype="4" fill="hold" nodeType="withEffect">
+                                  <p:stCondLst>
+                                    <p:cond delay="0"/>
+                                  </p:stCondLst>
+                                  <p:childTnLst>
+                                    <p:set>
+                                      <p:cBhvr>
+                                        <p:cTn id="10" dur="1" fill="hold">
+                                          <p:stCondLst>
+                                            <p:cond delay="0"/>
+                                          </p:stCondLst>
+                                        </p:cTn>
+                                        <p:tgtEl>
+                                          <p:spTgt spid="6"/>
+                                        </p:tgtEl>
+                                        <p:attrNameLst>
+                                          <p:attrName>style.visibility</p:attrName>
+                                        </p:attrNameLst>
+                                      </p:cBhvr>
+                                      <p:to>
+                                        <p:strVal val="visible"/>
+                                      </p:to>
+                                    </p:set>
+                                    <p:anim calcmode="lin" valueType="num">
+                                      <p:cBhvr additive="base">
+                                        <p:cTn id="11" dur="500" fill="hold"/>
+                                        <p:tgtEl>
+                                          <p:spTgt spid="6"/>
+                                        </p:tgtEl>
+                                        <p:attrNameLst>
+                                          <p:attrName>ppt_x</p:attrName>
+                                        </p:attrNameLst>
+                                      </p:cBhvr>
+                                      <p:tavLst>
+                                        <p:tav tm="0">
+                                          <p:val>
+                                            <p:strVal val="#ppt_x"/>
+                                          </p:val>
+                                        </p:tav>
+                                        <p:tav tm="100000">
+                                          <p:val>
+                                            <p:strVal val="#ppt_x"/>
+                                          </p:val>
+                                        </p:tav>
+                                      </p:tavLst>
+                                    </p:anim>
+                                    <p:anim calcmode="lin" valueType="num">
+                                      <p:cBhvr additive="base">
+                                        <p:cTn id="12" dur="500" fill="hold"/>
+                                        <p:tgtEl>
+                                          <p:spTgt spid="6"/>
+                                        </p:tgtEl>
+                                        <p:attrNameLst>
+                                          <p:attrName>ppt_y</p:attrName>
+                                        </p:attrNameLst>
+                                      </p:cBhvr>
+                                      <p:tavLst>
+                                        <p:tav tm="0">
+                                          <p:val>
+                                            <p:strVal val="1+#ppt_h/2"/>
+                                          </p:val>
+                                        </p:tav>
+                                        <p:tav tm="100000">
+                                          <p:val>
+                                            <p:strVal val="#ppt_y"/>
+                                          </p:val>
+                                        </p:tav>
+                                      </p:tavLst>
+                                    </p:anim>
+                                  </p:childTnLst>
+                                </p:cTn>
+                              </p:par>
+                              <p:par>
+                                <p:cTn id="13" presetID="2" presetClass="entr" presetSubtype="4" fill="hold" grpId="0" nodeType="withEffect">
+                                  <p:stCondLst>
+                                    <p:cond delay="0"/>
+                                  </p:stCondLst>
+                                  <p:childTnLst>
+                                    <p:set>
+                                      <p:cBhvr>
+                                        <p:cTn id="14" dur="1" fill="hold">
+                                          <p:stCondLst>
+                                            <p:cond delay="0"/>
+                                          </p:stCondLst>
+                                        </p:cTn>
+                                        <p:tgtEl>
+                                          <p:spTgt spid="7"/>
+                                        </p:tgtEl>
+                                        <p:attrNameLst>
+                                          <p:attrName>style.visibility</p:attrName>
+                                        </p:attrNameLst>
+                                      </p:cBhvr>
+                                      <p:to>
+                                        <p:strVal val="visible"/>
+                                      </p:to>
+                                    </p:set>
+                                    <p:anim calcmode="lin" valueType="num">
+                                      <p:cBhvr additive="base">
+                                        <p:cTn id="15" dur="500" fill="hold"/>
+                                        <p:tgtEl>
+                                          <p:spTgt spid="7"/>
+                                        </p:tgtEl>
+                                        <p:attrNameLst>
+                                          <p:attrName>ppt_x</p:attrName>
+                                        </p:attrNameLst>
+                                      </p:cBhvr>
+                                      <p:tavLst>
+                                        <p:tav tm="0">
+                                          <p:val>
+                                            <p:strVal val="#ppt_x"/>
+                                          </p:val>
+                                        </p:tav>
+                                        <p:tav tm="100000">
+                                          <p:val>
+                                            <p:strVal val="#ppt_x"/>
+                                          </p:val>
+                                        </p:tav>
+                                      </p:tavLst>
+                                    </p:anim>
+                                    <p:anim calcmode="lin" valueType="num">
+                                      <p:cBhvr additive="base">
+                                        <p:cTn id="16" dur="500" fill="hold"/>
+                                        <p:tgtEl>
+                                          <p:spTgt spid="7"/>
+                                        </p:tgtEl>
+                                        <p:attrNameLst>
+                                          <p:attrName>ppt_y</p:attrName>
+                                        </p:attrNameLst>
+                                      </p:cBhvr>
+                                      <p:tavLst>
+                                        <p:tav tm="0">
+                                          <p:val>
+                                            <p:strVal val="1+#ppt_h/2"/>
+                                          </p:val>
+                                        </p:tav>
+                                        <p:tav tm="100000">
+                                          <p:val>
+                                            <p:strVal val="#ppt_y"/>
+                                          </p:val>
+                                        </p:tav>
+                                      </p:tavLst>
+                                    </p:anim>
+                                  </p:childTnLst>
+                                </p:cTn>
+                              </p:par>
+                            </p:childTnLst>
+                          </p:cTn>
+                        </p:par>
+                      </p:childTnLst>
+                    </p:cTn>
+                  </p:par>
+                  <p:par>
+                    <p:cTn id="17" fill="hold">
+                      <p:stCondLst>
+                        <p:cond delay="indefinite"/>
+                      </p:stCondLst>
+                      <p:childTnLst>
+                        <p:par>
+                          <p:cTn id="18" fill="hold">
+                            <p:stCondLst>
+                              <p:cond delay="0"/>
+                            </p:stCondLst>
+                            <p:childTnLst>
+                              <p:par>
+                                <p:cTn id="19" presetID="2" presetClass="entr" presetSubtype="4" fill="hold" grpId="0" nodeType="clickEffect">
+                                  <p:stCondLst>
+                                    <p:cond delay="0"/>
+                                  </p:stCondLst>
+                                  <p:childTnLst>
+                                    <p:set>
+                                      <p:cBhvr>
+                                        <p:cTn id="20" dur="1" fill="hold">
+                                          <p:stCondLst>
+                                            <p:cond delay="0"/>
+                                          </p:stCondLst>
+                                        </p:cTn>
+                                        <p:tgtEl>
+                                          <p:spTgt spid="8"/>
+                                        </p:tgtEl>
+                                        <p:attrNameLst>
+                                          <p:attrName>style.visibility</p:attrName>
+                                        </p:attrNameLst>
+                                      </p:cBhvr>
+                                      <p:to>
+                                        <p:strVal val="visible"/>
+                                      </p:to>
+                                    </p:set>
+                                    <p:anim calcmode="lin" valueType="num">
+                                      <p:cBhvr additive="base">
+                                        <p:cTn id="21" dur="500" fill="hold"/>
+                                        <p:tgtEl>
+                                          <p:spTgt spid="8"/>
+                                        </p:tgtEl>
+                                        <p:attrNameLst>
+                                          <p:attrName>ppt_x</p:attrName>
+                                        </p:attrNameLst>
+                                      </p:cBhvr>
+                                      <p:tavLst>
+                                        <p:tav tm="0">
+                                          <p:val>
+                                            <p:strVal val="#ppt_x"/>
+                                          </p:val>
+                                        </p:tav>
+                                        <p:tav tm="100000">
+                                          <p:val>
+                                            <p:strVal val="#ppt_x"/>
+                                          </p:val>
+                                        </p:tav>
+                                      </p:tavLst>
+                                    </p:anim>
+                                    <p:anim calcmode="lin" valueType="num">
+                                      <p:cBhvr additive="base">
+                                        <p:cTn id="22" dur="500" fill="hold"/>
+                                        <p:tgtEl>
+                                          <p:spTgt spid="8"/>
+                                        </p:tgtEl>
+                                        <p:attrNameLst>
+                                          <p:attrName>ppt_y</p:attrName>
+                                        </p:attrNameLst>
+                                      </p:cBhvr>
+                                      <p:tavLst>
+                                        <p:tav tm="0">
+                                          <p:val>
+                                            <p:strVal val="1+#ppt_h/2"/>
+                                          </p:val>
+                                        </p:tav>
+                                        <p:tav tm="100000">
+                                          <p:val>
+                                            <p:strVal val="#ppt_y"/>
+                                          </p:val>
+                                        </p:tav>
+                                      </p:tavLst>
+                                    </p:anim>
+                                  </p:childTnLst>
+                                </p:cTn>
+                              </p:par>
+                              <p:par>
+                                <p:cTn id="23" presetID="2" presetClass="entr" presetSubtype="4" fill="hold" grpId="0" nodeType="withEffect">
+                                  <p:stCondLst>
+                                    <p:cond delay="0"/>
+                                  </p:stCondLst>
+                                  <p:childTnLst>
+                                    <p:set>
+                                      <p:cBhvr>
+                                        <p:cTn id="24" dur="1" fill="hold">
+                                          <p:stCondLst>
+                                            <p:cond delay="0"/>
+                                          </p:stCondLst>
+                                        </p:cTn>
+                                        <p:tgtEl>
+                                          <p:spTgt spid="9"/>
+                                        </p:tgtEl>
+                                        <p:attrNameLst>
+                                          <p:attrName>style.visibility</p:attrName>
+                                        </p:attrNameLst>
+                                      </p:cBhvr>
+                                      <p:to>
+                                        <p:strVal val="visible"/>
+                                      </p:to>
+                                    </p:set>
+                                    <p:anim calcmode="lin" valueType="num">
+                                      <p:cBhvr additive="base">
+                                        <p:cTn id="25" dur="500" fill="hold"/>
+                                        <p:tgtEl>
+                                          <p:spTgt spid="9"/>
+                                        </p:tgtEl>
+                                        <p:attrNameLst>
+                                          <p:attrName>ppt_x</p:attrName>
+                                        </p:attrNameLst>
+                                      </p:cBhvr>
+                                      <p:tavLst>
+                                        <p:tav tm="0">
+                                          <p:val>
+                                            <p:strVal val="#ppt_x"/>
+                                          </p:val>
+                                        </p:tav>
+                                        <p:tav tm="100000">
+                                          <p:val>
+                                            <p:strVal val="#ppt_x"/>
+                                          </p:val>
+                                        </p:tav>
+                                      </p:tavLst>
+                                    </p:anim>
+                                    <p:anim calcmode="lin" valueType="num">
+                                      <p:cBhvr additive="base">
+                                        <p:cTn id="26" dur="500" fill="hold"/>
+                                        <p:tgtEl>
+                                          <p:spTgt spid="9"/>
+                                        </p:tgtEl>
+                                        <p:attrNameLst>
+                                          <p:attrName>ppt_y</p:attrName>
+                                        </p:attrNameLst>
+                                      </p:cBhvr>
+                                      <p:tavLst>
+                                        <p:tav tm="0">
+                                          <p:val>
+                                            <p:strVal val="1+#ppt_h/2"/>
+                                          </p:val>
+                                        </p:tav>
+                                        <p:tav tm="100000">
+                                          <p:val>
+                                            <p:strVal val="#ppt_y"/>
+                                          </p:val>
+                                        </p:tav>
+                                      </p:tavLst>
+                                    </p:anim>
+                                  </p:childTnLst>
+                                </p:cTn>
+                              </p:par>
+                              <p:par>
+                                <p:cTn id="27" presetID="2" presetClass="entr" presetSubtype="4" fill="hold" grpId="0" nodeType="withEffect">
+                                  <p:stCondLst>
+                                    <p:cond delay="0"/>
+                                  </p:stCondLst>
+                                  <p:childTnLst>
+                                    <p:set>
+                                      <p:cBhvr>
+                                        <p:cTn id="28" dur="1" fill="hold">
+                                          <p:stCondLst>
+                                            <p:cond delay="0"/>
+                                          </p:stCondLst>
+                                        </p:cTn>
+                                        <p:tgtEl>
+                                          <p:spTgt spid="10"/>
+                                        </p:tgtEl>
+                                        <p:attrNameLst>
+                                          <p:attrName>style.visibility</p:attrName>
+                                        </p:attrNameLst>
+                                      </p:cBhvr>
+                                      <p:to>
+                                        <p:strVal val="visible"/>
+                                      </p:to>
+                                    </p:set>
+                                    <p:anim calcmode="lin" valueType="num">
+                                      <p:cBhvr additive="base">
+                                        <p:cTn id="29" dur="500" fill="hold"/>
+                                        <p:tgtEl>
+                                          <p:spTgt spid="10"/>
+                                        </p:tgtEl>
+                                        <p:attrNameLst>
+                                          <p:attrName>ppt_x</p:attrName>
+                                        </p:attrNameLst>
+                                      </p:cBhvr>
+                                      <p:tavLst>
+                                        <p:tav tm="0">
+                                          <p:val>
+                                            <p:strVal val="#ppt_x"/>
+                                          </p:val>
+                                        </p:tav>
+                                        <p:tav tm="100000">
+                                          <p:val>
+                                            <p:strVal val="#ppt_x"/>
+                                          </p:val>
+                                        </p:tav>
+                                      </p:tavLst>
+                                    </p:anim>
+                                    <p:anim calcmode="lin" valueType="num">
+                                      <p:cBhvr additive="base">
+                                        <p:cTn id="30" dur="500" fill="hold"/>
+                                        <p:tgtEl>
+                                          <p:spTgt spid="10"/>
+                                        </p:tgtEl>
+                                        <p:attrNameLst>
+                                          <p:attrName>ppt_y</p:attrName>
+                                        </p:attrNameLst>
+                                      </p:cBhvr>
+                                      <p:tavLst>
+                                        <p:tav tm="0">
+                                          <p:val>
+                                            <p:strVal val="1+#ppt_h/2"/>
+                                          </p:val>
+                                        </p:tav>
+                                        <p:tav tm="100000">
+                                          <p:val>
+                                            <p:strVal val="#ppt_y"/>
+                                          </p:val>
+                                        </p:tav>
+                                      </p:tavLst>
+                                    </p:anim>
+                                  </p:childTnLst>
+                                </p:cTn>
+                              </p:par>
+                            </p:childTnLst>
+                          </p:cTn>
+                        </p:par>
+                      </p:childTnLst>
+                    </p:cTn>
+                  </p:par>
+                </p:childTnLst>
+              </p:cTn>
+              <p:prevCondLst>
+                <p:cond evt="onPrev" delay="0">
+                  <p:tgtEl>
+                    <p:sldTgt/>
+                  </p:tgtEl>
+                </p:cond>
+              </p:prevCondLst>
+              <p:nextCondLst>
+                <p:cond evt="onNext" delay="0">
+                  <p:tgtEl>
+                    <p:sldTgt/>
+                  </p:tgtEl>
+                </p:cond>
+              </p:nextCondLst>
+            </p:seq>
+          </p:childTnLst>
+        </p:cTn>
+      </p:par>
+    </p:tnLst>
+    <p:bldLst>
+      <p:bldP spid="7" grpId="0"/>
+      <p:bldP spid="7" grpId="1"/>
+      <p:bldP spid="8" grpId="0"/>
+      <p:bldP spid="9" grpId="0"/>
+      <p:bldP spid="10" grpId="0"/>
+      <p:bldP spid="8" grpId="1"/>
+      <p:bldP spid="9" grpId="1"/>
+      <p:bldP spid="10" grpId="1"/>
+    </p:bldLst>
+  </p:timing>
 </p:sld>
 </file>
 
 <file path=ppt/slides/slide4.xml><?xml version="1.0" encoding="utf-8"?>
 <p:sld xmlns:a="http://schemas.openxmlformats.org/drawingml/2006/main" xmlns:r="http://schemas.openxmlformats.org/officeDocument/2006/relationships" xmlns:p="http://schemas.openxmlformats.org/presentationml/2006/main">
-  <p:cSld name="Slide 4">
+  <p:cSld>
     <p:bg>
       <p:bgPr>
         <a:blipFill dpi="0" rotWithShape="1">
@@ -6079,13 +6350,12 @@
             <a:avLst/>
           </a:prstGeom>
           <a:noFill/>
-          <a:ln/>
         </p:spPr>
         <p:txBody>
           <a:bodyPr wrap="square" rtlCol="0" anchor="ctr"/>
           <a:lstStyle/>
           <a:p>
-            <a:pPr algn="r" indent="0" marL="0">
+            <a:pPr marL="0" indent="0" algn="r">
               <a:buNone/>
             </a:pPr>
             <a:r>
@@ -6093,9 +6363,9 @@
                 <a:solidFill>
                   <a:srgbClr val="8A9099"/>
                 </a:solidFill>
-                <a:latin typeface="微软雅黑" pitchFamily="34" charset="0"/>
-                <a:ea typeface="微软雅黑" pitchFamily="34" charset="-122"/>
-                <a:cs typeface="微软雅黑" pitchFamily="34" charset="-120"/>
+                <a:latin typeface="微软雅黑" panose="020B0503020204020204" pitchFamily="34" charset="-122"/>
+                <a:ea typeface="微软雅黑" panose="020B0503020204020204" pitchFamily="34" charset="-122"/>
+                <a:cs typeface="微软雅黑" panose="020B0503020204020204" pitchFamily="34" charset="-120"/>
               </a:rPr>
               <a:t>4 / 16</a:t>
             </a:r>
@@ -6118,13 +6388,12 @@
             <a:avLst/>
           </a:prstGeom>
           <a:noFill/>
-          <a:ln/>
         </p:spPr>
         <p:txBody>
           <a:bodyPr wrap="square" rtlCol="0" anchor="ctr"/>
           <a:lstStyle/>
           <a:p>
-            <a:pPr algn="l" indent="0" marL="0">
+            <a:pPr marL="0" indent="0" algn="l">
               <a:buNone/>
             </a:pPr>
             <a:r>
@@ -6132,9 +6401,9 @@
                 <a:solidFill>
                   <a:srgbClr val="1F4E9C"/>
                 </a:solidFill>
-                <a:latin typeface="微软雅黑" pitchFamily="34" charset="0"/>
-                <a:ea typeface="微软雅黑" pitchFamily="34" charset="-122"/>
-                <a:cs typeface="微软雅黑" pitchFamily="34" charset="-120"/>
+                <a:latin typeface="微软雅黑" panose="020B0503020204020204" pitchFamily="34" charset="-122"/>
+                <a:ea typeface="微软雅黑" panose="020B0503020204020204" pitchFamily="34" charset="-122"/>
+                <a:cs typeface="微软雅黑" panose="020B0503020204020204" pitchFamily="34" charset="-120"/>
               </a:rPr>
               <a:t>中序线索化</a:t>
             </a:r>
@@ -6157,13 +6426,12 @@
             <a:avLst/>
           </a:prstGeom>
           <a:noFill/>
-          <a:ln/>
         </p:spPr>
         <p:txBody>
           <a:bodyPr wrap="square" rtlCol="0" anchor="ctr"/>
           <a:lstStyle/>
           <a:p>
-            <a:pPr algn="l" indent="0" marL="0">
+            <a:pPr marL="0" indent="0" algn="l">
               <a:buNone/>
             </a:pPr>
             <a:r>
@@ -6171,9 +6439,9 @@
                 <a:solidFill>
                   <a:srgbClr val="1F2329"/>
                 </a:solidFill>
-                <a:latin typeface="微软雅黑" pitchFamily="34" charset="0"/>
-                <a:ea typeface="微软雅黑" pitchFamily="34" charset="-122"/>
-                <a:cs typeface="微软雅黑" pitchFamily="34" charset="-120"/>
+                <a:latin typeface="微软雅黑" panose="020B0503020204020204" pitchFamily="34" charset="-122"/>
+                <a:ea typeface="微软雅黑" panose="020B0503020204020204" pitchFamily="34" charset="-122"/>
+                <a:cs typeface="微软雅黑" panose="020B0503020204020204" pitchFamily="34" charset="-120"/>
               </a:rPr>
               <a:t>InThread：pre 指针始终指着刚访问过的结点</a:t>
             </a:r>
@@ -6198,7 +6466,6 @@
           <a:solidFill>
             <a:srgbClr val="F7F9FC"/>
           </a:solidFill>
-          <a:ln/>
         </p:spPr>
       </p:sp>
       <p:sp>
@@ -6218,7 +6485,6 @@
           <a:solidFill>
             <a:srgbClr val="1F4E9C"/>
           </a:solidFill>
-          <a:ln/>
         </p:spPr>
       </p:sp>
       <p:sp>
@@ -6236,13 +6502,12 @@
             <a:avLst/>
           </a:prstGeom>
           <a:noFill/>
-          <a:ln/>
         </p:spPr>
         <p:txBody>
           <a:bodyPr wrap="square" rtlCol="0" anchor="t"/>
           <a:lstStyle/>
           <a:p>
-            <a:pPr algn="l" indent="0" marL="0">
+            <a:pPr marL="0" indent="0" algn="l">
               <a:lnSpc>
                 <a:spcPct val="125000"/>
               </a:lnSpc>
@@ -6253,9 +6518,9 @@
                 <a:solidFill>
                   <a:srgbClr val="1F2329"/>
                 </a:solidFill>
-                <a:latin typeface="Consolas" pitchFamily="34" charset="0"/>
-                <a:ea typeface="Consolas" pitchFamily="34" charset="-122"/>
-                <a:cs typeface="Consolas" pitchFamily="34" charset="-120"/>
+                <a:latin typeface="Consolas" panose="020B0609020204030204" pitchFamily="34" charset="0"/>
+                <a:ea typeface="Consolas" panose="020B0609020204030204" pitchFamily="34" charset="-122"/>
+                <a:cs typeface="Consolas" panose="020B0609020204030204" pitchFamily="34" charset="-120"/>
               </a:rPr>
               <a:t>void InThread(BiThrTree &amp;p, BiThrTree &amp;pre){
     if(p != NULL){
@@ -6287,13 +6552,12 @@
             <a:avLst/>
           </a:prstGeom>
           <a:noFill/>
-          <a:ln/>
         </p:spPr>
         <p:txBody>
           <a:bodyPr wrap="square" rtlCol="0" anchor="t"/>
           <a:lstStyle/>
           <a:p>
-            <a:pPr algn="l" indent="0" marL="0">
+            <a:pPr marL="0" indent="0" algn="l">
               <a:buNone/>
             </a:pPr>
             <a:r>
@@ -6301,9 +6565,9 @@
                 <a:solidFill>
                   <a:srgbClr val="8A9099"/>
                 </a:solidFill>
-                <a:latin typeface="微软雅黑" pitchFamily="34" charset="0"/>
-                <a:ea typeface="微软雅黑" pitchFamily="34" charset="-122"/>
-                <a:cs typeface="微软雅黑" pitchFamily="34" charset="-120"/>
+                <a:latin typeface="微软雅黑" panose="020B0503020204020204" pitchFamily="34" charset="-122"/>
+                <a:ea typeface="微软雅黑" panose="020B0503020204020204" pitchFamily="34" charset="-122"/>
+                <a:cs typeface="微软雅黑" panose="020B0503020204020204" pitchFamily="34" charset="-120"/>
               </a:rPr>
               <a:t>pre 指向中序里刚访问过的结点。p 的前驱就是 pre，能马上建；但 pre 的后继是 p，要等遍历到 p 时才回填，所以两个 if 分开写</a:t>
             </a:r>
@@ -6321,7 +6585,7 @@
 
 <file path=ppt/slides/slide5.xml><?xml version="1.0" encoding="utf-8"?>
 <p:sld xmlns:a="http://schemas.openxmlformats.org/drawingml/2006/main" xmlns:r="http://schemas.openxmlformats.org/officeDocument/2006/relationships" xmlns:p="http://schemas.openxmlformats.org/presentationml/2006/main">
-  <p:cSld name="Slide 5">
+  <p:cSld>
     <p:bg>
       <p:bgPr>
         <a:blipFill dpi="0" rotWithShape="1">
@@ -6365,13 +6629,12 @@
             <a:avLst/>
           </a:prstGeom>
           <a:noFill/>
-          <a:ln/>
         </p:spPr>
         <p:txBody>
           <a:bodyPr wrap="square" rtlCol="0" anchor="ctr"/>
           <a:lstStyle/>
           <a:p>
-            <a:pPr algn="r" indent="0" marL="0">
+            <a:pPr marL="0" indent="0" algn="r">
               <a:buNone/>
             </a:pPr>
             <a:r>
@@ -6379,9 +6642,9 @@
                 <a:solidFill>
                   <a:srgbClr val="8A9099"/>
                 </a:solidFill>
-                <a:latin typeface="微软雅黑" pitchFamily="34" charset="0"/>
-                <a:ea typeface="微软雅黑" pitchFamily="34" charset="-122"/>
-                <a:cs typeface="微软雅黑" pitchFamily="34" charset="-120"/>
+                <a:latin typeface="微软雅黑" panose="020B0503020204020204" pitchFamily="34" charset="-122"/>
+                <a:ea typeface="微软雅黑" panose="020B0503020204020204" pitchFamily="34" charset="-122"/>
+                <a:cs typeface="微软雅黑" panose="020B0503020204020204" pitchFamily="34" charset="-120"/>
               </a:rPr>
               <a:t>5 / 16</a:t>
             </a:r>
@@ -6404,13 +6667,12 @@
             <a:avLst/>
           </a:prstGeom>
           <a:noFill/>
-          <a:ln/>
         </p:spPr>
         <p:txBody>
           <a:bodyPr wrap="square" rtlCol="0" anchor="ctr"/>
           <a:lstStyle/>
           <a:p>
-            <a:pPr algn="l" indent="0" marL="0">
+            <a:pPr marL="0" indent="0" algn="l">
               <a:buNone/>
             </a:pPr>
             <a:r>
@@ -6418,9 +6680,9 @@
                 <a:solidFill>
                   <a:srgbClr val="1F4E9C"/>
                 </a:solidFill>
-                <a:latin typeface="微软雅黑" pitchFamily="34" charset="0"/>
-                <a:ea typeface="微软雅黑" pitchFamily="34" charset="-122"/>
-                <a:cs typeface="微软雅黑" pitchFamily="34" charset="-120"/>
+                <a:latin typeface="微软雅黑" panose="020B0503020204020204" pitchFamily="34" charset="-122"/>
+                <a:ea typeface="微软雅黑" panose="020B0503020204020204" pitchFamily="34" charset="-122"/>
+                <a:cs typeface="微软雅黑" panose="020B0503020204020204" pitchFamily="34" charset="-120"/>
               </a:rPr>
               <a:t>中序线索化 · 过程页</a:t>
             </a:r>
@@ -6443,13 +6705,12 @@
             <a:avLst/>
           </a:prstGeom>
           <a:noFill/>
-          <a:ln/>
         </p:spPr>
         <p:txBody>
           <a:bodyPr wrap="square" rtlCol="0" anchor="ctr"/>
           <a:lstStyle/>
           <a:p>
-            <a:pPr algn="l" indent="0" marL="0">
+            <a:pPr marL="0" indent="0" algn="l">
               <a:buNone/>
             </a:pPr>
             <a:r>
@@ -6457,9 +6718,9 @@
                 <a:solidFill>
                   <a:srgbClr val="1F2329"/>
                 </a:solidFill>
-                <a:latin typeface="微软雅黑" pitchFamily="34" charset="0"/>
-                <a:ea typeface="微软雅黑" pitchFamily="34" charset="-122"/>
-                <a:cs typeface="微软雅黑" pitchFamily="34" charset="-120"/>
+                <a:latin typeface="微软雅黑" panose="020B0503020204020204" pitchFamily="34" charset="-122"/>
+                <a:ea typeface="微软雅黑" panose="020B0503020204020204" pitchFamily="34" charset="-122"/>
+                <a:cs typeface="微软雅黑" panose="020B0503020204020204" pitchFamily="34" charset="-120"/>
               </a:rPr>
               <a:t>一棵 5 结点树的中序线索化（拿纸跟画）</a:t>
             </a:r>
@@ -6482,13 +6743,12 @@
             <a:avLst/>
           </a:prstGeom>
           <a:noFill/>
-          <a:ln/>
         </p:spPr>
         <p:txBody>
           <a:bodyPr wrap="square" rtlCol="0" anchor="t"/>
           <a:lstStyle/>
           <a:p>
-            <a:pPr algn="l" indent="0" marL="0">
+            <a:pPr marL="0" indent="0" algn="l">
               <a:lnSpc>
                 <a:spcPct val="115000"/>
               </a:lnSpc>
@@ -6499,25 +6759,68 @@
                 <a:solidFill>
                   <a:srgbClr val="1F4E9C"/>
                 </a:solidFill>
-                <a:latin typeface="微软雅黑" pitchFamily="34" charset="0"/>
-                <a:ea typeface="微软雅黑" pitchFamily="34" charset="-122"/>
-                <a:cs typeface="微软雅黑" pitchFamily="34" charset="-120"/>
+                <a:latin typeface="微软雅黑" panose="020B0503020204020204" pitchFamily="34" charset="-122"/>
+                <a:ea typeface="微软雅黑" panose="020B0503020204020204" pitchFamily="34" charset="-122"/>
+                <a:cs typeface="微软雅黑" panose="020B0503020204020204" pitchFamily="34" charset="-120"/>
               </a:rPr>
               <a:t>•  </a:t>
             </a:r>
-            <a:pPr algn="l" indent="0" marL="0">
+            <a:r>
+              <a:rPr lang="en-US" sz="1400" dirty="0">
+                <a:solidFill>
+                  <a:srgbClr val="000000"/>
+                </a:solidFill>
+              </a:rPr>
+              <a:t>树：根1，左2右3，2的左4右5；中序是 4 2 5 1 3。pre 初始为 NULL</a:t>
+            </a:r>
+            <a:endParaRPr lang="en-US" sz="1400" dirty="0"/>
+          </a:p>
+        </p:txBody>
+      </p:sp>
+      <p:sp>
+        <p:nvSpPr>
+          <p:cNvPr id="6" name="Text 4"/>
+          <p:cNvSpPr/>
+          <p:nvPr/>
+        </p:nvSpPr>
+        <p:spPr>
+          <a:xfrm>
+            <a:off x="896112" y="2790444"/>
+            <a:ext cx="10454335" cy="321564"/>
+          </a:xfrm>
+          <a:prstGeom prst="rect">
+            <a:avLst/>
+          </a:prstGeom>
+          <a:noFill/>
+        </p:spPr>
+        <p:txBody>
+          <a:bodyPr wrap="square" rtlCol="0" anchor="t"/>
+          <a:lstStyle/>
+          <a:p>
+            <a:pPr marL="0" indent="0" algn="l">
               <a:lnSpc>
                 <a:spcPct val="115000"/>
               </a:lnSpc>
               <a:buNone/>
             </a:pPr>
             <a:r>
+              <a:rPr lang="en-US" sz="1400" b="1" dirty="0">
+                <a:solidFill>
+                  <a:srgbClr val="1F4E9C"/>
+                </a:solidFill>
+                <a:latin typeface="微软雅黑" panose="020B0503020204020204" pitchFamily="34" charset="-122"/>
+                <a:ea typeface="微软雅黑" panose="020B0503020204020204" pitchFamily="34" charset="-122"/>
+                <a:cs typeface="微软雅黑" panose="020B0503020204020204" pitchFamily="34" charset="-120"/>
+              </a:rPr>
+              <a:t>•  </a:t>
+            </a:r>
+            <a:r>
               <a:rPr lang="en-US" sz="1400" dirty="0">
                 <a:solidFill>
                   <a:srgbClr val="000000"/>
                 </a:solidFill>
               </a:rPr>
-              <a:t>树：根1，左2右3，2的左4右5；中序是 4 2 5 1 3。pre 初始为 NULL</a:t>
+              <a:t>访问4：4无左孩子，4-&gt;lchild=pre=NULL、ltag=1；pre是NULL不回填；pre=4</a:t>
             </a:r>
             <a:endParaRPr lang="en-US" sz="1400" dirty="0"/>
           </a:p>
@@ -6525,26 +6828,25 @@
       </p:sp>
       <p:sp>
         <p:nvSpPr>
-          <p:cNvPr id="6" name="Text 4"/>
-          <p:cNvSpPr/>
-          <p:nvPr/>
-        </p:nvSpPr>
-        <p:spPr>
-          <a:xfrm>
-            <a:off x="896112" y="2790444"/>
-            <a:ext cx="10454335" cy="321564"/>
-          </a:xfrm>
-          <a:prstGeom prst="rect">
-            <a:avLst/>
-          </a:prstGeom>
-          <a:noFill/>
-          <a:ln/>
+          <p:cNvPr id="7" name="Text 5"/>
+          <p:cNvSpPr/>
+          <p:nvPr/>
+        </p:nvSpPr>
+        <p:spPr>
+          <a:xfrm>
+            <a:off x="896112" y="3185160"/>
+            <a:ext cx="10454335" cy="588264"/>
+          </a:xfrm>
+          <a:prstGeom prst="rect">
+            <a:avLst/>
+          </a:prstGeom>
+          <a:noFill/>
         </p:spPr>
         <p:txBody>
           <a:bodyPr wrap="square" rtlCol="0" anchor="t"/>
           <a:lstStyle/>
           <a:p>
-            <a:pPr algn="l" indent="0" marL="0">
+            <a:pPr marL="0" indent="0" algn="l">
               <a:lnSpc>
                 <a:spcPct val="115000"/>
               </a:lnSpc>
@@ -6555,25 +6857,68 @@
                 <a:solidFill>
                   <a:srgbClr val="1F4E9C"/>
                 </a:solidFill>
-                <a:latin typeface="微软雅黑" pitchFamily="34" charset="0"/>
-                <a:ea typeface="微软雅黑" pitchFamily="34" charset="-122"/>
-                <a:cs typeface="微软雅黑" pitchFamily="34" charset="-120"/>
+                <a:latin typeface="微软雅黑" panose="020B0503020204020204" pitchFamily="34" charset="-122"/>
+                <a:ea typeface="微软雅黑" panose="020B0503020204020204" pitchFamily="34" charset="-122"/>
+                <a:cs typeface="微软雅黑" panose="020B0503020204020204" pitchFamily="34" charset="-120"/>
               </a:rPr>
               <a:t>•  </a:t>
             </a:r>
-            <a:pPr algn="l" indent="0" marL="0">
+            <a:r>
+              <a:rPr lang="en-US" sz="1400" dirty="0">
+                <a:solidFill>
+                  <a:srgbClr val="000000"/>
+                </a:solidFill>
+              </a:rPr>
+              <a:t>访问2：2有左孩子(4)不建前驱线索；pre=4，4无右孩子，回填 4-&gt;rchild=2、rtag=1；pre=2</a:t>
+            </a:r>
+            <a:endParaRPr lang="en-US" sz="1400" dirty="0"/>
+          </a:p>
+        </p:txBody>
+      </p:sp>
+      <p:sp>
+        <p:nvSpPr>
+          <p:cNvPr id="8" name="Text 6"/>
+          <p:cNvSpPr/>
+          <p:nvPr/>
+        </p:nvSpPr>
+        <p:spPr>
+          <a:xfrm>
+            <a:off x="896112" y="3846576"/>
+            <a:ext cx="10454335" cy="588264"/>
+          </a:xfrm>
+          <a:prstGeom prst="rect">
+            <a:avLst/>
+          </a:prstGeom>
+          <a:noFill/>
+        </p:spPr>
+        <p:txBody>
+          <a:bodyPr wrap="square" rtlCol="0" anchor="t"/>
+          <a:lstStyle/>
+          <a:p>
+            <a:pPr marL="0" indent="0" algn="l">
               <a:lnSpc>
                 <a:spcPct val="115000"/>
               </a:lnSpc>
               <a:buNone/>
             </a:pPr>
             <a:r>
+              <a:rPr lang="en-US" sz="1400" b="1" dirty="0">
+                <a:solidFill>
+                  <a:srgbClr val="1F4E9C"/>
+                </a:solidFill>
+                <a:latin typeface="微软雅黑" panose="020B0503020204020204" pitchFamily="34" charset="-122"/>
+                <a:ea typeface="微软雅黑" panose="020B0503020204020204" pitchFamily="34" charset="-122"/>
+                <a:cs typeface="微软雅黑" panose="020B0503020204020204" pitchFamily="34" charset="-120"/>
+              </a:rPr>
+              <a:t>•  </a:t>
+            </a:r>
+            <a:r>
               <a:rPr lang="en-US" sz="1400" dirty="0">
                 <a:solidFill>
                   <a:srgbClr val="000000"/>
                 </a:solidFill>
               </a:rPr>
-              <a:t>访问4：4无左孩子，4-&gt;lchild=pre=NULL、ltag=1；pre是NULL不回填；pre=4</a:t>
+              <a:t>访问5：5无左孩子，5-&gt;lchild=pre=2、ltag=1；pre=2 有右孩子(5)不回填；pre=5</a:t>
             </a:r>
             <a:endParaRPr lang="en-US" sz="1400" dirty="0"/>
           </a:p>
@@ -6581,26 +6926,25 @@
       </p:sp>
       <p:sp>
         <p:nvSpPr>
-          <p:cNvPr id="7" name="Text 5"/>
-          <p:cNvSpPr/>
-          <p:nvPr/>
-        </p:nvSpPr>
-        <p:spPr>
-          <a:xfrm>
-            <a:off x="896112" y="3185160"/>
-            <a:ext cx="10454335" cy="588264"/>
-          </a:xfrm>
-          <a:prstGeom prst="rect">
-            <a:avLst/>
-          </a:prstGeom>
-          <a:noFill/>
-          <a:ln/>
+          <p:cNvPr id="9" name="Text 7"/>
+          <p:cNvSpPr/>
+          <p:nvPr/>
+        </p:nvSpPr>
+        <p:spPr>
+          <a:xfrm>
+            <a:off x="896112" y="4507992"/>
+            <a:ext cx="10454335" cy="321564"/>
+          </a:xfrm>
+          <a:prstGeom prst="rect">
+            <a:avLst/>
+          </a:prstGeom>
+          <a:noFill/>
         </p:spPr>
         <p:txBody>
           <a:bodyPr wrap="square" rtlCol="0" anchor="t"/>
           <a:lstStyle/>
           <a:p>
-            <a:pPr algn="l" indent="0" marL="0">
+            <a:pPr marL="0" indent="0" algn="l">
               <a:lnSpc>
                 <a:spcPct val="115000"/>
               </a:lnSpc>
@@ -6611,130 +6955,12 @@
                 <a:solidFill>
                   <a:srgbClr val="1F4E9C"/>
                 </a:solidFill>
-                <a:latin typeface="微软雅黑" pitchFamily="34" charset="0"/>
-                <a:ea typeface="微软雅黑" pitchFamily="34" charset="-122"/>
-                <a:cs typeface="微软雅黑" pitchFamily="34" charset="-120"/>
+                <a:latin typeface="微软雅黑" panose="020B0503020204020204" pitchFamily="34" charset="-122"/>
+                <a:ea typeface="微软雅黑" panose="020B0503020204020204" pitchFamily="34" charset="-122"/>
+                <a:cs typeface="微软雅黑" panose="020B0503020204020204" pitchFamily="34" charset="-120"/>
               </a:rPr>
               <a:t>•  </a:t>
             </a:r>
-            <a:pPr algn="l" indent="0" marL="0">
-              <a:lnSpc>
-                <a:spcPct val="115000"/>
-              </a:lnSpc>
-              <a:buNone/>
-            </a:pPr>
-            <a:r>
-              <a:rPr lang="en-US" sz="1400" dirty="0">
-                <a:solidFill>
-                  <a:srgbClr val="000000"/>
-                </a:solidFill>
-              </a:rPr>
-              <a:t>访问2：2有左孩子(4)不建前驱线索；pre=4，4无右孩子，回填 4-&gt;rchild=2、rtag=1；pre=2</a:t>
-            </a:r>
-            <a:endParaRPr lang="en-US" sz="1400" dirty="0"/>
-          </a:p>
-        </p:txBody>
-      </p:sp>
-      <p:sp>
-        <p:nvSpPr>
-          <p:cNvPr id="8" name="Text 6"/>
-          <p:cNvSpPr/>
-          <p:nvPr/>
-        </p:nvSpPr>
-        <p:spPr>
-          <a:xfrm>
-            <a:off x="896112" y="3846576"/>
-            <a:ext cx="10454335" cy="588264"/>
-          </a:xfrm>
-          <a:prstGeom prst="rect">
-            <a:avLst/>
-          </a:prstGeom>
-          <a:noFill/>
-          <a:ln/>
-        </p:spPr>
-        <p:txBody>
-          <a:bodyPr wrap="square" rtlCol="0" anchor="t"/>
-          <a:lstStyle/>
-          <a:p>
-            <a:pPr algn="l" indent="0" marL="0">
-              <a:lnSpc>
-                <a:spcPct val="115000"/>
-              </a:lnSpc>
-              <a:buNone/>
-            </a:pPr>
-            <a:r>
-              <a:rPr lang="en-US" sz="1400" b="1" dirty="0">
-                <a:solidFill>
-                  <a:srgbClr val="1F4E9C"/>
-                </a:solidFill>
-                <a:latin typeface="微软雅黑" pitchFamily="34" charset="0"/>
-                <a:ea typeface="微软雅黑" pitchFamily="34" charset="-122"/>
-                <a:cs typeface="微软雅黑" pitchFamily="34" charset="-120"/>
-              </a:rPr>
-              <a:t>•  </a:t>
-            </a:r>
-            <a:pPr algn="l" indent="0" marL="0">
-              <a:lnSpc>
-                <a:spcPct val="115000"/>
-              </a:lnSpc>
-              <a:buNone/>
-            </a:pPr>
-            <a:r>
-              <a:rPr lang="en-US" sz="1400" dirty="0">
-                <a:solidFill>
-                  <a:srgbClr val="000000"/>
-                </a:solidFill>
-              </a:rPr>
-              <a:t>访问5：5无左孩子，5-&gt;lchild=pre=2、ltag=1；pre=2 有右孩子(5)不回填；pre=5</a:t>
-            </a:r>
-            <a:endParaRPr lang="en-US" sz="1400" dirty="0"/>
-          </a:p>
-        </p:txBody>
-      </p:sp>
-      <p:sp>
-        <p:nvSpPr>
-          <p:cNvPr id="9" name="Text 7"/>
-          <p:cNvSpPr/>
-          <p:nvPr/>
-        </p:nvSpPr>
-        <p:spPr>
-          <a:xfrm>
-            <a:off x="896112" y="4507992"/>
-            <a:ext cx="10454335" cy="321564"/>
-          </a:xfrm>
-          <a:prstGeom prst="rect">
-            <a:avLst/>
-          </a:prstGeom>
-          <a:noFill/>
-          <a:ln/>
-        </p:spPr>
-        <p:txBody>
-          <a:bodyPr wrap="square" rtlCol="0" anchor="t"/>
-          <a:lstStyle/>
-          <a:p>
-            <a:pPr algn="l" indent="0" marL="0">
-              <a:lnSpc>
-                <a:spcPct val="115000"/>
-              </a:lnSpc>
-              <a:buNone/>
-            </a:pPr>
-            <a:r>
-              <a:rPr lang="en-US" sz="1400" b="1" dirty="0">
-                <a:solidFill>
-                  <a:srgbClr val="1F4E9C"/>
-                </a:solidFill>
-                <a:latin typeface="微软雅黑" pitchFamily="34" charset="0"/>
-                <a:ea typeface="微软雅黑" pitchFamily="34" charset="-122"/>
-                <a:cs typeface="微软雅黑" pitchFamily="34" charset="-120"/>
-              </a:rPr>
-              <a:t>•  </a:t>
-            </a:r>
-            <a:pPr algn="l" indent="0" marL="0">
-              <a:lnSpc>
-                <a:spcPct val="115000"/>
-              </a:lnSpc>
-              <a:buNone/>
-            </a:pPr>
             <a:r>
               <a:rPr lang="en-US" sz="1400" dirty="0">
                 <a:solidFill>
@@ -6762,13 +6988,12 @@
             <a:avLst/>
           </a:prstGeom>
           <a:noFill/>
-          <a:ln/>
         </p:spPr>
         <p:txBody>
           <a:bodyPr wrap="square" rtlCol="0" anchor="t"/>
           <a:lstStyle/>
           <a:p>
-            <a:pPr algn="l" indent="0" marL="0">
+            <a:pPr marL="0" indent="0" algn="l">
               <a:buNone/>
             </a:pPr>
             <a:r>
@@ -6776,9 +7001,9 @@
                 <a:solidFill>
                   <a:srgbClr val="8A9099"/>
                 </a:solidFill>
-                <a:latin typeface="微软雅黑" pitchFamily="34" charset="0"/>
-                <a:ea typeface="微软雅黑" pitchFamily="34" charset="-122"/>
-                <a:cs typeface="微软雅黑" pitchFamily="34" charset="-120"/>
+                <a:latin typeface="微软雅黑" panose="020B0503020204020204" pitchFamily="34" charset="-122"/>
+                <a:ea typeface="微软雅黑" panose="020B0503020204020204" pitchFamily="34" charset="-122"/>
+                <a:cs typeface="微软雅黑" panose="020B0503020204020204" pitchFamily="34" charset="-120"/>
               </a:rPr>
               <a:t>你看到线索是怎么一条条建起来又回填的：前驱线索在访问 p 时建，后继线索在处理下一个结点时回填</a:t>
             </a:r>
@@ -6796,7 +7021,7 @@
 
 <file path=ppt/slides/slide6.xml><?xml version="1.0" encoding="utf-8"?>
 <p:sld xmlns:a="http://schemas.openxmlformats.org/drawingml/2006/main" xmlns:r="http://schemas.openxmlformats.org/officeDocument/2006/relationships" xmlns:p="http://schemas.openxmlformats.org/presentationml/2006/main">
-  <p:cSld name="Slide 6">
+  <p:cSld>
     <p:bg>
       <p:bgPr>
         <a:blipFill dpi="0" rotWithShape="1">
@@ -6840,13 +7065,12 @@
             <a:avLst/>
           </a:prstGeom>
           <a:noFill/>
-          <a:ln/>
         </p:spPr>
         <p:txBody>
           <a:bodyPr wrap="square" rtlCol="0" anchor="ctr"/>
           <a:lstStyle/>
           <a:p>
-            <a:pPr algn="r" indent="0" marL="0">
+            <a:pPr marL="0" indent="0" algn="r">
               <a:buNone/>
             </a:pPr>
             <a:r>
@@ -6854,9 +7078,9 @@
                 <a:solidFill>
                   <a:srgbClr val="8A9099"/>
                 </a:solidFill>
-                <a:latin typeface="微软雅黑" pitchFamily="34" charset="0"/>
-                <a:ea typeface="微软雅黑" pitchFamily="34" charset="-122"/>
-                <a:cs typeface="微软雅黑" pitchFamily="34" charset="-120"/>
+                <a:latin typeface="微软雅黑" panose="020B0503020204020204" pitchFamily="34" charset="-122"/>
+                <a:ea typeface="微软雅黑" panose="020B0503020204020204" pitchFamily="34" charset="-122"/>
+                <a:cs typeface="微软雅黑" panose="020B0503020204020204" pitchFamily="34" charset="-120"/>
               </a:rPr>
               <a:t>6 / 16</a:t>
             </a:r>
@@ -6879,13 +7103,12 @@
             <a:avLst/>
           </a:prstGeom>
           <a:noFill/>
-          <a:ln/>
         </p:spPr>
         <p:txBody>
           <a:bodyPr wrap="square" rtlCol="0" anchor="ctr"/>
           <a:lstStyle/>
           <a:p>
-            <a:pPr algn="l" indent="0" marL="0">
+            <a:pPr marL="0" indent="0" algn="l">
               <a:buNone/>
             </a:pPr>
             <a:r>
@@ -6893,9 +7116,9 @@
                 <a:solidFill>
                   <a:srgbClr val="1F4E9C"/>
                 </a:solidFill>
-                <a:latin typeface="微软雅黑" pitchFamily="34" charset="0"/>
-                <a:ea typeface="微软雅黑" pitchFamily="34" charset="-122"/>
-                <a:cs typeface="微软雅黑" pitchFamily="34" charset="-120"/>
+                <a:latin typeface="微软雅黑" panose="020B0503020204020204" pitchFamily="34" charset="-122"/>
+                <a:ea typeface="微软雅黑" panose="020B0503020204020204" pitchFamily="34" charset="-122"/>
+                <a:cs typeface="微软雅黑" panose="020B0503020204020204" pitchFamily="34" charset="-120"/>
               </a:rPr>
               <a:t>线索化 · 收尾</a:t>
             </a:r>
@@ -6918,13 +7141,12 @@
             <a:avLst/>
           </a:prstGeom>
           <a:noFill/>
-          <a:ln/>
         </p:spPr>
         <p:txBody>
           <a:bodyPr wrap="square" rtlCol="0" anchor="ctr"/>
           <a:lstStyle/>
           <a:p>
-            <a:pPr algn="l" indent="0" marL="0">
+            <a:pPr marL="0" indent="0" algn="l">
               <a:buNone/>
             </a:pPr>
             <a:r>
@@ -6932,9 +7154,9 @@
                 <a:solidFill>
                   <a:srgbClr val="1F2329"/>
                 </a:solidFill>
-                <a:latin typeface="微软雅黑" pitchFamily="34" charset="0"/>
-                <a:ea typeface="微软雅黑" pitchFamily="34" charset="-122"/>
-                <a:cs typeface="微软雅黑" pitchFamily="34" charset="-120"/>
+                <a:latin typeface="微软雅黑" panose="020B0503020204020204" pitchFamily="34" charset="-122"/>
+                <a:ea typeface="微软雅黑" panose="020B0503020204020204" pitchFamily="34" charset="-122"/>
+                <a:cs typeface="微软雅黑" panose="020B0503020204020204" pitchFamily="34" charset="-120"/>
               </a:rPr>
               <a:t>CreateInThread：为什么结束后要单独处理 pre</a:t>
             </a:r>
@@ -6959,7 +7181,6 @@
           <a:solidFill>
             <a:srgbClr val="F7F9FC"/>
           </a:solidFill>
-          <a:ln/>
         </p:spPr>
       </p:sp>
       <p:sp>
@@ -6979,7 +7200,6 @@
           <a:solidFill>
             <a:srgbClr val="1F4E9C"/>
           </a:solidFill>
-          <a:ln/>
         </p:spPr>
       </p:sp>
       <p:sp>
@@ -6997,13 +7217,12 @@
             <a:avLst/>
           </a:prstGeom>
           <a:noFill/>
-          <a:ln/>
         </p:spPr>
         <p:txBody>
           <a:bodyPr wrap="square" rtlCol="0" anchor="t"/>
           <a:lstStyle/>
           <a:p>
-            <a:pPr algn="l" indent="0" marL="0">
+            <a:pPr marL="0" indent="0" algn="l">
               <a:lnSpc>
                 <a:spcPct val="125000"/>
               </a:lnSpc>
@@ -7014,9 +7233,9 @@
                 <a:solidFill>
                   <a:srgbClr val="1F2329"/>
                 </a:solidFill>
-                <a:latin typeface="Consolas" pitchFamily="34" charset="0"/>
-                <a:ea typeface="Consolas" pitchFamily="34" charset="-122"/>
-                <a:cs typeface="Consolas" pitchFamily="34" charset="-120"/>
+                <a:latin typeface="Consolas" panose="020B0609020204030204" pitchFamily="34" charset="0"/>
+                <a:ea typeface="Consolas" panose="020B0609020204030204" pitchFamily="34" charset="-122"/>
+                <a:cs typeface="Consolas" panose="020B0609020204030204" pitchFamily="34" charset="-120"/>
               </a:rPr>
               <a:t>void CreateInThread(BiThrTree &amp;T){
     BiThrNode *pre = NULL;
@@ -7046,13 +7265,12 @@
             <a:avLst/>
           </a:prstGeom>
           <a:noFill/>
-          <a:ln/>
         </p:spPr>
         <p:txBody>
           <a:bodyPr wrap="square" rtlCol="0" anchor="t"/>
           <a:lstStyle/>
           <a:p>
-            <a:pPr algn="l" indent="0" marL="0">
+            <a:pPr marL="0" indent="0" algn="l">
               <a:buNone/>
             </a:pPr>
             <a:r>
@@ -7060,9 +7278,9 @@
                 <a:solidFill>
                   <a:srgbClr val="8A9099"/>
                 </a:solidFill>
-                <a:latin typeface="微软雅黑" pitchFamily="34" charset="0"/>
-                <a:ea typeface="微软雅黑" pitchFamily="34" charset="-122"/>
-                <a:cs typeface="微软雅黑" pitchFamily="34" charset="-120"/>
+                <a:latin typeface="微软雅黑" panose="020B0503020204020204" pitchFamily="34" charset="-122"/>
+                <a:ea typeface="微软雅黑" panose="020B0503020204020204" pitchFamily="34" charset="-122"/>
+                <a:cs typeface="微软雅黑" panose="020B0503020204020204" pitchFamily="34" charset="-120"/>
               </a:rPr>
               <a:t>InThread 走完后，pre 停在中序最后一个结点，它没有后继、右链域还空着，所以收尾时把它置 NULL、rtag 设 1，和前面的约定一致</a:t>
             </a:r>
@@ -7080,7 +7298,7 @@
 
 <file path=ppt/slides/slide7.xml><?xml version="1.0" encoding="utf-8"?>
 <p:sld xmlns:a="http://schemas.openxmlformats.org/drawingml/2006/main" xmlns:r="http://schemas.openxmlformats.org/officeDocument/2006/relationships" xmlns:p="http://schemas.openxmlformats.org/presentationml/2006/main">
-  <p:cSld name="Slide 7">
+  <p:cSld>
     <p:bg>
       <p:bgPr>
         <a:blipFill dpi="0" rotWithShape="1">
@@ -7124,13 +7342,12 @@
             <a:avLst/>
           </a:prstGeom>
           <a:noFill/>
-          <a:ln/>
         </p:spPr>
         <p:txBody>
           <a:bodyPr wrap="square" rtlCol="0" anchor="ctr"/>
           <a:lstStyle/>
           <a:p>
-            <a:pPr algn="r" indent="0" marL="0">
+            <a:pPr marL="0" indent="0" algn="r">
               <a:buNone/>
             </a:pPr>
             <a:r>
@@ -7138,9 +7355,9 @@
                 <a:solidFill>
                   <a:srgbClr val="8A9099"/>
                 </a:solidFill>
-                <a:latin typeface="微软雅黑" pitchFamily="34" charset="0"/>
-                <a:ea typeface="微软雅黑" pitchFamily="34" charset="-122"/>
-                <a:cs typeface="微软雅黑" pitchFamily="34" charset="-120"/>
+                <a:latin typeface="微软雅黑" panose="020B0503020204020204" pitchFamily="34" charset="-122"/>
+                <a:ea typeface="微软雅黑" panose="020B0503020204020204" pitchFamily="34" charset="-122"/>
+                <a:cs typeface="微软雅黑" panose="020B0503020204020204" pitchFamily="34" charset="-120"/>
               </a:rPr>
               <a:t>7 / 16</a:t>
             </a:r>
@@ -7163,13 +7380,12 @@
             <a:avLst/>
           </a:prstGeom>
           <a:noFill/>
-          <a:ln/>
         </p:spPr>
         <p:txBody>
           <a:bodyPr wrap="square" rtlCol="0" anchor="ctr"/>
           <a:lstStyle/>
           <a:p>
-            <a:pPr algn="l" indent="0" marL="0">
+            <a:pPr marL="0" indent="0" algn="l">
               <a:buNone/>
             </a:pPr>
             <a:r>
@@ -7177,9 +7393,9 @@
                 <a:solidFill>
                   <a:srgbClr val="1F4E9C"/>
                 </a:solidFill>
-                <a:latin typeface="微软雅黑" pitchFamily="34" charset="0"/>
-                <a:ea typeface="微软雅黑" pitchFamily="34" charset="-122"/>
-                <a:cs typeface="微软雅黑" pitchFamily="34" charset="-120"/>
+                <a:latin typeface="微软雅黑" panose="020B0503020204020204" pitchFamily="34" charset="-122"/>
+                <a:ea typeface="微软雅黑" panose="020B0503020204020204" pitchFamily="34" charset="-122"/>
+                <a:cs typeface="微软雅黑" panose="020B0503020204020204" pitchFamily="34" charset="-120"/>
               </a:rPr>
               <a:t>线索树 · 找后继</a:t>
             </a:r>
@@ -7202,13 +7418,12 @@
             <a:avLst/>
           </a:prstGeom>
           <a:noFill/>
-          <a:ln/>
         </p:spPr>
         <p:txBody>
           <a:bodyPr wrap="square" rtlCol="0" anchor="ctr"/>
           <a:lstStyle/>
           <a:p>
-            <a:pPr algn="l" indent="0" marL="0">
+            <a:pPr marL="0" indent="0" algn="l">
               <a:buNone/>
             </a:pPr>
             <a:r>
@@ -7216,9 +7431,9 @@
                 <a:solidFill>
                   <a:srgbClr val="1F2329"/>
                 </a:solidFill>
-                <a:latin typeface="微软雅黑" pitchFamily="34" charset="0"/>
-                <a:ea typeface="微软雅黑" pitchFamily="34" charset="-122"/>
-                <a:cs typeface="微软雅黑" pitchFamily="34" charset="-120"/>
+                <a:latin typeface="微软雅黑" panose="020B0503020204020204" pitchFamily="34" charset="-122"/>
+                <a:ea typeface="微软雅黑" panose="020B0503020204020204" pitchFamily="34" charset="-122"/>
+                <a:cs typeface="微软雅黑" panose="020B0503020204020204" pitchFamily="34" charset="-120"/>
               </a:rPr>
               <a:t>Nextnode：找中序后继分两种情况</a:t>
             </a:r>
@@ -7243,7 +7458,6 @@
           <a:solidFill>
             <a:srgbClr val="F7F9FC"/>
           </a:solidFill>
-          <a:ln/>
         </p:spPr>
       </p:sp>
       <p:sp>
@@ -7263,7 +7477,6 @@
           <a:solidFill>
             <a:srgbClr val="1F4E9C"/>
           </a:solidFill>
-          <a:ln/>
         </p:spPr>
       </p:sp>
       <p:sp>
@@ -7281,13 +7494,12 @@
             <a:avLst/>
           </a:prstGeom>
           <a:noFill/>
-          <a:ln/>
         </p:spPr>
         <p:txBody>
           <a:bodyPr wrap="square" rtlCol="0" anchor="t"/>
           <a:lstStyle/>
           <a:p>
-            <a:pPr algn="l" indent="0" marL="0">
+            <a:pPr marL="0" indent="0" algn="l">
               <a:lnSpc>
                 <a:spcPct val="125000"/>
               </a:lnSpc>
@@ -7298,9 +7510,9 @@
                 <a:solidFill>
                   <a:srgbClr val="1F2329"/>
                 </a:solidFill>
-                <a:latin typeface="Consolas" pitchFamily="34" charset="0"/>
-                <a:ea typeface="Consolas" pitchFamily="34" charset="-122"/>
-                <a:cs typeface="Consolas" pitchFamily="34" charset="-120"/>
+                <a:latin typeface="Consolas" panose="020B0609020204030204" pitchFamily="34" charset="0"/>
+                <a:ea typeface="Consolas" panose="020B0609020204030204" pitchFamily="34" charset="-122"/>
+                <a:cs typeface="Consolas" panose="020B0609020204030204" pitchFamily="34" charset="-120"/>
               </a:rPr>
               <a:t>BiThrNode *Nextnode(BiThrNode *p){
     if(p-&gt;rtag == 1) return p-&gt;rchild;   // 右链域是线索，直接就是后继，O(1)
@@ -7329,13 +7541,12 @@
             <a:avLst/>
           </a:prstGeom>
           <a:noFill/>
-          <a:ln/>
         </p:spPr>
         <p:txBody>
           <a:bodyPr wrap="square" rtlCol="0" anchor="t"/>
           <a:lstStyle/>
           <a:p>
-            <a:pPr algn="l" indent="0" marL="0">
+            <a:pPr marL="0" indent="0" algn="l">
               <a:buNone/>
             </a:pPr>
             <a:r>
@@ -7343,9 +7554,9 @@
                 <a:solidFill>
                   <a:srgbClr val="8A9099"/>
                 </a:solidFill>
-                <a:latin typeface="微软雅黑" pitchFamily="34" charset="0"/>
-                <a:ea typeface="微软雅黑" pitchFamily="34" charset="-122"/>
-                <a:cs typeface="微软雅黑" pitchFamily="34" charset="-120"/>
+                <a:latin typeface="微软雅黑" panose="020B0503020204020204" pitchFamily="34" charset="-122"/>
+                <a:ea typeface="微软雅黑" panose="020B0503020204020204" pitchFamily="34" charset="-122"/>
+                <a:cs typeface="微软雅黑" panose="020B0503020204020204" pitchFamily="34" charset="-120"/>
               </a:rPr>
               <a:t>rtag=1 时后继早存好了，一步拿到；rtag=0 时后继是右子树的最左下结点，要走下去，最坏 O(树高)</a:t>
             </a:r>
@@ -7363,7 +7574,7 @@
 
 <file path=ppt/slides/slide8.xml><?xml version="1.0" encoding="utf-8"?>
 <p:sld xmlns:a="http://schemas.openxmlformats.org/drawingml/2006/main" xmlns:r="http://schemas.openxmlformats.org/officeDocument/2006/relationships" xmlns:p="http://schemas.openxmlformats.org/presentationml/2006/main">
-  <p:cSld name="Slide 8">
+  <p:cSld>
     <p:bg>
       <p:bgPr>
         <a:blipFill dpi="0" rotWithShape="1">
@@ -7407,13 +7618,12 @@
             <a:avLst/>
           </a:prstGeom>
           <a:noFill/>
-          <a:ln/>
         </p:spPr>
         <p:txBody>
           <a:bodyPr wrap="square" rtlCol="0" anchor="ctr"/>
           <a:lstStyle/>
           <a:p>
-            <a:pPr algn="r" indent="0" marL="0">
+            <a:pPr marL="0" indent="0" algn="r">
               <a:buNone/>
             </a:pPr>
             <a:r>
@@ -7421,9 +7631,9 @@
                 <a:solidFill>
                   <a:srgbClr val="8A9099"/>
                 </a:solidFill>
-                <a:latin typeface="微软雅黑" pitchFamily="34" charset="0"/>
-                <a:ea typeface="微软雅黑" pitchFamily="34" charset="-122"/>
-                <a:cs typeface="微软雅黑" pitchFamily="34" charset="-120"/>
+                <a:latin typeface="微软雅黑" panose="020B0503020204020204" pitchFamily="34" charset="-122"/>
+                <a:ea typeface="微软雅黑" panose="020B0503020204020204" pitchFamily="34" charset="-122"/>
+                <a:cs typeface="微软雅黑" panose="020B0503020204020204" pitchFamily="34" charset="-120"/>
               </a:rPr>
               <a:t>8 / 16</a:t>
             </a:r>
@@ -7446,13 +7656,12 @@
             <a:avLst/>
           </a:prstGeom>
           <a:noFill/>
-          <a:ln/>
         </p:spPr>
         <p:txBody>
           <a:bodyPr wrap="square" rtlCol="0" anchor="ctr"/>
           <a:lstStyle/>
           <a:p>
-            <a:pPr algn="l" indent="0" marL="0">
+            <a:pPr marL="0" indent="0" algn="l">
               <a:buNone/>
             </a:pPr>
             <a:r>
@@ -7460,9 +7669,9 @@
                 <a:solidFill>
                   <a:srgbClr val="1F4E9C"/>
                 </a:solidFill>
-                <a:latin typeface="微软雅黑" pitchFamily="34" charset="0"/>
-                <a:ea typeface="微软雅黑" pitchFamily="34" charset="-122"/>
-                <a:cs typeface="微软雅黑" pitchFamily="34" charset="-120"/>
+                <a:latin typeface="微软雅黑" panose="020B0503020204020204" pitchFamily="34" charset="-122"/>
+                <a:ea typeface="微软雅黑" panose="020B0503020204020204" pitchFamily="34" charset="-122"/>
+                <a:cs typeface="微软雅黑" panose="020B0503020204020204" pitchFamily="34" charset="-120"/>
               </a:rPr>
               <a:t>线索树 · 遍历</a:t>
             </a:r>
@@ -7485,13 +7694,12 @@
             <a:avLst/>
           </a:prstGeom>
           <a:noFill/>
-          <a:ln/>
         </p:spPr>
         <p:txBody>
           <a:bodyPr wrap="square" rtlCol="0" anchor="ctr"/>
           <a:lstStyle/>
           <a:p>
-            <a:pPr algn="l" indent="0" marL="0">
+            <a:pPr marL="0" indent="0" algn="l">
               <a:buNone/>
             </a:pPr>
             <a:r>
@@ -7499,9 +7707,9 @@
                 <a:solidFill>
                   <a:srgbClr val="1F2329"/>
                 </a:solidFill>
-                <a:latin typeface="微软雅黑" pitchFamily="34" charset="0"/>
-                <a:ea typeface="微软雅黑" pitchFamily="34" charset="-122"/>
-                <a:cs typeface="微软雅黑" pitchFamily="34" charset="-120"/>
+                <a:latin typeface="微软雅黑" panose="020B0503020204020204" pitchFamily="34" charset="-122"/>
+                <a:ea typeface="微软雅黑" panose="020B0503020204020204" pitchFamily="34" charset="-122"/>
+                <a:cs typeface="微软雅黑" panose="020B0503020204020204" pitchFamily="34" charset="-120"/>
               </a:rPr>
               <a:t>Firstnode 与中序线索树的遍历：不用栈</a:t>
             </a:r>
@@ -7526,7 +7734,6 @@
           <a:solidFill>
             <a:srgbClr val="F7F9FC"/>
           </a:solidFill>
-          <a:ln/>
         </p:spPr>
       </p:sp>
       <p:sp>
@@ -7546,7 +7753,6 @@
           <a:solidFill>
             <a:srgbClr val="1F4E9C"/>
           </a:solidFill>
-          <a:ln/>
         </p:spPr>
       </p:sp>
       <p:sp>
@@ -7564,13 +7770,12 @@
             <a:avLst/>
           </a:prstGeom>
           <a:noFill/>
-          <a:ln/>
         </p:spPr>
         <p:txBody>
           <a:bodyPr wrap="square" rtlCol="0" anchor="t"/>
           <a:lstStyle/>
           <a:p>
-            <a:pPr algn="l" indent="0" marL="0">
+            <a:pPr marL="0" indent="0" algn="l">
               <a:lnSpc>
                 <a:spcPct val="125000"/>
               </a:lnSpc>
@@ -7581,9 +7786,9 @@
                 <a:solidFill>
                   <a:srgbClr val="1F2329"/>
                 </a:solidFill>
-                <a:latin typeface="Consolas" pitchFamily="34" charset="0"/>
-                <a:ea typeface="Consolas" pitchFamily="34" charset="-122"/>
-                <a:cs typeface="Consolas" pitchFamily="34" charset="-120"/>
+                <a:latin typeface="Consolas" panose="020B0609020204030204" pitchFamily="34" charset="0"/>
+                <a:ea typeface="Consolas" panose="020B0609020204030204" pitchFamily="34" charset="-122"/>
+                <a:cs typeface="Consolas" panose="020B0609020204030204" pitchFamily="34" charset="-120"/>
               </a:rPr>
               <a:t>BiThrNode *Firstnode(BiThrNode *T){      // 中序第一个结点
     while(T-&gt;ltag == 0) T = T-&gt;lchild;   // 一路往左下找
@@ -7612,13 +7817,12 @@
             <a:avLst/>
           </a:prstGeom>
           <a:noFill/>
-          <a:ln/>
         </p:spPr>
         <p:txBody>
           <a:bodyPr wrap="square" rtlCol="0" anchor="t"/>
           <a:lstStyle/>
           <a:p>
-            <a:pPr algn="l" indent="0" marL="0">
+            <a:pPr marL="0" indent="0" algn="l">
               <a:buNone/>
             </a:pPr>
             <a:r>
@@ -7626,9 +7830,9 @@
                 <a:solidFill>
                   <a:srgbClr val="8A9099"/>
                 </a:solidFill>
-                <a:latin typeface="微软雅黑" pitchFamily="34" charset="0"/>
-                <a:ea typeface="微软雅黑" pitchFamily="34" charset="-122"/>
-                <a:cs typeface="微软雅黑" pitchFamily="34" charset="-120"/>
+                <a:latin typeface="微软雅黑" panose="020B0503020204020204" pitchFamily="34" charset="-122"/>
+                <a:ea typeface="微软雅黑" panose="020B0503020204020204" pitchFamily="34" charset="-122"/>
+                <a:cs typeface="微软雅黑" panose="020B0503020204020204" pitchFamily="34" charset="-120"/>
               </a:rPr>
               <a:t>从第一个结点开始，不断 Nextnode 往后走，就能中序遍历整棵树——不用栈、不用递归、空间 O(1)，这就是线索化存在的全部理由</a:t>
             </a:r>
@@ -7646,7 +7850,7 @@
 
 <file path=ppt/slides/slide9.xml><?xml version="1.0" encoding="utf-8"?>
 <p:sld xmlns:a="http://schemas.openxmlformats.org/drawingml/2006/main" xmlns:r="http://schemas.openxmlformats.org/officeDocument/2006/relationships" xmlns:p="http://schemas.openxmlformats.org/presentationml/2006/main">
-  <p:cSld name="Slide 9">
+  <p:cSld>
     <p:bg>
       <p:bgPr>
         <a:blipFill dpi="0" rotWithShape="1">
@@ -7690,13 +7894,12 @@
             <a:avLst/>
           </a:prstGeom>
           <a:noFill/>
-          <a:ln/>
         </p:spPr>
         <p:txBody>
           <a:bodyPr wrap="square" rtlCol="0" anchor="ctr"/>
           <a:lstStyle/>
           <a:p>
-            <a:pPr algn="r" indent="0" marL="0">
+            <a:pPr marL="0" indent="0" algn="r">
               <a:buNone/>
             </a:pPr>
             <a:r>
@@ -7704,9 +7907,9 @@
                 <a:solidFill>
                   <a:srgbClr val="8A9099"/>
                 </a:solidFill>
-                <a:latin typeface="微软雅黑" pitchFamily="34" charset="0"/>
-                <a:ea typeface="微软雅黑" pitchFamily="34" charset="-122"/>
-                <a:cs typeface="微软雅黑" pitchFamily="34" charset="-120"/>
+                <a:latin typeface="微软雅黑" panose="020B0503020204020204" pitchFamily="34" charset="-122"/>
+                <a:ea typeface="微软雅黑" panose="020B0503020204020204" pitchFamily="34" charset="-122"/>
+                <a:cs typeface="微软雅黑" panose="020B0503020204020204" pitchFamily="34" charset="-120"/>
               </a:rPr>
               <a:t>9 / 16</a:t>
             </a:r>
@@ -7729,13 +7932,12 @@
             <a:avLst/>
           </a:prstGeom>
           <a:noFill/>
-          <a:ln/>
         </p:spPr>
         <p:txBody>
           <a:bodyPr wrap="square" rtlCol="0" anchor="ctr"/>
           <a:lstStyle/>
           <a:p>
-            <a:pPr algn="l" indent="0" marL="0">
+            <a:pPr marL="0" indent="0" algn="l">
               <a:buNone/>
             </a:pPr>
             <a:r>
@@ -7743,9 +7945,9 @@
                 <a:solidFill>
                   <a:srgbClr val="1F4E9C"/>
                 </a:solidFill>
-                <a:latin typeface="微软雅黑" pitchFamily="34" charset="0"/>
-                <a:ea typeface="微软雅黑" pitchFamily="34" charset="-122"/>
-                <a:cs typeface="微软雅黑" pitchFamily="34" charset="-120"/>
+                <a:latin typeface="微软雅黑" panose="020B0503020204020204" pitchFamily="34" charset="-122"/>
+                <a:ea typeface="微软雅黑" panose="020B0503020204020204" pitchFamily="34" charset="-122"/>
+                <a:cs typeface="微软雅黑" panose="020B0503020204020204" pitchFamily="34" charset="-120"/>
               </a:rPr>
               <a:t>树 · 存储</a:t>
             </a:r>
@@ -7768,13 +7970,12 @@
             <a:avLst/>
           </a:prstGeom>
           <a:noFill/>
-          <a:ln/>
         </p:spPr>
         <p:txBody>
           <a:bodyPr wrap="square" rtlCol="0" anchor="ctr"/>
           <a:lstStyle/>
           <a:p>
-            <a:pPr algn="l" indent="0" marL="0">
+            <a:pPr marL="0" indent="0" algn="l">
               <a:buNone/>
             </a:pPr>
             <a:r>
@@ -7782,9 +7983,9 @@
                 <a:solidFill>
                   <a:srgbClr val="1F2329"/>
                 </a:solidFill>
-                <a:latin typeface="微软雅黑" pitchFamily="34" charset="0"/>
-                <a:ea typeface="微软雅黑" pitchFamily="34" charset="-122"/>
-                <a:cs typeface="微软雅黑" pitchFamily="34" charset="-120"/>
+                <a:latin typeface="微软雅黑" panose="020B0503020204020204" pitchFamily="34" charset="-122"/>
+                <a:ea typeface="微软雅黑" panose="020B0503020204020204" pitchFamily="34" charset="-122"/>
+                <a:cs typeface="微软雅黑" panose="020B0503020204020204" pitchFamily="34" charset="-120"/>
               </a:rPr>
               <a:t>树的孩子兄弟存储</a:t>
             </a:r>
@@ -7809,7 +8010,6 @@
           <a:solidFill>
             <a:srgbClr val="F7F9FC"/>
           </a:solidFill>
-          <a:ln/>
         </p:spPr>
       </p:sp>
       <p:sp>
@@ -7829,7 +8029,6 @@
           <a:solidFill>
             <a:srgbClr val="1F4E9C"/>
           </a:solidFill>
-          <a:ln/>
         </p:spPr>
       </p:sp>
       <p:sp>
@@ -7847,13 +8046,12 @@
             <a:avLst/>
           </a:prstGeom>
           <a:noFill/>
-          <a:ln/>
         </p:spPr>
         <p:txBody>
           <a:bodyPr wrap="square" rtlCol="0" anchor="t"/>
           <a:lstStyle/>
           <a:p>
-            <a:pPr algn="l" indent="0" marL="0">
+            <a:pPr marL="0" indent="0" algn="l">
               <a:lnSpc>
                 <a:spcPct val="125000"/>
               </a:lnSpc>
@@ -7864,9 +8062,9 @@
                 <a:solidFill>
                   <a:srgbClr val="1F2329"/>
                 </a:solidFill>
-                <a:latin typeface="Consolas" pitchFamily="34" charset="0"/>
-                <a:ea typeface="Consolas" pitchFamily="34" charset="-122"/>
-                <a:cs typeface="Consolas" pitchFamily="34" charset="-120"/>
+                <a:latin typeface="Consolas" panose="020B0609020204030204" pitchFamily="34" charset="0"/>
+                <a:ea typeface="Consolas" panose="020B0609020204030204" pitchFamily="34" charset="-122"/>
+                <a:cs typeface="Consolas" panose="020B0609020204030204" pitchFamily="34" charset="-120"/>
               </a:rPr>
               <a:t>typedef struct CSNode{
     int data;
@@ -7893,13 +8091,12 @@
             <a:avLst/>
           </a:prstGeom>
           <a:noFill/>
-          <a:ln/>
         </p:spPr>
         <p:txBody>
           <a:bodyPr wrap="square" rtlCol="0" anchor="t"/>
           <a:lstStyle/>
           <a:p>
-            <a:pPr algn="l" indent="0" marL="0">
+            <a:pPr marL="0" indent="0" algn="l">
               <a:lnSpc>
                 <a:spcPct val="115000"/>
               </a:lnSpc>
@@ -7910,25 +8107,68 @@
                 <a:solidFill>
                   <a:srgbClr val="1F4E9C"/>
                 </a:solidFill>
-                <a:latin typeface="微软雅黑" pitchFamily="34" charset="0"/>
-                <a:ea typeface="微软雅黑" pitchFamily="34" charset="-122"/>
-                <a:cs typeface="微软雅黑" pitchFamily="34" charset="-120"/>
+                <a:latin typeface="微软雅黑" panose="020B0503020204020204" pitchFamily="34" charset="-122"/>
+                <a:ea typeface="微软雅黑" panose="020B0503020204020204" pitchFamily="34" charset="-122"/>
+                <a:cs typeface="微软雅黑" panose="020B0503020204020204" pitchFamily="34" charset="-120"/>
               </a:rPr>
               <a:t>•  </a:t>
             </a:r>
-            <a:pPr algn="l" indent="0" marL="0">
+            <a:r>
+              <a:rPr lang="en-US" sz="1800" dirty="0">
+                <a:solidFill>
+                  <a:srgbClr val="000000"/>
+                </a:solidFill>
+              </a:rPr>
+              <a:t>一般的树每个结点孩子数不定，用孩子兄弟表示法：只记第一个孩子和下一个兄弟</a:t>
+            </a:r>
+            <a:endParaRPr lang="en-US" sz="1800" dirty="0"/>
+          </a:p>
+        </p:txBody>
+      </p:sp>
+      <p:sp>
+        <p:nvSpPr>
+          <p:cNvPr id="9" name="Text 7"/>
+          <p:cNvSpPr/>
+          <p:nvPr/>
+        </p:nvSpPr>
+        <p:spPr>
+          <a:xfrm>
+            <a:off x="896112" y="4576572"/>
+            <a:ext cx="10454335" cy="397764"/>
+          </a:xfrm>
+          <a:prstGeom prst="rect">
+            <a:avLst/>
+          </a:prstGeom>
+          <a:noFill/>
+        </p:spPr>
+        <p:txBody>
+          <a:bodyPr wrap="square" rtlCol="0" anchor="t"/>
+          <a:lstStyle/>
+          <a:p>
+            <a:pPr marL="0" indent="0" algn="l">
               <a:lnSpc>
                 <a:spcPct val="115000"/>
               </a:lnSpc>
               <a:buNone/>
             </a:pPr>
             <a:r>
+              <a:rPr lang="en-US" sz="1800" b="1" dirty="0">
+                <a:solidFill>
+                  <a:srgbClr val="1F4E9C"/>
+                </a:solidFill>
+                <a:latin typeface="微软雅黑" panose="020B0503020204020204" pitchFamily="34" charset="-122"/>
+                <a:ea typeface="微软雅黑" panose="020B0503020204020204" pitchFamily="34" charset="-122"/>
+                <a:cs typeface="微软雅黑" panose="020B0503020204020204" pitchFamily="34" charset="-120"/>
+              </a:rPr>
+              <a:t>•  </a:t>
+            </a:r>
+            <a:r>
               <a:rPr lang="en-US" sz="1800" dirty="0">
                 <a:solidFill>
                   <a:srgbClr val="000000"/>
                 </a:solidFill>
               </a:rPr>
-              <a:t>一般的树每个结点孩子数不定，用孩子兄弟表示法：只记第一个孩子和下一个兄弟</a:t>
+              <a:t>这个结构和上一节的二叉链表形状一样（都是两个指针），所以一棵树能唯一对应一棵二叉树</a:t>
             </a:r>
             <a:endParaRPr lang="en-US" sz="1800" dirty="0"/>
           </a:p>
@@ -7936,26 +8176,25 @@
       </p:sp>
       <p:sp>
         <p:nvSpPr>
-          <p:cNvPr id="9" name="Text 7"/>
-          <p:cNvSpPr/>
-          <p:nvPr/>
-        </p:nvSpPr>
-        <p:spPr>
-          <a:xfrm>
-            <a:off x="896112" y="4576572"/>
-            <a:ext cx="10454335" cy="397764"/>
-          </a:xfrm>
-          <a:prstGeom prst="rect">
-            <a:avLst/>
-          </a:prstGeom>
-          <a:noFill/>
-          <a:ln/>
+          <p:cNvPr id="10" name="Text 8"/>
+          <p:cNvSpPr/>
+          <p:nvPr/>
+        </p:nvSpPr>
+        <p:spPr>
+          <a:xfrm>
+            <a:off x="896112" y="5047488"/>
+            <a:ext cx="10454335" cy="740664"/>
+          </a:xfrm>
+          <a:prstGeom prst="rect">
+            <a:avLst/>
+          </a:prstGeom>
+          <a:noFill/>
         </p:spPr>
         <p:txBody>
           <a:bodyPr wrap="square" rtlCol="0" anchor="t"/>
           <a:lstStyle/>
           <a:p>
-            <a:pPr algn="l" indent="0" marL="0">
+            <a:pPr marL="0" indent="0" algn="l">
               <a:lnSpc>
                 <a:spcPct val="115000"/>
               </a:lnSpc>
@@ -7966,74 +8205,12 @@
                 <a:solidFill>
                   <a:srgbClr val="1F4E9C"/>
                 </a:solidFill>
-                <a:latin typeface="微软雅黑" pitchFamily="34" charset="0"/>
-                <a:ea typeface="微软雅黑" pitchFamily="34" charset="-122"/>
-                <a:cs typeface="微软雅黑" pitchFamily="34" charset="-120"/>
+                <a:latin typeface="微软雅黑" panose="020B0503020204020204" pitchFamily="34" charset="-122"/>
+                <a:ea typeface="微软雅黑" panose="020B0503020204020204" pitchFamily="34" charset="-122"/>
+                <a:cs typeface="微软雅黑" panose="020B0503020204020204" pitchFamily="34" charset="-120"/>
               </a:rPr>
               <a:t>•  </a:t>
             </a:r>
-            <a:pPr algn="l" indent="0" marL="0">
-              <a:lnSpc>
-                <a:spcPct val="115000"/>
-              </a:lnSpc>
-              <a:buNone/>
-            </a:pPr>
-            <a:r>
-              <a:rPr lang="en-US" sz="1800" dirty="0">
-                <a:solidFill>
-                  <a:srgbClr val="000000"/>
-                </a:solidFill>
-              </a:rPr>
-              <a:t>这个结构和上一节的二叉链表形状一样（都是两个指针），所以一棵树能唯一对应一棵二叉树</a:t>
-            </a:r>
-            <a:endParaRPr lang="en-US" sz="1800" dirty="0"/>
-          </a:p>
-        </p:txBody>
-      </p:sp>
-      <p:sp>
-        <p:nvSpPr>
-          <p:cNvPr id="10" name="Text 8"/>
-          <p:cNvSpPr/>
-          <p:nvPr/>
-        </p:nvSpPr>
-        <p:spPr>
-          <a:xfrm>
-            <a:off x="896112" y="5047488"/>
-            <a:ext cx="10454335" cy="740664"/>
-          </a:xfrm>
-          <a:prstGeom prst="rect">
-            <a:avLst/>
-          </a:prstGeom>
-          <a:noFill/>
-          <a:ln/>
-        </p:spPr>
-        <p:txBody>
-          <a:bodyPr wrap="square" rtlCol="0" anchor="t"/>
-          <a:lstStyle/>
-          <a:p>
-            <a:pPr algn="l" indent="0" marL="0">
-              <a:lnSpc>
-                <a:spcPct val="115000"/>
-              </a:lnSpc>
-              <a:buNone/>
-            </a:pPr>
-            <a:r>
-              <a:rPr lang="en-US" sz="1800" b="1" dirty="0">
-                <a:solidFill>
-                  <a:srgbClr val="1F4E9C"/>
-                </a:solidFill>
-                <a:latin typeface="微软雅黑" pitchFamily="34" charset="0"/>
-                <a:ea typeface="微软雅黑" pitchFamily="34" charset="-122"/>
-                <a:cs typeface="微软雅黑" pitchFamily="34" charset="-120"/>
-              </a:rPr>
-              <a:t>•  </a:t>
-            </a:r>
-            <a:pPr algn="l" indent="0" marL="0">
-              <a:lnSpc>
-                <a:spcPct val="115000"/>
-              </a:lnSpc>
-              <a:buNone/>
-            </a:pPr>
             <a:r>
               <a:rPr lang="en-US" sz="1800" dirty="0">
                 <a:solidFill>
@@ -8097,7 +8274,7 @@
     </a:clrScheme>
     <a:fontScheme name="Office">
       <a:majorFont>
-        <a:latin typeface="Calibri Light" panose="020F0302020204030204"/>
+        <a:latin typeface="Calibri Light"/>
         <a:ea typeface=""/>
         <a:cs typeface=""/>
         <a:font script="Jpan" typeface="游ゴシック Light"/>
@@ -8130,26 +8307,9 @@
         <a:font script="Viet" typeface="Times New Roman"/>
         <a:font script="Uigh" typeface="Microsoft Uighur"/>
         <a:font script="Geor" typeface="Sylfaen"/>
-        <a:font script="Armn" typeface="Arial"/>
-        <a:font script="Bugi" typeface="Leelawadee UI"/>
-        <a:font script="Bopo" typeface="Microsoft JhengHei"/>
-        <a:font script="Java" typeface="Javanese Text"/>
-        <a:font script="Lisu" typeface="Segoe UI"/>
-        <a:font script="Mymr" typeface="Myanmar Text"/>
-        <a:font script="Nkoo" typeface="Ebrima"/>
-        <a:font script="Olck" typeface="Nirmala UI"/>
-        <a:font script="Osma" typeface="Ebrima"/>
-        <a:font script="Phag" typeface="Phagspa"/>
-        <a:font script="Syrn" typeface="Estrangelo Edessa"/>
-        <a:font script="Syrj" typeface="Estrangelo Edessa"/>
-        <a:font script="Syre" typeface="Estrangelo Edessa"/>
-        <a:font script="Sora" typeface="Nirmala UI"/>
-        <a:font script="Tale" typeface="Microsoft Tai Le"/>
-        <a:font script="Talu" typeface="Microsoft New Tai Lue"/>
-        <a:font script="Tfng" typeface="Ebrima"/>
       </a:majorFont>
       <a:minorFont>
-        <a:latin typeface="Calibri" panose="020F0502020204030204"/>
+        <a:latin typeface="Calibri"/>
         <a:ea typeface=""/>
         <a:cs typeface=""/>
         <a:font script="Jpan" typeface="游ゴシック"/>
@@ -8182,23 +8342,6 @@
         <a:font script="Viet" typeface="Arial"/>
         <a:font script="Uigh" typeface="Microsoft Uighur"/>
         <a:font script="Geor" typeface="Sylfaen"/>
-        <a:font script="Armn" typeface="Arial"/>
-        <a:font script="Bugi" typeface="Leelawadee UI"/>
-        <a:font script="Bopo" typeface="Microsoft JhengHei"/>
-        <a:font script="Java" typeface="Javanese Text"/>
-        <a:font script="Lisu" typeface="Segoe UI"/>
-        <a:font script="Mymr" typeface="Myanmar Text"/>
-        <a:font script="Nkoo" typeface="Ebrima"/>
-        <a:font script="Olck" typeface="Nirmala UI"/>
-        <a:font script="Osma" typeface="Ebrima"/>
-        <a:font script="Phag" typeface="Phagspa"/>
-        <a:font script="Syrn" typeface="Estrangelo Edessa"/>
-        <a:font script="Syrj" typeface="Estrangelo Edessa"/>
-        <a:font script="Syre" typeface="Estrangelo Edessa"/>
-        <a:font script="Sora" typeface="Nirmala UI"/>
-        <a:font script="Tale" typeface="Microsoft Tai Le"/>
-        <a:font script="Talu" typeface="Microsoft New Tai Lue"/>
-        <a:font script="Tfng" typeface="Ebrima"/>
       </a:minorFont>
     </a:fontScheme>
     <a:fmtScheme name="Office">
@@ -8339,8 +8482,265 @@
       </a:bgFillStyleLst>
     </a:fmtScheme>
   </a:themeElements>
-  <a:objectDefaults/>
-  <a:extraClrSchemeLst/>
+  <a:extLst>
+    <a:ext uri="{05A4C25C-085E-4340-85A3-A5531E510DB2}">
+      <thm15:themeFamily xmlns:thm15="http://schemas.microsoft.com/office/thememl/2012/main" name="Office Theme" id="{62F939B6-93AF-4DB8-9C6B-D6C7DFDC589F}" vid="{4A3C46E8-61CC-4603-A589-7422A47A8E4A}"/>
+    </a:ext>
+  </a:extLst>
+</a:theme>
+</file>
+
+<file path=ppt/theme/theme2.xml><?xml version="1.0" encoding="utf-8"?>
+<a:theme xmlns:a="http://schemas.openxmlformats.org/drawingml/2006/main" name="Office Theme">
+  <a:themeElements>
+    <a:clrScheme name="Office">
+      <a:dk1>
+        <a:sysClr val="windowText" lastClr="000000"/>
+      </a:dk1>
+      <a:lt1>
+        <a:sysClr val="window" lastClr="FFFFFF"/>
+      </a:lt1>
+      <a:dk2>
+        <a:srgbClr val="44546A"/>
+      </a:dk2>
+      <a:lt2>
+        <a:srgbClr val="E7E6E6"/>
+      </a:lt2>
+      <a:accent1>
+        <a:srgbClr val="4472C4"/>
+      </a:accent1>
+      <a:accent2>
+        <a:srgbClr val="ED7D31"/>
+      </a:accent2>
+      <a:accent3>
+        <a:srgbClr val="A5A5A5"/>
+      </a:accent3>
+      <a:accent4>
+        <a:srgbClr val="FFC000"/>
+      </a:accent4>
+      <a:accent5>
+        <a:srgbClr val="5B9BD5"/>
+      </a:accent5>
+      <a:accent6>
+        <a:srgbClr val="70AD47"/>
+      </a:accent6>
+      <a:hlink>
+        <a:srgbClr val="0563C1"/>
+      </a:hlink>
+      <a:folHlink>
+        <a:srgbClr val="954F72"/>
+      </a:folHlink>
+    </a:clrScheme>
+    <a:fontScheme name="Office">
+      <a:majorFont>
+        <a:latin typeface="Calibri Light"/>
+        <a:ea typeface=""/>
+        <a:cs typeface=""/>
+        <a:font script="Jpan" typeface="游ゴシック Light"/>
+        <a:font script="Hang" typeface="맑은 고딕"/>
+        <a:font script="Hans" typeface="等线 Light"/>
+        <a:font script="Hant" typeface="新細明體"/>
+        <a:font script="Arab" typeface="Times New Roman"/>
+        <a:font script="Hebr" typeface="Times New Roman"/>
+        <a:font script="Thai" typeface="Angsana New"/>
+        <a:font script="Ethi" typeface="Nyala"/>
+        <a:font script="Beng" typeface="Vrinda"/>
+        <a:font script="Gujr" typeface="Shruti"/>
+        <a:font script="Khmr" typeface="MoolBoran"/>
+        <a:font script="Knda" typeface="Tunga"/>
+        <a:font script="Guru" typeface="Raavi"/>
+        <a:font script="Cans" typeface="Euphemia"/>
+        <a:font script="Cher" typeface="Plantagenet Cherokee"/>
+        <a:font script="Yiii" typeface="Microsoft Yi Baiti"/>
+        <a:font script="Tibt" typeface="Microsoft Himalaya"/>
+        <a:font script="Thaa" typeface="MV Boli"/>
+        <a:font script="Deva" typeface="Mangal"/>
+        <a:font script="Telu" typeface="Gautami"/>
+        <a:font script="Taml" typeface="Latha"/>
+        <a:font script="Syrc" typeface="Estrangelo Edessa"/>
+        <a:font script="Orya" typeface="Kalinga"/>
+        <a:font script="Mlym" typeface="Kartika"/>
+        <a:font script="Laoo" typeface="DokChampa"/>
+        <a:font script="Sinh" typeface="Iskoola Pota"/>
+        <a:font script="Mong" typeface="Mongolian Baiti"/>
+        <a:font script="Viet" typeface="Times New Roman"/>
+        <a:font script="Uigh" typeface="Microsoft Uighur"/>
+        <a:font script="Geor" typeface="Sylfaen"/>
+      </a:majorFont>
+      <a:minorFont>
+        <a:latin typeface="Calibri"/>
+        <a:ea typeface=""/>
+        <a:cs typeface=""/>
+        <a:font script="Jpan" typeface="游ゴシック"/>
+        <a:font script="Hang" typeface="맑은 고딕"/>
+        <a:font script="Hans" typeface="等线"/>
+        <a:font script="Hant" typeface="新細明體"/>
+        <a:font script="Arab" typeface="Arial"/>
+        <a:font script="Hebr" typeface="Arial"/>
+        <a:font script="Thai" typeface="Cordia New"/>
+        <a:font script="Ethi" typeface="Nyala"/>
+        <a:font script="Beng" typeface="Vrinda"/>
+        <a:font script="Gujr" typeface="Shruti"/>
+        <a:font script="Khmr" typeface="DaunPenh"/>
+        <a:font script="Knda" typeface="Tunga"/>
+        <a:font script="Guru" typeface="Raavi"/>
+        <a:font script="Cans" typeface="Euphemia"/>
+        <a:font script="Cher" typeface="Plantagenet Cherokee"/>
+        <a:font script="Yiii" typeface="Microsoft Yi Baiti"/>
+        <a:font script="Tibt" typeface="Microsoft Himalaya"/>
+        <a:font script="Thaa" typeface="MV Boli"/>
+        <a:font script="Deva" typeface="Mangal"/>
+        <a:font script="Telu" typeface="Gautami"/>
+        <a:font script="Taml" typeface="Latha"/>
+        <a:font script="Syrc" typeface="Estrangelo Edessa"/>
+        <a:font script="Orya" typeface="Kalinga"/>
+        <a:font script="Mlym" typeface="Kartika"/>
+        <a:font script="Laoo" typeface="DokChampa"/>
+        <a:font script="Sinh" typeface="Iskoola Pota"/>
+        <a:font script="Mong" typeface="Mongolian Baiti"/>
+        <a:font script="Viet" typeface="Arial"/>
+        <a:font script="Uigh" typeface="Microsoft Uighur"/>
+        <a:font script="Geor" typeface="Sylfaen"/>
+      </a:minorFont>
+    </a:fontScheme>
+    <a:fmtScheme name="Office">
+      <a:fillStyleLst>
+        <a:solidFill>
+          <a:schemeClr val="phClr"/>
+        </a:solidFill>
+        <a:gradFill rotWithShape="1">
+          <a:gsLst>
+            <a:gs pos="0">
+              <a:schemeClr val="phClr">
+                <a:lumMod val="110000"/>
+                <a:satMod val="105000"/>
+                <a:tint val="67000"/>
+              </a:schemeClr>
+            </a:gs>
+            <a:gs pos="50000">
+              <a:schemeClr val="phClr">
+                <a:lumMod val="105000"/>
+                <a:satMod val="103000"/>
+                <a:tint val="73000"/>
+              </a:schemeClr>
+            </a:gs>
+            <a:gs pos="100000">
+              <a:schemeClr val="phClr">
+                <a:lumMod val="105000"/>
+                <a:satMod val="109000"/>
+                <a:tint val="81000"/>
+              </a:schemeClr>
+            </a:gs>
+          </a:gsLst>
+          <a:lin ang="5400000" scaled="0"/>
+        </a:gradFill>
+        <a:gradFill rotWithShape="1">
+          <a:gsLst>
+            <a:gs pos="0">
+              <a:schemeClr val="phClr">
+                <a:satMod val="103000"/>
+                <a:lumMod val="102000"/>
+                <a:tint val="94000"/>
+              </a:schemeClr>
+            </a:gs>
+            <a:gs pos="50000">
+              <a:schemeClr val="phClr">
+                <a:satMod val="110000"/>
+                <a:lumMod val="100000"/>
+                <a:shade val="100000"/>
+              </a:schemeClr>
+            </a:gs>
+            <a:gs pos="100000">
+              <a:schemeClr val="phClr">
+                <a:lumMod val="99000"/>
+                <a:satMod val="120000"/>
+                <a:shade val="78000"/>
+              </a:schemeClr>
+            </a:gs>
+          </a:gsLst>
+          <a:lin ang="5400000" scaled="0"/>
+        </a:gradFill>
+      </a:fillStyleLst>
+      <a:lnStyleLst>
+        <a:ln w="6350" cap="flat" cmpd="sng" algn="ctr">
+          <a:solidFill>
+            <a:schemeClr val="phClr"/>
+          </a:solidFill>
+          <a:prstDash val="solid"/>
+          <a:miter lim="800000"/>
+        </a:ln>
+        <a:ln w="12700" cap="flat" cmpd="sng" algn="ctr">
+          <a:solidFill>
+            <a:schemeClr val="phClr"/>
+          </a:solidFill>
+          <a:prstDash val="solid"/>
+          <a:miter lim="800000"/>
+        </a:ln>
+        <a:ln w="19050" cap="flat" cmpd="sng" algn="ctr">
+          <a:solidFill>
+            <a:schemeClr val="phClr"/>
+          </a:solidFill>
+          <a:prstDash val="solid"/>
+          <a:miter lim="800000"/>
+        </a:ln>
+      </a:lnStyleLst>
+      <a:effectStyleLst>
+        <a:effectStyle>
+          <a:effectLst/>
+        </a:effectStyle>
+        <a:effectStyle>
+          <a:effectLst/>
+        </a:effectStyle>
+        <a:effectStyle>
+          <a:effectLst>
+            <a:outerShdw blurRad="57150" dist="19050" dir="5400000" algn="ctr" rotWithShape="0">
+              <a:srgbClr val="000000">
+                <a:alpha val="63000"/>
+              </a:srgbClr>
+            </a:outerShdw>
+          </a:effectLst>
+        </a:effectStyle>
+      </a:effectStyleLst>
+      <a:bgFillStyleLst>
+        <a:solidFill>
+          <a:schemeClr val="phClr"/>
+        </a:solidFill>
+        <a:solidFill>
+          <a:schemeClr val="phClr">
+            <a:tint val="95000"/>
+            <a:satMod val="170000"/>
+          </a:schemeClr>
+        </a:solidFill>
+        <a:gradFill rotWithShape="1">
+          <a:gsLst>
+            <a:gs pos="0">
+              <a:schemeClr val="phClr">
+                <a:tint val="93000"/>
+                <a:satMod val="150000"/>
+                <a:shade val="98000"/>
+                <a:lumMod val="102000"/>
+              </a:schemeClr>
+            </a:gs>
+            <a:gs pos="50000">
+              <a:schemeClr val="phClr">
+                <a:tint val="98000"/>
+                <a:satMod val="130000"/>
+                <a:shade val="90000"/>
+                <a:lumMod val="103000"/>
+              </a:schemeClr>
+            </a:gs>
+            <a:gs pos="100000">
+              <a:schemeClr val="phClr">
+                <a:shade val="63000"/>
+                <a:satMod val="120000"/>
+              </a:schemeClr>
+            </a:gs>
+          </a:gsLst>
+          <a:lin ang="5400000" scaled="0"/>
+        </a:gradFill>
+      </a:bgFillStyleLst>
+    </a:fmtScheme>
+  </a:themeElements>
   <a:extLst>
     <a:ext uri="{05A4C25C-085E-4340-85A3-A5531E510DB2}">
       <thm15:themeFamily xmlns:thm15="http://schemas.microsoft.com/office/thememl/2012/main" name="Office Theme" id="{62F939B6-93AF-4DB8-9C6B-D6C7DFDC589F}" vid="{4A3C46E8-61CC-4603-A589-7422A47A8E4A}"/>
